--- a/slides/CSC336-Lecture-03-HTML-and-HTML5-Fundamentals.pptx
+++ b/slides/CSC336-Lecture-03-HTML-and-HTML5-Fundamentals.pptx
@@ -3639,13 +3639,14 @@
         </p:nvPicPr>
         <p:blipFill>
           <a:blip r:embed="rId1"/>
-          <a:srcRect l="0" r="0" t="0" b="0"/>
-          <a:stretch/>
+          <a:stretch>
+            <a:fillRect/>
+          </a:stretch>
         </p:blipFill>
         <p:spPr>
           <a:xfrm>
-            <a:off x="640080" y="2331720"/>
-            <a:ext cx="10911535" cy="3840480"/>
+            <a:off x="896830" y="2331720"/>
+            <a:ext cx="10398034" cy="3840480"/>
           </a:xfrm>
           <a:prstGeom prst="rect">
             <a:avLst/>
@@ -3923,13 +3924,14 @@
         </p:nvPicPr>
         <p:blipFill>
           <a:blip r:embed="rId1"/>
-          <a:srcRect l="0" r="0" t="0" b="0"/>
-          <a:stretch/>
+          <a:stretch>
+            <a:fillRect/>
+          </a:stretch>
         </p:blipFill>
         <p:spPr>
           <a:xfrm>
-            <a:off x="640080" y="2331720"/>
-            <a:ext cx="10911535" cy="3840480"/>
+            <a:off x="3205521" y="2331720"/>
+            <a:ext cx="5780653" cy="3840480"/>
           </a:xfrm>
           <a:prstGeom prst="rect">
             <a:avLst/>
@@ -4207,13 +4209,14 @@
         </p:nvPicPr>
         <p:blipFill>
           <a:blip r:embed="rId1"/>
-          <a:srcRect l="0" r="0" t="0" b="0"/>
-          <a:stretch/>
+          <a:stretch>
+            <a:fillRect/>
+          </a:stretch>
         </p:blipFill>
         <p:spPr>
           <a:xfrm>
-            <a:off x="640080" y="2331720"/>
-            <a:ext cx="10911535" cy="3840480"/>
+            <a:off x="640080" y="2653293"/>
+            <a:ext cx="10911535" cy="3197334"/>
           </a:xfrm>
           <a:prstGeom prst="rect">
             <a:avLst/>
@@ -4783,13 +4786,14 @@
         </p:nvPicPr>
         <p:blipFill>
           <a:blip r:embed="rId1"/>
-          <a:srcRect l="0" r="0" t="0" b="0"/>
-          <a:stretch/>
+          <a:stretch>
+            <a:fillRect/>
+          </a:stretch>
         </p:blipFill>
         <p:spPr>
           <a:xfrm>
-            <a:off x="640080" y="2057400"/>
-            <a:ext cx="10911535" cy="4114800"/>
+            <a:off x="640080" y="3446747"/>
+            <a:ext cx="10911535" cy="1336106"/>
           </a:xfrm>
           <a:prstGeom prst="rect">
             <a:avLst/>
@@ -8826,13 +8830,14 @@
         </p:nvPicPr>
         <p:blipFill>
           <a:blip r:embed="rId1"/>
-          <a:srcRect l="0" r="0" t="0" b="0"/>
-          <a:stretch/>
+          <a:stretch>
+            <a:fillRect/>
+          </a:stretch>
         </p:blipFill>
         <p:spPr>
           <a:xfrm>
-            <a:off x="640080" y="2331720"/>
-            <a:ext cx="10911535" cy="3840480"/>
+            <a:off x="3555807" y="2331720"/>
+            <a:ext cx="5080080" cy="3840480"/>
           </a:xfrm>
           <a:prstGeom prst="rect">
             <a:avLst/>
@@ -9886,13 +9891,14 @@
         </p:nvPicPr>
         <p:blipFill>
           <a:blip r:embed="rId1"/>
-          <a:srcRect l="0" r="0" t="0" b="0"/>
-          <a:stretch/>
+          <a:stretch>
+            <a:fillRect/>
+          </a:stretch>
         </p:blipFill>
         <p:spPr>
           <a:xfrm>
-            <a:off x="640080" y="2331720"/>
-            <a:ext cx="10911535" cy="3840480"/>
+            <a:off x="2682088" y="2667000"/>
+            <a:ext cx="6827520" cy="3169920"/>
           </a:xfrm>
           <a:prstGeom prst="rect">
             <a:avLst/>
@@ -10170,13 +10176,14 @@
         </p:nvPicPr>
         <p:blipFill>
           <a:blip r:embed="rId1"/>
-          <a:srcRect l="0" r="0" t="0" b="0"/>
-          <a:stretch/>
+          <a:stretch>
+            <a:fillRect/>
+          </a:stretch>
         </p:blipFill>
         <p:spPr>
           <a:xfrm>
-            <a:off x="640080" y="2331720"/>
-            <a:ext cx="10911535" cy="3840480"/>
+            <a:off x="3989087" y="2331720"/>
+            <a:ext cx="4213520" cy="3840480"/>
           </a:xfrm>
           <a:prstGeom prst="rect">
             <a:avLst/>
@@ -10454,13 +10461,14 @@
         </p:nvPicPr>
         <p:blipFill>
           <a:blip r:embed="rId1"/>
-          <a:srcRect l="0" r="0" t="0" b="0"/>
-          <a:stretch/>
+          <a:stretch>
+            <a:fillRect/>
+          </a:stretch>
         </p:blipFill>
         <p:spPr>
           <a:xfrm>
-            <a:off x="640080" y="2331720"/>
-            <a:ext cx="10911535" cy="3840480"/>
+            <a:off x="2278228" y="2430780"/>
+            <a:ext cx="7635240" cy="3642360"/>
           </a:xfrm>
           <a:prstGeom prst="rect">
             <a:avLst/>
@@ -11189,13 +11197,14 @@
         </p:nvPicPr>
         <p:blipFill>
           <a:blip r:embed="rId1"/>
-          <a:srcRect l="0" r="0" t="0" b="0"/>
-          <a:stretch/>
+          <a:stretch>
+            <a:fillRect/>
+          </a:stretch>
         </p:blipFill>
         <p:spPr>
           <a:xfrm>
-            <a:off x="640080" y="2331720"/>
-            <a:ext cx="10911535" cy="3840480"/>
+            <a:off x="2628072" y="2331720"/>
+            <a:ext cx="6935550" cy="3840480"/>
           </a:xfrm>
           <a:prstGeom prst="rect">
             <a:avLst/>
@@ -13546,13 +13555,14 @@
         </p:nvPicPr>
         <p:blipFill>
           <a:blip r:embed="rId1"/>
-          <a:srcRect l="0" r="0" t="0" b="0"/>
-          <a:stretch/>
+          <a:stretch>
+            <a:fillRect/>
+          </a:stretch>
         </p:blipFill>
         <p:spPr>
           <a:xfrm>
-            <a:off x="640080" y="2331720"/>
-            <a:ext cx="10911535" cy="3840480"/>
+            <a:off x="2788768" y="2827020"/>
+            <a:ext cx="6614160" cy="2849880"/>
           </a:xfrm>
           <a:prstGeom prst="rect">
             <a:avLst/>
@@ -14915,13 +14925,14 @@
         </p:nvPicPr>
         <p:blipFill>
           <a:blip r:embed="rId1"/>
-          <a:srcRect l="0" r="0" t="0" b="0"/>
-          <a:stretch/>
+          <a:stretch>
+            <a:fillRect/>
+          </a:stretch>
         </p:blipFill>
         <p:spPr>
           <a:xfrm>
-            <a:off x="640080" y="2331720"/>
-            <a:ext cx="10911535" cy="3840480"/>
+            <a:off x="640080" y="3486556"/>
+            <a:ext cx="10911535" cy="1530807"/>
           </a:xfrm>
           <a:prstGeom prst="rect">
             <a:avLst/>
@@ -16231,13 +16242,14 @@
         </p:nvPicPr>
         <p:blipFill>
           <a:blip r:embed="rId1"/>
-          <a:srcRect l="0" r="0" t="0" b="0"/>
-          <a:stretch/>
+          <a:stretch>
+            <a:fillRect/>
+          </a:stretch>
         </p:blipFill>
         <p:spPr>
           <a:xfrm>
-            <a:off x="640080" y="2331720"/>
-            <a:ext cx="10911535" cy="3840480"/>
+            <a:off x="640080" y="2942431"/>
+            <a:ext cx="10911535" cy="2619059"/>
           </a:xfrm>
           <a:prstGeom prst="rect">
             <a:avLst/>

--- a/slides/CSC336-Lecture-03-HTML-and-HTML5-Fundamentals.pptx
+++ b/slides/CSC336-Lecture-03-HTML-and-HTML5-Fundamentals.pptx
@@ -4010,11 +4010,11 @@
         <p:spPr>
           <a:xfrm>
             <a:off x="640080" y="1965960"/>
-            <a:ext cx="10911535" cy="2304288"/>
+            <a:ext cx="10911535" cy="1977390"/>
           </a:xfrm>
           <a:prstGeom prst="roundRect">
             <a:avLst>
-              <a:gd name="adj" fmla="val 3175"/>
+              <a:gd name="adj" fmla="val 3699"/>
             </a:avLst>
           </a:prstGeom>
           <a:solidFill>
@@ -4032,7 +4032,7 @@
         <p:spPr>
           <a:xfrm>
             <a:off x="960120" y="2194560"/>
-            <a:ext cx="10271455" cy="1847088"/>
+            <a:ext cx="10271455" cy="1520190"/>
           </a:xfrm>
           <a:prstGeom prst="rect">
             <a:avLst/>
@@ -4162,12 +4162,12 @@
         </p:nvSpPr>
         <p:spPr>
           <a:xfrm>
-            <a:off x="530352" y="4434840"/>
-            <a:ext cx="11130991" cy="1892808"/>
+            <a:off x="530352" y="4107942"/>
+            <a:ext cx="11130991" cy="2219706"/>
           </a:xfrm>
           <a:prstGeom prst="roundRect">
             <a:avLst>
-              <a:gd name="adj" fmla="val 2899"/>
+              <a:gd name="adj" fmla="val 2472"/>
             </a:avLst>
           </a:prstGeom>
           <a:solidFill>
@@ -4204,8 +4204,8 @@
         </p:blipFill>
         <p:spPr>
           <a:xfrm>
-            <a:off x="2610084" y="4544568"/>
-            <a:ext cx="6971527" cy="1673352"/>
+            <a:off x="1929122" y="4217670"/>
+            <a:ext cx="8333452" cy="2000250"/>
           </a:xfrm>
           <a:prstGeom prst="rect">
             <a:avLst/>
@@ -5632,11 +5632,11 @@
         <p:spPr>
           <a:xfrm>
             <a:off x="640080" y="1965960"/>
-            <a:ext cx="10911535" cy="2304288"/>
+            <a:ext cx="10911535" cy="1977390"/>
           </a:xfrm>
           <a:prstGeom prst="roundRect">
             <a:avLst>
-              <a:gd name="adj" fmla="val 3175"/>
+              <a:gd name="adj" fmla="val 3699"/>
             </a:avLst>
           </a:prstGeom>
           <a:solidFill>
@@ -5654,7 +5654,7 @@
         <p:spPr>
           <a:xfrm>
             <a:off x="960120" y="2194560"/>
-            <a:ext cx="10271455" cy="1847088"/>
+            <a:ext cx="10271455" cy="1520190"/>
           </a:xfrm>
           <a:prstGeom prst="rect">
             <a:avLst/>
@@ -5795,12 +5795,12 @@
         </p:nvSpPr>
         <p:spPr>
           <a:xfrm>
-            <a:off x="530352" y="4434840"/>
-            <a:ext cx="11130991" cy="1892808"/>
+            <a:off x="530352" y="4107942"/>
+            <a:ext cx="11130991" cy="2219706"/>
           </a:xfrm>
           <a:prstGeom prst="roundRect">
             <a:avLst>
-              <a:gd name="adj" fmla="val 2899"/>
+              <a:gd name="adj" fmla="val 2472"/>
             </a:avLst>
           </a:prstGeom>
           <a:solidFill>
@@ -5837,8 +5837,8 @@
         </p:blipFill>
         <p:spPr>
           <a:xfrm>
-            <a:off x="3830562" y="4544568"/>
-            <a:ext cx="4530572" cy="1673352"/>
+            <a:off x="3388026" y="4217670"/>
+            <a:ext cx="5415643" cy="2000250"/>
           </a:xfrm>
           <a:prstGeom prst="rect">
             <a:avLst/>
@@ -6042,11 +6042,11 @@
         <p:spPr>
           <a:xfrm>
             <a:off x="640080" y="1965960"/>
-            <a:ext cx="10911535" cy="1426464"/>
+            <a:ext cx="10911535" cy="1263015"/>
           </a:xfrm>
           <a:prstGeom prst="roundRect">
             <a:avLst>
-              <a:gd name="adj" fmla="val 5128"/>
+              <a:gd name="adj" fmla="val 5792"/>
             </a:avLst>
           </a:prstGeom>
           <a:solidFill>
@@ -6064,7 +6064,7 @@
         <p:spPr>
           <a:xfrm>
             <a:off x="960120" y="2194560"/>
-            <a:ext cx="10271455" cy="969264"/>
+            <a:ext cx="10271455" cy="805815"/>
           </a:xfrm>
           <a:prstGeom prst="rect">
             <a:avLst/>
@@ -6145,12 +6145,12 @@
         </p:nvSpPr>
         <p:spPr>
           <a:xfrm>
-            <a:off x="530352" y="3557016"/>
-            <a:ext cx="11130991" cy="2770632"/>
+            <a:off x="530352" y="3393567"/>
+            <a:ext cx="11130991" cy="2934081"/>
           </a:xfrm>
           <a:prstGeom prst="roundRect">
             <a:avLst>
-              <a:gd name="adj" fmla="val 1980"/>
+              <a:gd name="adj" fmla="val 1870"/>
             </a:avLst>
           </a:prstGeom>
           <a:solidFill>
@@ -6187,8 +6187,8 @@
         </p:blipFill>
         <p:spPr>
           <a:xfrm>
-            <a:off x="4175845" y="3666744"/>
-            <a:ext cx="3840005" cy="2551176"/>
+            <a:off x="4052834" y="3503295"/>
+            <a:ext cx="4086027" cy="2714625"/>
           </a:xfrm>
           <a:prstGeom prst="rect">
             <a:avLst/>
@@ -6392,11 +6392,11 @@
         <p:spPr>
           <a:xfrm>
             <a:off x="640080" y="1965960"/>
-            <a:ext cx="10911535" cy="2304288"/>
+            <a:ext cx="10911535" cy="1977390"/>
           </a:xfrm>
           <a:prstGeom prst="roundRect">
             <a:avLst>
-              <a:gd name="adj" fmla="val 3175"/>
+              <a:gd name="adj" fmla="val 3699"/>
             </a:avLst>
           </a:prstGeom>
           <a:solidFill>
@@ -6414,7 +6414,7 @@
         <p:spPr>
           <a:xfrm>
             <a:off x="960120" y="2194560"/>
-            <a:ext cx="10271455" cy="1847088"/>
+            <a:ext cx="10271455" cy="1520190"/>
           </a:xfrm>
           <a:prstGeom prst="rect">
             <a:avLst/>
@@ -6555,12 +6555,12 @@
         </p:nvSpPr>
         <p:spPr>
           <a:xfrm>
-            <a:off x="530352" y="4434840"/>
-            <a:ext cx="11130991" cy="1892808"/>
+            <a:off x="530352" y="4107942"/>
+            <a:ext cx="11130991" cy="2219706"/>
           </a:xfrm>
           <a:prstGeom prst="roundRect">
             <a:avLst>
-              <a:gd name="adj" fmla="val 2899"/>
+              <a:gd name="adj" fmla="val 2472"/>
             </a:avLst>
           </a:prstGeom>
           <a:solidFill>
@@ -6597,8 +6597,8 @@
         </p:blipFill>
         <p:spPr>
           <a:xfrm>
-            <a:off x="3240525" y="4544568"/>
-            <a:ext cx="5710646" cy="1673352"/>
+            <a:off x="2682723" y="4217670"/>
+            <a:ext cx="6826250" cy="2000250"/>
           </a:xfrm>
           <a:prstGeom prst="rect">
             <a:avLst/>
@@ -6802,11 +6802,11 @@
         <p:spPr>
           <a:xfrm>
             <a:off x="640080" y="1965960"/>
-            <a:ext cx="10911535" cy="1426464"/>
+            <a:ext cx="10911535" cy="1263015"/>
           </a:xfrm>
           <a:prstGeom prst="roundRect">
             <a:avLst>
-              <a:gd name="adj" fmla="val 5128"/>
+              <a:gd name="adj" fmla="val 5792"/>
             </a:avLst>
           </a:prstGeom>
           <a:solidFill>
@@ -6824,7 +6824,7 @@
         <p:spPr>
           <a:xfrm>
             <a:off x="960120" y="2194560"/>
-            <a:ext cx="10271455" cy="969264"/>
+            <a:ext cx="10271455" cy="805815"/>
           </a:xfrm>
           <a:prstGeom prst="rect">
             <a:avLst/>
@@ -6905,12 +6905,12 @@
         </p:nvSpPr>
         <p:spPr>
           <a:xfrm>
-            <a:off x="530352" y="3557016"/>
-            <a:ext cx="11130991" cy="2770632"/>
+            <a:off x="530352" y="3393567"/>
+            <a:ext cx="11130991" cy="2934081"/>
           </a:xfrm>
           <a:prstGeom prst="roundRect">
             <a:avLst>
-              <a:gd name="adj" fmla="val 1980"/>
+              <a:gd name="adj" fmla="val 1870"/>
             </a:avLst>
           </a:prstGeom>
           <a:solidFill>
@@ -6947,7 +6947,7 @@
         </p:blipFill>
         <p:spPr>
           <a:xfrm>
-            <a:off x="640080" y="4274279"/>
+            <a:off x="640080" y="4192554"/>
             <a:ext cx="10911535" cy="1336106"/>
           </a:xfrm>
           <a:prstGeom prst="rect">
@@ -8760,11 +8760,11 @@
         <p:spPr>
           <a:xfrm>
             <a:off x="640080" y="1965960"/>
-            <a:ext cx="10911535" cy="2377440"/>
+            <a:ext cx="10911535" cy="2453640"/>
           </a:xfrm>
           <a:prstGeom prst="roundRect">
             <a:avLst>
-              <a:gd name="adj" fmla="val 3077"/>
+              <a:gd name="adj" fmla="val 2981"/>
             </a:avLst>
           </a:prstGeom>
           <a:solidFill>
@@ -8782,7 +8782,7 @@
         <p:spPr>
           <a:xfrm>
             <a:off x="960120" y="2194560"/>
-            <a:ext cx="10271455" cy="1920240"/>
+            <a:ext cx="10271455" cy="1996440"/>
           </a:xfrm>
           <a:prstGeom prst="rect">
             <a:avLst/>
@@ -8963,12 +8963,12 @@
         </p:nvSpPr>
         <p:spPr>
           <a:xfrm>
-            <a:off x="530352" y="4507992"/>
-            <a:ext cx="11130991" cy="1819656"/>
+            <a:off x="530352" y="4584192"/>
+            <a:ext cx="11130991" cy="1743456"/>
           </a:xfrm>
           <a:prstGeom prst="roundRect">
             <a:avLst>
-              <a:gd name="adj" fmla="val 3015"/>
+              <a:gd name="adj" fmla="val 3147"/>
             </a:avLst>
           </a:prstGeom>
           <a:solidFill>
@@ -9005,8 +9005,8 @@
         </p:blipFill>
         <p:spPr>
           <a:xfrm>
-            <a:off x="4291160" y="4617720"/>
-            <a:ext cx="3609376" cy="1600200"/>
+            <a:off x="4377097" y="4693920"/>
+            <a:ext cx="3437501" cy="1524000"/>
           </a:xfrm>
           <a:prstGeom prst="rect">
             <a:avLst/>
@@ -11647,11 +11647,11 @@
         <p:spPr>
           <a:xfrm>
             <a:off x="640080" y="1965960"/>
-            <a:ext cx="10911535" cy="1426464"/>
+            <a:ext cx="10911535" cy="1263015"/>
           </a:xfrm>
           <a:prstGeom prst="roundRect">
             <a:avLst>
-              <a:gd name="adj" fmla="val 5128"/>
+              <a:gd name="adj" fmla="val 5792"/>
             </a:avLst>
           </a:prstGeom>
           <a:solidFill>
@@ -11669,7 +11669,7 @@
         <p:spPr>
           <a:xfrm>
             <a:off x="960120" y="2194560"/>
-            <a:ext cx="10271455" cy="969264"/>
+            <a:ext cx="10271455" cy="805815"/>
           </a:xfrm>
           <a:prstGeom prst="rect">
             <a:avLst/>
@@ -11750,12 +11750,12 @@
         </p:nvSpPr>
         <p:spPr>
           <a:xfrm>
-            <a:off x="530352" y="3557016"/>
-            <a:ext cx="11130991" cy="2770632"/>
+            <a:off x="530352" y="3393567"/>
+            <a:ext cx="11130991" cy="2934081"/>
           </a:xfrm>
           <a:prstGeom prst="roundRect">
             <a:avLst>
-              <a:gd name="adj" fmla="val 1980"/>
+              <a:gd name="adj" fmla="val 1870"/>
             </a:avLst>
           </a:prstGeom>
           <a:solidFill>
@@ -11792,7 +11792,7 @@
         </p:blipFill>
         <p:spPr>
           <a:xfrm>
-            <a:off x="640080" y="3860878"/>
+            <a:off x="640080" y="3779153"/>
             <a:ext cx="10911535" cy="2162909"/>
           </a:xfrm>
           <a:prstGeom prst="rect">
@@ -12487,11 +12487,11 @@
         <p:spPr>
           <a:xfrm>
             <a:off x="640080" y="1965960"/>
-            <a:ext cx="10911535" cy="2011680"/>
+            <a:ext cx="10911535" cy="1739265"/>
           </a:xfrm>
           <a:prstGeom prst="roundRect">
             <a:avLst>
-              <a:gd name="adj" fmla="val 3636"/>
+              <a:gd name="adj" fmla="val 4206"/>
             </a:avLst>
           </a:prstGeom>
           <a:solidFill>
@@ -12509,7 +12509,7 @@
         <p:spPr>
           <a:xfrm>
             <a:off x="960120" y="2194560"/>
-            <a:ext cx="10271455" cy="1554480"/>
+            <a:ext cx="10271455" cy="1282065"/>
           </a:xfrm>
           <a:prstGeom prst="rect">
             <a:avLst/>
@@ -12630,12 +12630,12 @@
         </p:nvSpPr>
         <p:spPr>
           <a:xfrm>
-            <a:off x="530352" y="4142232"/>
-            <a:ext cx="11130991" cy="2185416"/>
+            <a:off x="530352" y="3869817"/>
+            <a:ext cx="11130991" cy="2457831"/>
           </a:xfrm>
           <a:prstGeom prst="roundRect">
             <a:avLst>
-              <a:gd name="adj" fmla="val 2510"/>
+              <a:gd name="adj" fmla="val 2232"/>
             </a:avLst>
           </a:prstGeom>
           <a:solidFill>
@@ -12672,8 +12672,8 @@
         </p:blipFill>
         <p:spPr>
           <a:xfrm>
-            <a:off x="4795589" y="4251960"/>
-            <a:ext cx="2600517" cy="1965960"/>
+            <a:off x="4615417" y="3979545"/>
+            <a:ext cx="2960860" cy="2238375"/>
           </a:xfrm>
           <a:prstGeom prst="rect">
             <a:avLst/>
@@ -12877,11 +12877,11 @@
         <p:spPr>
           <a:xfrm>
             <a:off x="640080" y="1965960"/>
-            <a:ext cx="10911535" cy="841248"/>
+            <a:ext cx="10911535" cy="786765"/>
           </a:xfrm>
           <a:prstGeom prst="roundRect">
             <a:avLst>
-              <a:gd name="adj" fmla="val 8696"/>
+              <a:gd name="adj" fmla="val 9298"/>
             </a:avLst>
           </a:prstGeom>
           <a:solidFill>
@@ -12899,7 +12899,7 @@
         <p:spPr>
           <a:xfrm>
             <a:off x="960120" y="2194560"/>
-            <a:ext cx="10271455" cy="384048"/>
+            <a:ext cx="10271455" cy="329565"/>
           </a:xfrm>
           <a:prstGeom prst="rect">
             <a:avLst/>
@@ -12940,12 +12940,12 @@
         </p:nvSpPr>
         <p:spPr>
           <a:xfrm>
-            <a:off x="530352" y="2971800"/>
-            <a:ext cx="11130991" cy="3355848"/>
+            <a:off x="530352" y="2917317"/>
+            <a:ext cx="11130991" cy="3410331"/>
           </a:xfrm>
           <a:prstGeom prst="roundRect">
             <a:avLst>
-              <a:gd name="adj" fmla="val 1635"/>
+              <a:gd name="adj" fmla="val 1609"/>
             </a:avLst>
           </a:prstGeom>
           <a:solidFill>
@@ -12982,8 +12982,8 @@
         </p:blipFill>
         <p:spPr>
           <a:xfrm>
-            <a:off x="2718195" y="3081528"/>
-            <a:ext cx="6755306" cy="3136392"/>
+            <a:off x="2682088" y="3037522"/>
+            <a:ext cx="6827520" cy="3169920"/>
           </a:xfrm>
           <a:prstGeom prst="rect">
             <a:avLst/>
@@ -13187,11 +13187,11 @@
         <p:spPr>
           <a:xfrm>
             <a:off x="640080" y="1965960"/>
-            <a:ext cx="10911535" cy="2377440"/>
+            <a:ext cx="10911535" cy="2691765"/>
           </a:xfrm>
           <a:prstGeom prst="roundRect">
             <a:avLst>
-              <a:gd name="adj" fmla="val 3077"/>
+              <a:gd name="adj" fmla="val 2718"/>
             </a:avLst>
           </a:prstGeom>
           <a:solidFill>
@@ -13209,7 +13209,7 @@
         <p:spPr>
           <a:xfrm>
             <a:off x="960120" y="2194560"/>
-            <a:ext cx="10271455" cy="1920240"/>
+            <a:ext cx="10271455" cy="2234565"/>
           </a:xfrm>
           <a:prstGeom prst="rect">
             <a:avLst/>
@@ -13399,12 +13399,12 @@
         </p:nvSpPr>
         <p:spPr>
           <a:xfrm>
-            <a:off x="530352" y="4507992"/>
-            <a:ext cx="11130991" cy="1819656"/>
+            <a:off x="530352" y="4822317"/>
+            <a:ext cx="11130991" cy="1505331"/>
           </a:xfrm>
           <a:prstGeom prst="roundRect">
             <a:avLst>
-              <a:gd name="adj" fmla="val 3015"/>
+              <a:gd name="adj" fmla="val 3645"/>
             </a:avLst>
           </a:prstGeom>
           <a:solidFill>
@@ -13441,8 +13441,8 @@
         </p:blipFill>
         <p:spPr>
           <a:xfrm>
-            <a:off x="5218031" y="4617720"/>
-            <a:ext cx="1755633" cy="1600200"/>
+            <a:off x="5390459" y="4932045"/>
+            <a:ext cx="1410777" cy="1285875"/>
           </a:xfrm>
           <a:prstGeom prst="rect">
             <a:avLst/>
@@ -13646,11 +13646,11 @@
         <p:spPr>
           <a:xfrm>
             <a:off x="640080" y="1965960"/>
-            <a:ext cx="10911535" cy="2377440"/>
+            <a:ext cx="10911535" cy="2691765"/>
           </a:xfrm>
           <a:prstGeom prst="roundRect">
             <a:avLst>
-              <a:gd name="adj" fmla="val 3077"/>
+              <a:gd name="adj" fmla="val 2718"/>
             </a:avLst>
           </a:prstGeom>
           <a:solidFill>
@@ -13668,7 +13668,7 @@
         <p:spPr>
           <a:xfrm>
             <a:off x="960120" y="2194560"/>
-            <a:ext cx="10271455" cy="1920240"/>
+            <a:ext cx="10271455" cy="2234565"/>
           </a:xfrm>
           <a:prstGeom prst="rect">
             <a:avLst/>
@@ -13869,12 +13869,12 @@
         </p:nvSpPr>
         <p:spPr>
           <a:xfrm>
-            <a:off x="530352" y="4507992"/>
-            <a:ext cx="11130991" cy="1819656"/>
+            <a:off x="530352" y="4822317"/>
+            <a:ext cx="11130991" cy="1505331"/>
           </a:xfrm>
           <a:prstGeom prst="roundRect">
             <a:avLst>
-              <a:gd name="adj" fmla="val 3015"/>
+              <a:gd name="adj" fmla="val 3645"/>
             </a:avLst>
           </a:prstGeom>
           <a:solidFill>
@@ -13911,8 +13911,8 @@
         </p:blipFill>
         <p:spPr>
           <a:xfrm>
-            <a:off x="4418651" y="4617720"/>
-            <a:ext cx="3354394" cy="1600200"/>
+            <a:off x="4748100" y="4932045"/>
+            <a:ext cx="2695495" cy="1285875"/>
           </a:xfrm>
           <a:prstGeom prst="rect">
             <a:avLst/>
@@ -14116,11 +14116,11 @@
         <p:spPr>
           <a:xfrm>
             <a:off x="640080" y="1965960"/>
-            <a:ext cx="10911535" cy="2377440"/>
+            <a:ext cx="10911535" cy="3063240"/>
           </a:xfrm>
           <a:prstGeom prst="roundRect">
             <a:avLst>
-              <a:gd name="adj" fmla="val 3077"/>
+              <a:gd name="adj" fmla="val 2388"/>
             </a:avLst>
           </a:prstGeom>
           <a:solidFill>
@@ -14138,7 +14138,7 @@
         <p:spPr>
           <a:xfrm>
             <a:off x="960120" y="2194560"/>
-            <a:ext cx="10271455" cy="1920240"/>
+            <a:ext cx="10271455" cy="2606040"/>
           </a:xfrm>
           <a:prstGeom prst="rect">
             <a:avLst/>
@@ -14157,7 +14157,7 @@
               <a:buNone/>
             </a:pPr>
             <a:r>
-              <a:rPr lang="en-US" sz="1250" dirty="0">
+              <a:rPr lang="en-US" sz="1200" dirty="0">
                 <a:solidFill>
                   <a:srgbClr val="C9D3F5"/>
                 </a:solidFill>
@@ -14167,7 +14167,7 @@
               </a:rPr>
               <a:t>&lt;ul&gt;</a:t>
             </a:r>
-            <a:endParaRPr lang="en-US" sz="1250" dirty="0"/>
+            <a:endParaRPr lang="en-US" sz="1200" dirty="0"/>
           </a:p>
           <a:p>
             <a:pPr indent="0" marL="0">
@@ -14177,7 +14177,7 @@
               <a:buNone/>
             </a:pPr>
             <a:r>
-              <a:rPr lang="en-US" sz="1250" dirty="0">
+              <a:rPr lang="en-US" sz="1200" dirty="0">
                 <a:solidFill>
                   <a:srgbClr val="C9D3F5"/>
                 </a:solidFill>
@@ -14187,7 +14187,7 @@
               </a:rPr>
               <a:t>  &lt;li&gt;HTML&lt;/li&gt;&lt;li&gt;CSS&lt;/li&gt;&lt;li&gt;JavaScript&lt;/li&gt;</a:t>
             </a:r>
-            <a:endParaRPr lang="en-US" sz="1250" dirty="0"/>
+            <a:endParaRPr lang="en-US" sz="1200" dirty="0"/>
           </a:p>
           <a:p>
             <a:pPr indent="0" marL="0">
@@ -14197,7 +14197,7 @@
               <a:buNone/>
             </a:pPr>
             <a:r>
-              <a:rPr lang="en-US" sz="1250" dirty="0">
+              <a:rPr lang="en-US" sz="1200" dirty="0">
                 <a:solidFill>
                   <a:srgbClr val="C9D3F5"/>
                 </a:solidFill>
@@ -14207,7 +14207,7 @@
               </a:rPr>
               <a:t>&lt;/ul&gt;</a:t>
             </a:r>
-            <a:endParaRPr lang="en-US" sz="1250" dirty="0"/>
+            <a:endParaRPr lang="en-US" sz="1200" dirty="0"/>
           </a:p>
           <a:p>
             <a:pPr indent="0" marL="0">
@@ -14216,7 +14216,7 @@
               </a:lnSpc>
               <a:buNone/>
             </a:pPr>
-            <a:endParaRPr lang="en-US" sz="1250" dirty="0"/>
+            <a:endParaRPr lang="en-US" sz="1200" dirty="0"/>
           </a:p>
           <a:p>
             <a:pPr indent="0" marL="0">
@@ -14226,7 +14226,7 @@
               <a:buNone/>
             </a:pPr>
             <a:r>
-              <a:rPr lang="en-US" sz="1250" dirty="0">
+              <a:rPr lang="en-US" sz="1200" dirty="0">
                 <a:solidFill>
                   <a:srgbClr val="C9D3F5"/>
                 </a:solidFill>
@@ -14236,7 +14236,7 @@
               </a:rPr>
               <a:t>&lt;ol&gt;</a:t>
             </a:r>
-            <a:endParaRPr lang="en-US" sz="1250" dirty="0"/>
+            <a:endParaRPr lang="en-US" sz="1200" dirty="0"/>
           </a:p>
           <a:p>
             <a:pPr indent="0" marL="0">
@@ -14246,7 +14246,7 @@
               <a:buNone/>
             </a:pPr>
             <a:r>
-              <a:rPr lang="en-US" sz="1250" dirty="0">
+              <a:rPr lang="en-US" sz="1200" dirty="0">
                 <a:solidFill>
                   <a:srgbClr val="C9D3F5"/>
                 </a:solidFill>
@@ -14256,7 +14256,7 @@
               </a:rPr>
               <a:t>  &lt;li&gt;Write the HTML&lt;/li&gt;&lt;li&gt;Add CSS styling&lt;/li&gt;</a:t>
             </a:r>
-            <a:endParaRPr lang="en-US" sz="1250" dirty="0"/>
+            <a:endParaRPr lang="en-US" sz="1200" dirty="0"/>
           </a:p>
           <a:p>
             <a:pPr indent="0" marL="0">
@@ -14266,7 +14266,7 @@
               <a:buNone/>
             </a:pPr>
             <a:r>
-              <a:rPr lang="en-US" sz="1250" dirty="0">
+              <a:rPr lang="en-US" sz="1200" dirty="0">
                 <a:solidFill>
                   <a:srgbClr val="C9D3F5"/>
                 </a:solidFill>
@@ -14276,7 +14276,7 @@
               </a:rPr>
               <a:t>&lt;/ol&gt;</a:t>
             </a:r>
-            <a:endParaRPr lang="en-US" sz="1250" dirty="0"/>
+            <a:endParaRPr lang="en-US" sz="1200" dirty="0"/>
           </a:p>
           <a:p>
             <a:pPr indent="0" marL="0">
@@ -14285,7 +14285,7 @@
               </a:lnSpc>
               <a:buNone/>
             </a:pPr>
-            <a:endParaRPr lang="en-US" sz="1250" dirty="0"/>
+            <a:endParaRPr lang="en-US" sz="1200" dirty="0"/>
           </a:p>
           <a:p>
             <a:pPr indent="0" marL="0">
@@ -14295,7 +14295,7 @@
               <a:buNone/>
             </a:pPr>
             <a:r>
-              <a:rPr lang="en-US" sz="1250" dirty="0">
+              <a:rPr lang="en-US" sz="1200" dirty="0">
                 <a:solidFill>
                   <a:srgbClr val="C9D3F5"/>
                 </a:solidFill>
@@ -14305,7 +14305,7 @@
               </a:rPr>
               <a:t>&lt;dl&gt;</a:t>
             </a:r>
-            <a:endParaRPr lang="en-US" sz="1250" dirty="0"/>
+            <a:endParaRPr lang="en-US" sz="1200" dirty="0"/>
           </a:p>
           <a:p>
             <a:pPr indent="0" marL="0">
@@ -14315,7 +14315,7 @@
               <a:buNone/>
             </a:pPr>
             <a:r>
-              <a:rPr lang="en-US" sz="1250" dirty="0">
+              <a:rPr lang="en-US" sz="1200" dirty="0">
                 <a:solidFill>
                   <a:srgbClr val="C9D3F5"/>
                 </a:solidFill>
@@ -14325,7 +14325,7 @@
               </a:rPr>
               <a:t>  &lt;dt&gt;HTML&lt;/dt&gt;&lt;dd&gt;The markup language...&lt;/dd&gt;</a:t>
             </a:r>
-            <a:endParaRPr lang="en-US" sz="1250" dirty="0"/>
+            <a:endParaRPr lang="en-US" sz="1200" dirty="0"/>
           </a:p>
           <a:p>
             <a:pPr indent="0" marL="0">
@@ -14335,7 +14335,7 @@
               <a:buNone/>
             </a:pPr>
             <a:r>
-              <a:rPr lang="en-US" sz="1250" dirty="0">
+              <a:rPr lang="en-US" sz="1200" dirty="0">
                 <a:solidFill>
                   <a:srgbClr val="C9D3F5"/>
                 </a:solidFill>
@@ -14345,7 +14345,7 @@
               </a:rPr>
               <a:t>&lt;/dl&gt;</a:t>
             </a:r>
-            <a:endParaRPr lang="en-US" sz="1250" dirty="0"/>
+            <a:endParaRPr lang="en-US" sz="1200" dirty="0"/>
           </a:p>
         </p:txBody>
       </p:sp>
@@ -14357,12 +14357,12 @@
         </p:nvSpPr>
         <p:spPr>
           <a:xfrm>
-            <a:off x="530352" y="4507992"/>
-            <a:ext cx="11130991" cy="1819656"/>
+            <a:off x="530352" y="5193792"/>
+            <a:ext cx="11130991" cy="1133856"/>
           </a:xfrm>
           <a:prstGeom prst="roundRect">
             <a:avLst>
-              <a:gd name="adj" fmla="val 3015"/>
+              <a:gd name="adj" fmla="val 4839"/>
             </a:avLst>
           </a:prstGeom>
           <a:solidFill>
@@ -14399,8 +14399,8 @@
         </p:blipFill>
         <p:spPr>
           <a:xfrm>
-            <a:off x="4650941" y="4617720"/>
-            <a:ext cx="2889813" cy="1600200"/>
+            <a:off x="5270187" y="5303520"/>
+            <a:ext cx="1651322" cy="914400"/>
           </a:xfrm>
           <a:prstGeom prst="rect">
             <a:avLst/>
@@ -14604,11 +14604,11 @@
         <p:spPr>
           <a:xfrm>
             <a:off x="640080" y="1965960"/>
-            <a:ext cx="10911535" cy="2304288"/>
+            <a:ext cx="10911535" cy="1977390"/>
           </a:xfrm>
           <a:prstGeom prst="roundRect">
             <a:avLst>
-              <a:gd name="adj" fmla="val 3175"/>
+              <a:gd name="adj" fmla="val 3699"/>
             </a:avLst>
           </a:prstGeom>
           <a:solidFill>
@@ -14626,7 +14626,7 @@
         <p:spPr>
           <a:xfrm>
             <a:off x="960120" y="2194560"/>
-            <a:ext cx="10271455" cy="1847088"/>
+            <a:ext cx="10271455" cy="1520190"/>
           </a:xfrm>
           <a:prstGeom prst="rect">
             <a:avLst/>
@@ -14767,12 +14767,12 @@
         </p:nvSpPr>
         <p:spPr>
           <a:xfrm>
-            <a:off x="530352" y="4434840"/>
-            <a:ext cx="11130991" cy="1892808"/>
+            <a:off x="530352" y="4107942"/>
+            <a:ext cx="11130991" cy="2219706"/>
           </a:xfrm>
           <a:prstGeom prst="roundRect">
             <a:avLst>
-              <a:gd name="adj" fmla="val 2899"/>
+              <a:gd name="adj" fmla="val 2472"/>
             </a:avLst>
           </a:prstGeom>
           <a:solidFill>
@@ -14809,8 +14809,8 @@
         </p:blipFill>
         <p:spPr>
           <a:xfrm>
-            <a:off x="2148258" y="4544568"/>
-            <a:ext cx="7895179" cy="1673352"/>
+            <a:off x="1377076" y="4217670"/>
+            <a:ext cx="9437543" cy="2000250"/>
           </a:xfrm>
           <a:prstGeom prst="rect">
             <a:avLst/>
@@ -15014,11 +15014,11 @@
         <p:spPr>
           <a:xfrm>
             <a:off x="640080" y="1965960"/>
-            <a:ext cx="10911535" cy="2377440"/>
+            <a:ext cx="10911535" cy="3215640"/>
           </a:xfrm>
           <a:prstGeom prst="roundRect">
             <a:avLst>
-              <a:gd name="adj" fmla="val 3077"/>
+              <a:gd name="adj" fmla="val 2275"/>
             </a:avLst>
           </a:prstGeom>
           <a:solidFill>
@@ -15036,7 +15036,7 @@
         <p:spPr>
           <a:xfrm>
             <a:off x="960120" y="2194560"/>
-            <a:ext cx="10271455" cy="1920240"/>
+            <a:ext cx="10271455" cy="2758440"/>
           </a:xfrm>
           <a:prstGeom prst="rect">
             <a:avLst/>
@@ -15055,7 +15055,7 @@
               <a:buNone/>
             </a:pPr>
             <a:r>
-              <a:rPr lang="en-US" sz="1250" dirty="0">
+              <a:rPr lang="en-US" sz="1000" dirty="0">
                 <a:solidFill>
                   <a:srgbClr val="C9D3F5"/>
                 </a:solidFill>
@@ -15065,7 +15065,7 @@
               </a:rPr>
               <a:t>&lt;ul&gt;</a:t>
             </a:r>
-            <a:endParaRPr lang="en-US" sz="1250" dirty="0"/>
+            <a:endParaRPr lang="en-US" sz="1000" dirty="0"/>
           </a:p>
           <a:p>
             <a:pPr indent="0" marL="0">
@@ -15075,7 +15075,7 @@
               <a:buNone/>
             </a:pPr>
             <a:r>
-              <a:rPr lang="en-US" sz="1250" dirty="0">
+              <a:rPr lang="en-US" sz="1000" dirty="0">
                 <a:solidFill>
                   <a:srgbClr val="C9D3F5"/>
                 </a:solidFill>
@@ -15085,7 +15085,7 @@
               </a:rPr>
               <a:t>  &lt;li&gt;Front End</a:t>
             </a:r>
-            <a:endParaRPr lang="en-US" sz="1250" dirty="0"/>
+            <a:endParaRPr lang="en-US" sz="1000" dirty="0"/>
           </a:p>
           <a:p>
             <a:pPr indent="0" marL="0">
@@ -15095,7 +15095,7 @@
               <a:buNone/>
             </a:pPr>
             <a:r>
-              <a:rPr lang="en-US" sz="1250" dirty="0">
+              <a:rPr lang="en-US" sz="1000" dirty="0">
                 <a:solidFill>
                   <a:srgbClr val="C9D3F5"/>
                 </a:solidFill>
@@ -15105,7 +15105,7 @@
               </a:rPr>
               <a:t>    &lt;ul&gt;</a:t>
             </a:r>
-            <a:endParaRPr lang="en-US" sz="1250" dirty="0"/>
+            <a:endParaRPr lang="en-US" sz="1000" dirty="0"/>
           </a:p>
           <a:p>
             <a:pPr indent="0" marL="0">
@@ -15115,7 +15115,7 @@
               <a:buNone/>
             </a:pPr>
             <a:r>
-              <a:rPr lang="en-US" sz="1250" dirty="0">
+              <a:rPr lang="en-US" sz="1000" dirty="0">
                 <a:solidFill>
                   <a:srgbClr val="C9D3F5"/>
                 </a:solidFill>
@@ -15125,7 +15125,7 @@
               </a:rPr>
               <a:t>      &lt;li&gt;HTML&lt;/li&gt;</a:t>
             </a:r>
-            <a:endParaRPr lang="en-US" sz="1250" dirty="0"/>
+            <a:endParaRPr lang="en-US" sz="1000" dirty="0"/>
           </a:p>
           <a:p>
             <a:pPr indent="0" marL="0">
@@ -15135,7 +15135,7 @@
               <a:buNone/>
             </a:pPr>
             <a:r>
-              <a:rPr lang="en-US" sz="1250" dirty="0">
+              <a:rPr lang="en-US" sz="1000" dirty="0">
                 <a:solidFill>
                   <a:srgbClr val="C9D3F5"/>
                 </a:solidFill>
@@ -15145,7 +15145,7 @@
               </a:rPr>
               <a:t>      &lt;li&gt;CSS&lt;/li&gt;</a:t>
             </a:r>
-            <a:endParaRPr lang="en-US" sz="1250" dirty="0"/>
+            <a:endParaRPr lang="en-US" sz="1000" dirty="0"/>
           </a:p>
           <a:p>
             <a:pPr indent="0" marL="0">
@@ -15155,7 +15155,7 @@
               <a:buNone/>
             </a:pPr>
             <a:r>
-              <a:rPr lang="en-US" sz="1250" dirty="0">
+              <a:rPr lang="en-US" sz="1000" dirty="0">
                 <a:solidFill>
                   <a:srgbClr val="C9D3F5"/>
                 </a:solidFill>
@@ -15165,7 +15165,7 @@
               </a:rPr>
               <a:t>    &lt;/ul&gt;</a:t>
             </a:r>
-            <a:endParaRPr lang="en-US" sz="1250" dirty="0"/>
+            <a:endParaRPr lang="en-US" sz="1000" dirty="0"/>
           </a:p>
           <a:p>
             <a:pPr indent="0" marL="0">
@@ -15175,7 +15175,7 @@
               <a:buNone/>
             </a:pPr>
             <a:r>
-              <a:rPr lang="en-US" sz="1250" dirty="0">
+              <a:rPr lang="en-US" sz="1000" dirty="0">
                 <a:solidFill>
                   <a:srgbClr val="C9D3F5"/>
                 </a:solidFill>
@@ -15185,7 +15185,7 @@
               </a:rPr>
               <a:t>  &lt;/li&gt;</a:t>
             </a:r>
-            <a:endParaRPr lang="en-US" sz="1250" dirty="0"/>
+            <a:endParaRPr lang="en-US" sz="1000" dirty="0"/>
           </a:p>
           <a:p>
             <a:pPr indent="0" marL="0">
@@ -15195,7 +15195,7 @@
               <a:buNone/>
             </a:pPr>
             <a:r>
-              <a:rPr lang="en-US" sz="1250" dirty="0">
+              <a:rPr lang="en-US" sz="1000" dirty="0">
                 <a:solidFill>
                   <a:srgbClr val="C9D3F5"/>
                 </a:solidFill>
@@ -15205,7 +15205,7 @@
               </a:rPr>
               <a:t>  &lt;li&gt;Back End</a:t>
             </a:r>
-            <a:endParaRPr lang="en-US" sz="1250" dirty="0"/>
+            <a:endParaRPr lang="en-US" sz="1000" dirty="0"/>
           </a:p>
           <a:p>
             <a:pPr indent="0" marL="0">
@@ -15215,7 +15215,7 @@
               <a:buNone/>
             </a:pPr>
             <a:r>
-              <a:rPr lang="en-US" sz="1250" dirty="0">
+              <a:rPr lang="en-US" sz="1000" dirty="0">
                 <a:solidFill>
                   <a:srgbClr val="C9D3F5"/>
                 </a:solidFill>
@@ -15225,7 +15225,7 @@
               </a:rPr>
               <a:t>    &lt;ul&gt;</a:t>
             </a:r>
-            <a:endParaRPr lang="en-US" sz="1250" dirty="0"/>
+            <a:endParaRPr lang="en-US" sz="1000" dirty="0"/>
           </a:p>
           <a:p>
             <a:pPr indent="0" marL="0">
@@ -15235,7 +15235,7 @@
               <a:buNone/>
             </a:pPr>
             <a:r>
-              <a:rPr lang="en-US" sz="1250" dirty="0">
+              <a:rPr lang="en-US" sz="1000" dirty="0">
                 <a:solidFill>
                   <a:srgbClr val="C9D3F5"/>
                 </a:solidFill>
@@ -15245,7 +15245,7 @@
               </a:rPr>
               <a:t>      &lt;li&gt;Node.js&lt;/li&gt;</a:t>
             </a:r>
-            <a:endParaRPr lang="en-US" sz="1250" dirty="0"/>
+            <a:endParaRPr lang="en-US" sz="1000" dirty="0"/>
           </a:p>
           <a:p>
             <a:pPr indent="0" marL="0">
@@ -15255,7 +15255,7 @@
               <a:buNone/>
             </a:pPr>
             <a:r>
-              <a:rPr lang="en-US" sz="1250" dirty="0">
+              <a:rPr lang="en-US" sz="1000" dirty="0">
                 <a:solidFill>
                   <a:srgbClr val="C9D3F5"/>
                 </a:solidFill>
@@ -15265,7 +15265,7 @@
               </a:rPr>
               <a:t>      &lt;li&gt;Express&lt;/li&gt;</a:t>
             </a:r>
-            <a:endParaRPr lang="en-US" sz="1250" dirty="0"/>
+            <a:endParaRPr lang="en-US" sz="1000" dirty="0"/>
           </a:p>
           <a:p>
             <a:pPr indent="0" marL="0">
@@ -15275,7 +15275,7 @@
               <a:buNone/>
             </a:pPr>
             <a:r>
-              <a:rPr lang="en-US" sz="1250" dirty="0">
+              <a:rPr lang="en-US" sz="1000" dirty="0">
                 <a:solidFill>
                   <a:srgbClr val="C9D3F5"/>
                 </a:solidFill>
@@ -15285,7 +15285,7 @@
               </a:rPr>
               <a:t>    &lt;/ul&gt;</a:t>
             </a:r>
-            <a:endParaRPr lang="en-US" sz="1250" dirty="0"/>
+            <a:endParaRPr lang="en-US" sz="1000" dirty="0"/>
           </a:p>
           <a:p>
             <a:pPr indent="0" marL="0">
@@ -15295,7 +15295,7 @@
               <a:buNone/>
             </a:pPr>
             <a:r>
-              <a:rPr lang="en-US" sz="1250" dirty="0">
+              <a:rPr lang="en-US" sz="1000" dirty="0">
                 <a:solidFill>
                   <a:srgbClr val="C9D3F5"/>
                 </a:solidFill>
@@ -15305,7 +15305,7 @@
               </a:rPr>
               <a:t>  &lt;/li&gt;</a:t>
             </a:r>
-            <a:endParaRPr lang="en-US" sz="1250" dirty="0"/>
+            <a:endParaRPr lang="en-US" sz="1000" dirty="0"/>
           </a:p>
           <a:p>
             <a:pPr indent="0" marL="0">
@@ -15315,7 +15315,7 @@
               <a:buNone/>
             </a:pPr>
             <a:r>
-              <a:rPr lang="en-US" sz="1250" dirty="0">
+              <a:rPr lang="en-US" sz="1000" dirty="0">
                 <a:solidFill>
                   <a:srgbClr val="C9D3F5"/>
                 </a:solidFill>
@@ -15325,7 +15325,7 @@
               </a:rPr>
               <a:t>&lt;/ul&gt;</a:t>
             </a:r>
-            <a:endParaRPr lang="en-US" sz="1250" dirty="0"/>
+            <a:endParaRPr lang="en-US" sz="1000" dirty="0"/>
           </a:p>
         </p:txBody>
       </p:sp>
@@ -15337,12 +15337,12 @@
         </p:nvSpPr>
         <p:spPr>
           <a:xfrm>
-            <a:off x="530352" y="4507992"/>
-            <a:ext cx="11130991" cy="1819656"/>
+            <a:off x="530352" y="5346192"/>
+            <a:ext cx="11130991" cy="981456"/>
           </a:xfrm>
           <a:prstGeom prst="roundRect">
             <a:avLst>
-              <a:gd name="adj" fmla="val 3015"/>
+              <a:gd name="adj" fmla="val 5590"/>
             </a:avLst>
           </a:prstGeom>
           <a:solidFill>
@@ -15365,7 +15365,7 @@
       </p:sp>
       <p:pic>
         <p:nvPicPr>
-          <p:cNvPr id="7" name="Image 0" descr="D:/GitHub/mern-web-book/docs/assets/img/lecture-03/lists.png">    </p:cNvPr>
+          <p:cNvPr id="7" name="Image 0" descr="D:/GitHub/mern-web-book/slides/assets/lecture-03/nested-lists.png">    </p:cNvPr>
           <p:cNvPicPr>
             <a:picLocks noChangeAspect="1"/>
           </p:cNvPicPr>
@@ -15379,8 +15379,8 @@
         </p:blipFill>
         <p:spPr>
           <a:xfrm>
-            <a:off x="4650941" y="4617720"/>
-            <a:ext cx="2889813" cy="1600200"/>
+            <a:off x="5750210" y="5455920"/>
+            <a:ext cx="691275" cy="762000"/>
           </a:xfrm>
           <a:prstGeom prst="rect">
             <a:avLst/>
@@ -19683,11 +19683,11 @@
         <p:spPr>
           <a:xfrm>
             <a:off x="640080" y="1965960"/>
-            <a:ext cx="10911535" cy="1133856"/>
+            <a:ext cx="10911535" cy="1024890"/>
           </a:xfrm>
           <a:prstGeom prst="roundRect">
             <a:avLst>
-              <a:gd name="adj" fmla="val 6452"/>
+              <a:gd name="adj" fmla="val 7138"/>
             </a:avLst>
           </a:prstGeom>
           <a:solidFill>
@@ -19705,7 +19705,7 @@
         <p:spPr>
           <a:xfrm>
             <a:off x="960120" y="2194560"/>
-            <a:ext cx="10271455" cy="676656"/>
+            <a:ext cx="10271455" cy="567690"/>
           </a:xfrm>
           <a:prstGeom prst="rect">
             <a:avLst/>
@@ -19766,12 +19766,12 @@
         </p:nvSpPr>
         <p:spPr>
           <a:xfrm>
-            <a:off x="530352" y="3264408"/>
-            <a:ext cx="11130991" cy="3063240"/>
+            <a:off x="530352" y="3155442"/>
+            <a:ext cx="11130991" cy="3172206"/>
           </a:xfrm>
           <a:prstGeom prst="roundRect">
             <a:avLst>
-              <a:gd name="adj" fmla="val 1791"/>
+              <a:gd name="adj" fmla="val 1730"/>
             </a:avLst>
           </a:prstGeom>
           <a:solidFill>
@@ -19808,7 +19808,7 @@
         </p:blipFill>
         <p:spPr>
           <a:xfrm>
-            <a:off x="3352648" y="4064508"/>
+            <a:off x="3352648" y="4010025"/>
             <a:ext cx="5486400" cy="1463040"/>
           </a:xfrm>
           <a:prstGeom prst="rect">
@@ -20013,11 +20013,11 @@
         <p:spPr>
           <a:xfrm>
             <a:off x="640080" y="1965960"/>
-            <a:ext cx="10911535" cy="2377440"/>
+            <a:ext cx="10911535" cy="3063240"/>
           </a:xfrm>
           <a:prstGeom prst="roundRect">
             <a:avLst>
-              <a:gd name="adj" fmla="val 3077"/>
+              <a:gd name="adj" fmla="val 2388"/>
             </a:avLst>
           </a:prstGeom>
           <a:solidFill>
@@ -20035,7 +20035,7 @@
         <p:spPr>
           <a:xfrm>
             <a:off x="960120" y="2194560"/>
-            <a:ext cx="10271455" cy="1920240"/>
+            <a:ext cx="10271455" cy="2606040"/>
           </a:xfrm>
           <a:prstGeom prst="rect">
             <a:avLst/>
@@ -20054,7 +20054,7 @@
               <a:buNone/>
             </a:pPr>
             <a:r>
-              <a:rPr lang="en-US" sz="1250" dirty="0">
+              <a:rPr lang="en-US" sz="1200" dirty="0">
                 <a:solidFill>
                   <a:srgbClr val="C9D3F5"/>
                 </a:solidFill>
@@ -20064,7 +20064,7 @@
               </a:rPr>
               <a:t>&lt;!DOCTYPE html&gt;</a:t>
             </a:r>
-            <a:endParaRPr lang="en-US" sz="1250" dirty="0"/>
+            <a:endParaRPr lang="en-US" sz="1200" dirty="0"/>
           </a:p>
           <a:p>
             <a:pPr indent="0" marL="0">
@@ -20074,7 +20074,7 @@
               <a:buNone/>
             </a:pPr>
             <a:r>
-              <a:rPr lang="en-US" sz="1250" dirty="0">
+              <a:rPr lang="en-US" sz="1200" dirty="0">
                 <a:solidFill>
                   <a:srgbClr val="C9D3F5"/>
                 </a:solidFill>
@@ -20084,7 +20084,7 @@
               </a:rPr>
               <a:t>&lt;html lang="en"&gt;</a:t>
             </a:r>
-            <a:endParaRPr lang="en-US" sz="1250" dirty="0"/>
+            <a:endParaRPr lang="en-US" sz="1200" dirty="0"/>
           </a:p>
           <a:p>
             <a:pPr indent="0" marL="0">
@@ -20094,7 +20094,7 @@
               <a:buNone/>
             </a:pPr>
             <a:r>
-              <a:rPr lang="en-US" sz="1250" dirty="0">
+              <a:rPr lang="en-US" sz="1200" dirty="0">
                 <a:solidFill>
                   <a:srgbClr val="C9D3F5"/>
                 </a:solidFill>
@@ -20104,7 +20104,7 @@
               </a:rPr>
               <a:t>&lt;head&gt;</a:t>
             </a:r>
-            <a:endParaRPr lang="en-US" sz="1250" dirty="0"/>
+            <a:endParaRPr lang="en-US" sz="1200" dirty="0"/>
           </a:p>
           <a:p>
             <a:pPr indent="0" marL="0">
@@ -20114,7 +20114,7 @@
               <a:buNone/>
             </a:pPr>
             <a:r>
-              <a:rPr lang="en-US" sz="1250" dirty="0">
+              <a:rPr lang="en-US" sz="1200" dirty="0">
                 <a:solidFill>
                   <a:srgbClr val="C9D3F5"/>
                 </a:solidFill>
@@ -20124,7 +20124,7 @@
               </a:rPr>
               <a:t>    &lt;meta charset="UTF-8"&gt;</a:t>
             </a:r>
-            <a:endParaRPr lang="en-US" sz="1250" dirty="0"/>
+            <a:endParaRPr lang="en-US" sz="1200" dirty="0"/>
           </a:p>
           <a:p>
             <a:pPr indent="0" marL="0">
@@ -20134,7 +20134,7 @@
               <a:buNone/>
             </a:pPr>
             <a:r>
-              <a:rPr lang="en-US" sz="1250" dirty="0">
+              <a:rPr lang="en-US" sz="1200" dirty="0">
                 <a:solidFill>
                   <a:srgbClr val="C9D3F5"/>
                 </a:solidFill>
@@ -20144,7 +20144,7 @@
               </a:rPr>
               <a:t>    &lt;title&gt;My First Page&lt;/title&gt;</a:t>
             </a:r>
-            <a:endParaRPr lang="en-US" sz="1250" dirty="0"/>
+            <a:endParaRPr lang="en-US" sz="1200" dirty="0"/>
           </a:p>
           <a:p>
             <a:pPr indent="0" marL="0">
@@ -20154,7 +20154,7 @@
               <a:buNone/>
             </a:pPr>
             <a:r>
-              <a:rPr lang="en-US" sz="1250" dirty="0">
+              <a:rPr lang="en-US" sz="1200" dirty="0">
                 <a:solidFill>
                   <a:srgbClr val="C9D3F5"/>
                 </a:solidFill>
@@ -20164,7 +20164,7 @@
               </a:rPr>
               <a:t>&lt;/head&gt;</a:t>
             </a:r>
-            <a:endParaRPr lang="en-US" sz="1250" dirty="0"/>
+            <a:endParaRPr lang="en-US" sz="1200" dirty="0"/>
           </a:p>
           <a:p>
             <a:pPr indent="0" marL="0">
@@ -20174,7 +20174,7 @@
               <a:buNone/>
             </a:pPr>
             <a:r>
-              <a:rPr lang="en-US" sz="1250" dirty="0">
+              <a:rPr lang="en-US" sz="1200" dirty="0">
                 <a:solidFill>
                   <a:srgbClr val="C9D3F5"/>
                 </a:solidFill>
@@ -20184,7 +20184,7 @@
               </a:rPr>
               <a:t>&lt;body&gt;</a:t>
             </a:r>
-            <a:endParaRPr lang="en-US" sz="1250" dirty="0"/>
+            <a:endParaRPr lang="en-US" sz="1200" dirty="0"/>
           </a:p>
           <a:p>
             <a:pPr indent="0" marL="0">
@@ -20194,7 +20194,7 @@
               <a:buNone/>
             </a:pPr>
             <a:r>
-              <a:rPr lang="en-US" sz="1250" dirty="0">
+              <a:rPr lang="en-US" sz="1200" dirty="0">
                 <a:solidFill>
                   <a:srgbClr val="C9D3F5"/>
                 </a:solidFill>
@@ -20204,7 +20204,7 @@
               </a:rPr>
               <a:t>    &lt;h1&gt;Hello, Web!&lt;/h1&gt;</a:t>
             </a:r>
-            <a:endParaRPr lang="en-US" sz="1250" dirty="0"/>
+            <a:endParaRPr lang="en-US" sz="1200" dirty="0"/>
           </a:p>
           <a:p>
             <a:pPr indent="0" marL="0">
@@ -20214,7 +20214,7 @@
               <a:buNone/>
             </a:pPr>
             <a:r>
-              <a:rPr lang="en-US" sz="1250" dirty="0">
+              <a:rPr lang="en-US" sz="1200" dirty="0">
                 <a:solidFill>
                   <a:srgbClr val="C9D3F5"/>
                 </a:solidFill>
@@ -20224,7 +20224,7 @@
               </a:rPr>
               <a:t>    &lt;p&gt;This is my first HTML page.&lt;/p&gt;</a:t>
             </a:r>
-            <a:endParaRPr lang="en-US" sz="1250" dirty="0"/>
+            <a:endParaRPr lang="en-US" sz="1200" dirty="0"/>
           </a:p>
           <a:p>
             <a:pPr indent="0" marL="0">
@@ -20234,7 +20234,7 @@
               <a:buNone/>
             </a:pPr>
             <a:r>
-              <a:rPr lang="en-US" sz="1250" dirty="0">
+              <a:rPr lang="en-US" sz="1200" dirty="0">
                 <a:solidFill>
                   <a:srgbClr val="C9D3F5"/>
                 </a:solidFill>
@@ -20244,7 +20244,7 @@
               </a:rPr>
               <a:t>&lt;/body&gt;</a:t>
             </a:r>
-            <a:endParaRPr lang="en-US" sz="1250" dirty="0"/>
+            <a:endParaRPr lang="en-US" sz="1200" dirty="0"/>
           </a:p>
           <a:p>
             <a:pPr indent="0" marL="0">
@@ -20254,7 +20254,7 @@
               <a:buNone/>
             </a:pPr>
             <a:r>
-              <a:rPr lang="en-US" sz="1250" dirty="0">
+              <a:rPr lang="en-US" sz="1200" dirty="0">
                 <a:solidFill>
                   <a:srgbClr val="C9D3F5"/>
                 </a:solidFill>
@@ -20264,7 +20264,7 @@
               </a:rPr>
               <a:t>&lt;/html&gt;</a:t>
             </a:r>
-            <a:endParaRPr lang="en-US" sz="1250" dirty="0"/>
+            <a:endParaRPr lang="en-US" sz="1200" dirty="0"/>
           </a:p>
         </p:txBody>
       </p:sp>
@@ -20276,12 +20276,12 @@
         </p:nvSpPr>
         <p:spPr>
           <a:xfrm>
-            <a:off x="530352" y="4507992"/>
-            <a:ext cx="11130991" cy="1819656"/>
+            <a:off x="530352" y="5193792"/>
+            <a:ext cx="11130991" cy="1133856"/>
           </a:xfrm>
           <a:prstGeom prst="roundRect">
             <a:avLst>
-              <a:gd name="adj" fmla="val 3015"/>
+              <a:gd name="adj" fmla="val 4839"/>
             </a:avLst>
           </a:prstGeom>
           <a:solidFill>
@@ -20318,8 +20318,8 @@
         </p:blipFill>
         <p:spPr>
           <a:xfrm>
-            <a:off x="4238931" y="4617720"/>
-            <a:ext cx="3713833" cy="1600200"/>
+            <a:off x="5034752" y="5303520"/>
+            <a:ext cx="2122190" cy="914400"/>
           </a:xfrm>
           <a:prstGeom prst="rect">
             <a:avLst/>
@@ -21608,11 +21608,11 @@
         <p:spPr>
           <a:xfrm>
             <a:off x="640080" y="1965960"/>
-            <a:ext cx="10911535" cy="1719072"/>
+            <a:ext cx="10911535" cy="1501140"/>
           </a:xfrm>
           <a:prstGeom prst="roundRect">
             <a:avLst>
-              <a:gd name="adj" fmla="val 4255"/>
+              <a:gd name="adj" fmla="val 4873"/>
             </a:avLst>
           </a:prstGeom>
           <a:solidFill>
@@ -21630,7 +21630,7 @@
         <p:spPr>
           <a:xfrm>
             <a:off x="960120" y="2194560"/>
-            <a:ext cx="10271455" cy="1261872"/>
+            <a:ext cx="10271455" cy="1043940"/>
           </a:xfrm>
           <a:prstGeom prst="rect">
             <a:avLst/>
@@ -21731,12 +21731,12 @@
         </p:nvSpPr>
         <p:spPr>
           <a:xfrm>
-            <a:off x="530352" y="3849624"/>
-            <a:ext cx="11130991" cy="2478024"/>
+            <a:off x="530352" y="3631692"/>
+            <a:ext cx="11130991" cy="2695956"/>
           </a:xfrm>
           <a:prstGeom prst="roundRect">
             <a:avLst>
-              <a:gd name="adj" fmla="val 2214"/>
+              <a:gd name="adj" fmla="val 2035"/>
             </a:avLst>
           </a:prstGeom>
           <a:solidFill>
@@ -21773,7 +21773,7 @@
         </p:blipFill>
         <p:spPr>
           <a:xfrm>
-            <a:off x="640080" y="4323232"/>
+            <a:off x="640080" y="4214266"/>
             <a:ext cx="10911535" cy="1530807"/>
           </a:xfrm>
           <a:prstGeom prst="rect">

--- a/slides/CSC336-Lecture-03-HTML-and-HTML5-Fundamentals.pptx
+++ b/slides/CSC336-Lecture-03-HTML-and-HTML5-Fundamentals.pptx
@@ -3815,79 +3815,44 @@
       </p:sp>
       <p:sp>
         <p:nvSpPr>
-          <p:cNvPr id="6" name="Text 4"/>
+          <p:cNvPr id="8" name="cuinotes-footer-mark"/>
           <p:cNvSpPr txBox="1"/>
           <p:nvPr/>
         </p:nvSpPr>
         <p:spPr>
           <a:xfrm>
-            <a:off x="640080" y="6446520"/>
-            <a:ext cx="8686800" cy="292608"/>
+            <a:off x="9951720" y="6455664"/>
+            <a:ext cx="2011680" cy="292608"/>
           </a:xfrm>
           <a:prstGeom prst="rect">
             <a:avLst/>
           </a:prstGeom>
           <a:noFill/>
-          <a:ln/>
-        </p:spPr>
-        <p:txBody>
-          <a:bodyPr wrap="square" lIns="0" tIns="0" rIns="0" bIns="0" rtlCol="0" anchor="ctr"/>
-          <a:lstStyle/>
-          <a:p>
-            <a:pPr algn="l" indent="0" marL="0">
-              <a:buNone/>
-            </a:pPr>
-            <a:r>
-              <a:rPr lang="en-US" sz="900" dirty="0">
-                <a:solidFill>
-                  <a:srgbClr val="9AA3D8"/>
-                </a:solidFill>
-                <a:latin typeface="Calibri" pitchFamily="34" charset="0"/>
-                <a:ea typeface="Calibri" pitchFamily="34" charset="-122"/>
-                <a:cs typeface="Calibri" pitchFamily="34" charset="-120"/>
-              </a:rPr>
-              <a:t>Usman Akram  •  COMSATS University Islamabad</a:t>
-            </a:r>
-            <a:endParaRPr lang="en-US" sz="900" dirty="0"/>
-          </a:p>
-        </p:txBody>
-      </p:sp>
-      <p:sp>
-        <p:nvSpPr>
-          <p:cNvPr id="7" name="Text 5"/>
-          <p:cNvSpPr txBox="1"/>
-          <p:nvPr/>
-        </p:nvSpPr>
-        <p:spPr>
-          <a:xfrm>
-            <a:off x="11155680" y="6446520"/>
-            <a:ext cx="457200" cy="292608"/>
-          </a:xfrm>
-          <a:prstGeom prst="rect">
-            <a:avLst/>
-          </a:prstGeom>
-          <a:noFill/>
-          <a:ln/>
-        </p:spPr>
-        <p:txBody>
-          <a:bodyPr wrap="square" lIns="0" tIns="0" rIns="0" bIns="0" rtlCol="0" anchor="ctr"/>
-          <a:lstStyle/>
-          <a:p>
-            <a:pPr algn="r" indent="0" marL="0">
-              <a:buNone/>
-            </a:pPr>
-            <a:r>
-              <a:rPr lang="en-US" sz="900" dirty="0">
-                <a:solidFill>
-                  <a:srgbClr val="9AA3D8"/>
-                </a:solidFill>
-                <a:latin typeface="Calibri" pitchFamily="34" charset="0"/>
-                <a:ea typeface="Calibri" pitchFamily="34" charset="-122"/>
-                <a:cs typeface="Calibri" pitchFamily="34" charset="-120"/>
-              </a:rPr>
-              <a:t>1</a:t>
-            </a:r>
-            <a:endParaRPr lang="en-US" sz="900" dirty="0"/>
+        </p:spPr>
+        <p:txBody>
+          <a:bodyPr wrap="none" lIns="0" rIns="0" tIns="0" bIns="0">
+            <a:spAutoFit/>
+          </a:bodyPr>
+          <a:lstStyle/>
+          <a:p>
+            <a:pPr algn="r"/>
+            <a:r>
+              <a:rPr sz="1000">
+                <a:solidFill>
+                  <a:srgbClr val="8A939B"/>
+                </a:solidFill>
+                <a:hlinkClick r:id="rId3"/>
+              </a:rPr>
+              <a:t>cuinotes.com</a:t>
+            </a:r>
+            <a:r>
+              <a:rPr sz="1000">
+                <a:solidFill>
+                  <a:srgbClr val="8A939B"/>
+                </a:solidFill>
+              </a:rPr>
+              <a:t>  ·  1</a:t>
+            </a:r>
           </a:p>
         </p:txBody>
       </p:sp>
@@ -4022,6 +3987,10 @@
           </a:solidFill>
           <a:ln/>
         </p:spPr>
+        <p:txBody>
+          <a:bodyPr/>
+          <a:p/>
+        </p:txBody>
       </p:sp>
       <p:sp>
         <p:nvSpPr>
@@ -4187,6 +4156,10 @@
             </a:outerShdw>
           </a:effectLst>
         </p:spPr>
+        <p:txBody>
+          <a:bodyPr/>
+          <a:p/>
+        </p:txBody>
       </p:sp>
       <p:pic>
         <p:nvPicPr>
@@ -4214,79 +4187,44 @@
       </p:pic>
       <p:sp>
         <p:nvSpPr>
-          <p:cNvPr id="8" name="Text 5"/>
+          <p:cNvPr id="10" name="cuinotes-footer-mark"/>
           <p:cNvSpPr txBox="1"/>
           <p:nvPr/>
         </p:nvSpPr>
         <p:spPr>
           <a:xfrm>
-            <a:off x="640080" y="6446520"/>
-            <a:ext cx="8686800" cy="292608"/>
+            <a:off x="9951720" y="6455664"/>
+            <a:ext cx="2011680" cy="292608"/>
           </a:xfrm>
           <a:prstGeom prst="rect">
             <a:avLst/>
           </a:prstGeom>
           <a:noFill/>
-          <a:ln/>
-        </p:spPr>
-        <p:txBody>
-          <a:bodyPr wrap="square" lIns="0" tIns="0" rIns="0" bIns="0" rtlCol="0" anchor="ctr"/>
-          <a:lstStyle/>
-          <a:p>
-            <a:pPr algn="l" indent="0" marL="0">
-              <a:buNone/>
-            </a:pPr>
-            <a:r>
-              <a:rPr lang="en-US" sz="900" dirty="0">
-                <a:solidFill>
-                  <a:srgbClr val="5D5D72"/>
-                </a:solidFill>
-                <a:latin typeface="Calibri" pitchFamily="34" charset="0"/>
-                <a:ea typeface="Calibri" pitchFamily="34" charset="-122"/>
-                <a:cs typeface="Calibri" pitchFamily="34" charset="-120"/>
-              </a:rPr>
-              <a:t>Usman Akram  •  COMSATS University Islamabad</a:t>
-            </a:r>
-            <a:endParaRPr lang="en-US" sz="900" dirty="0"/>
-          </a:p>
-        </p:txBody>
-      </p:sp>
-      <p:sp>
-        <p:nvSpPr>
-          <p:cNvPr id="9" name="Text 6"/>
-          <p:cNvSpPr txBox="1"/>
-          <p:nvPr/>
-        </p:nvSpPr>
-        <p:spPr>
-          <a:xfrm>
-            <a:off x="11155680" y="6446520"/>
-            <a:ext cx="457200" cy="292608"/>
-          </a:xfrm>
-          <a:prstGeom prst="rect">
-            <a:avLst/>
-          </a:prstGeom>
-          <a:noFill/>
-          <a:ln/>
-        </p:spPr>
-        <p:txBody>
-          <a:bodyPr wrap="square" lIns="0" tIns="0" rIns="0" bIns="0" rtlCol="0" anchor="ctr"/>
-          <a:lstStyle/>
-          <a:p>
-            <a:pPr algn="r" indent="0" marL="0">
-              <a:buNone/>
-            </a:pPr>
-            <a:r>
-              <a:rPr lang="en-US" sz="900" dirty="0">
-                <a:solidFill>
-                  <a:srgbClr val="5D5D72"/>
-                </a:solidFill>
-                <a:latin typeface="Calibri" pitchFamily="34" charset="0"/>
-                <a:ea typeface="Calibri" pitchFamily="34" charset="-122"/>
-                <a:cs typeface="Calibri" pitchFamily="34" charset="-120"/>
-              </a:rPr>
-              <a:t>10</a:t>
-            </a:r>
-            <a:endParaRPr lang="en-US" sz="900" dirty="0"/>
+        </p:spPr>
+        <p:txBody>
+          <a:bodyPr wrap="none" lIns="0" rIns="0" tIns="0" bIns="0">
+            <a:spAutoFit/>
+          </a:bodyPr>
+          <a:lstStyle/>
+          <a:p>
+            <a:pPr algn="r"/>
+            <a:r>
+              <a:rPr sz="1000">
+                <a:solidFill>
+                  <a:srgbClr val="8A939B"/>
+                </a:solidFill>
+                <a:hlinkClick r:id="rId4"/>
+              </a:rPr>
+              <a:t>cuinotes.com</a:t>
+            </a:r>
+            <a:r>
+              <a:rPr sz="1000">
+                <a:solidFill>
+                  <a:srgbClr val="8A939B"/>
+                </a:solidFill>
+              </a:rPr>
+              <a:t>  ·  10</a:t>
+            </a:r>
           </a:p>
         </p:txBody>
       </p:sp>
@@ -5437,79 +5375,44 @@
       </p:sp>
       <p:sp>
         <p:nvSpPr>
-          <p:cNvPr id="6" name="Text 3"/>
+          <p:cNvPr id="13" name="cuinotes-footer-mark"/>
           <p:cNvSpPr txBox="1"/>
           <p:nvPr/>
         </p:nvSpPr>
         <p:spPr>
           <a:xfrm>
-            <a:off x="640080" y="6446520"/>
-            <a:ext cx="8686800" cy="292608"/>
+            <a:off x="9951720" y="6455664"/>
+            <a:ext cx="2011680" cy="292608"/>
           </a:xfrm>
           <a:prstGeom prst="rect">
             <a:avLst/>
           </a:prstGeom>
           <a:noFill/>
-          <a:ln/>
-        </p:spPr>
-        <p:txBody>
-          <a:bodyPr wrap="square" lIns="0" tIns="0" rIns="0" bIns="0" rtlCol="0" anchor="ctr"/>
-          <a:lstStyle/>
-          <a:p>
-            <a:pPr algn="l" indent="0" marL="0">
-              <a:buNone/>
-            </a:pPr>
-            <a:r>
-              <a:rPr lang="en-US" sz="900" dirty="0">
-                <a:solidFill>
-                  <a:srgbClr val="5D5D72"/>
-                </a:solidFill>
-                <a:latin typeface="Calibri" pitchFamily="34" charset="0"/>
-                <a:ea typeface="Calibri" pitchFamily="34" charset="-122"/>
-                <a:cs typeface="Calibri" pitchFamily="34" charset="-120"/>
-              </a:rPr>
-              <a:t>Usman Akram  •  COMSATS University Islamabad</a:t>
-            </a:r>
-            <a:endParaRPr lang="en-US" sz="900" dirty="0"/>
-          </a:p>
-        </p:txBody>
-      </p:sp>
-      <p:sp>
-        <p:nvSpPr>
-          <p:cNvPr id="7" name="Text 4"/>
-          <p:cNvSpPr txBox="1"/>
-          <p:nvPr/>
-        </p:nvSpPr>
-        <p:spPr>
-          <a:xfrm>
-            <a:off x="11155680" y="6446520"/>
-            <a:ext cx="457200" cy="292608"/>
-          </a:xfrm>
-          <a:prstGeom prst="rect">
-            <a:avLst/>
-          </a:prstGeom>
-          <a:noFill/>
-          <a:ln/>
-        </p:spPr>
-        <p:txBody>
-          <a:bodyPr wrap="square" lIns="0" tIns="0" rIns="0" bIns="0" rtlCol="0" anchor="ctr"/>
-          <a:lstStyle/>
-          <a:p>
-            <a:pPr algn="r" indent="0" marL="0">
-              <a:buNone/>
-            </a:pPr>
-            <a:r>
-              <a:rPr lang="en-US" sz="900" dirty="0">
-                <a:solidFill>
-                  <a:srgbClr val="5D5D72"/>
-                </a:solidFill>
-                <a:latin typeface="Calibri" pitchFamily="34" charset="0"/>
-                <a:ea typeface="Calibri" pitchFamily="34" charset="-122"/>
-                <a:cs typeface="Calibri" pitchFamily="34" charset="-120"/>
-              </a:rPr>
-              <a:t>11</a:t>
-            </a:r>
-            <a:endParaRPr lang="en-US" sz="900" dirty="0"/>
+        </p:spPr>
+        <p:txBody>
+          <a:bodyPr wrap="none" lIns="0" rIns="0" tIns="0" bIns="0">
+            <a:spAutoFit/>
+          </a:bodyPr>
+          <a:lstStyle/>
+          <a:p>
+            <a:pPr algn="r"/>
+            <a:r>
+              <a:rPr sz="1000">
+                <a:solidFill>
+                  <a:srgbClr val="8A939B"/>
+                </a:solidFill>
+                <a:hlinkClick r:id="rId3"/>
+              </a:rPr>
+              <a:t>cuinotes.com</a:t>
+            </a:r>
+            <a:r>
+              <a:rPr sz="1000">
+                <a:solidFill>
+                  <a:srgbClr val="8A939B"/>
+                </a:solidFill>
+              </a:rPr>
+              <a:t>  ·  11</a:t>
+            </a:r>
           </a:p>
         </p:txBody>
       </p:sp>
@@ -5644,6 +5547,10 @@
           </a:solidFill>
           <a:ln/>
         </p:spPr>
+        <p:txBody>
+          <a:bodyPr/>
+          <a:p/>
+        </p:txBody>
       </p:sp>
       <p:sp>
         <p:nvSpPr>
@@ -5820,6 +5727,10 @@
             </a:outerShdw>
           </a:effectLst>
         </p:spPr>
+        <p:txBody>
+          <a:bodyPr/>
+          <a:p/>
+        </p:txBody>
       </p:sp>
       <p:pic>
         <p:nvPicPr>
@@ -5847,79 +5758,44 @@
       </p:pic>
       <p:sp>
         <p:nvSpPr>
-          <p:cNvPr id="8" name="Text 5"/>
+          <p:cNvPr id="10" name="cuinotes-footer-mark"/>
           <p:cNvSpPr txBox="1"/>
           <p:nvPr/>
         </p:nvSpPr>
         <p:spPr>
           <a:xfrm>
-            <a:off x="640080" y="6446520"/>
-            <a:ext cx="8686800" cy="292608"/>
+            <a:off x="9951720" y="6455664"/>
+            <a:ext cx="2011680" cy="292608"/>
           </a:xfrm>
           <a:prstGeom prst="rect">
             <a:avLst/>
           </a:prstGeom>
           <a:noFill/>
-          <a:ln/>
-        </p:spPr>
-        <p:txBody>
-          <a:bodyPr wrap="square" lIns="0" tIns="0" rIns="0" bIns="0" rtlCol="0" anchor="ctr"/>
-          <a:lstStyle/>
-          <a:p>
-            <a:pPr algn="l" indent="0" marL="0">
-              <a:buNone/>
-            </a:pPr>
-            <a:r>
-              <a:rPr lang="en-US" sz="900" dirty="0">
-                <a:solidFill>
-                  <a:srgbClr val="5D5D72"/>
-                </a:solidFill>
-                <a:latin typeface="Calibri" pitchFamily="34" charset="0"/>
-                <a:ea typeface="Calibri" pitchFamily="34" charset="-122"/>
-                <a:cs typeface="Calibri" pitchFamily="34" charset="-120"/>
-              </a:rPr>
-              <a:t>Usman Akram  •  COMSATS University Islamabad</a:t>
-            </a:r>
-            <a:endParaRPr lang="en-US" sz="900" dirty="0"/>
-          </a:p>
-        </p:txBody>
-      </p:sp>
-      <p:sp>
-        <p:nvSpPr>
-          <p:cNvPr id="9" name="Text 6"/>
-          <p:cNvSpPr txBox="1"/>
-          <p:nvPr/>
-        </p:nvSpPr>
-        <p:spPr>
-          <a:xfrm>
-            <a:off x="11155680" y="6446520"/>
-            <a:ext cx="457200" cy="292608"/>
-          </a:xfrm>
-          <a:prstGeom prst="rect">
-            <a:avLst/>
-          </a:prstGeom>
-          <a:noFill/>
-          <a:ln/>
-        </p:spPr>
-        <p:txBody>
-          <a:bodyPr wrap="square" lIns="0" tIns="0" rIns="0" bIns="0" rtlCol="0" anchor="ctr"/>
-          <a:lstStyle/>
-          <a:p>
-            <a:pPr algn="r" indent="0" marL="0">
-              <a:buNone/>
-            </a:pPr>
-            <a:r>
-              <a:rPr lang="en-US" sz="900" dirty="0">
-                <a:solidFill>
-                  <a:srgbClr val="5D5D72"/>
-                </a:solidFill>
-                <a:latin typeface="Calibri" pitchFamily="34" charset="0"/>
-                <a:ea typeface="Calibri" pitchFamily="34" charset="-122"/>
-                <a:cs typeface="Calibri" pitchFamily="34" charset="-120"/>
-              </a:rPr>
-              <a:t>12</a:t>
-            </a:r>
-            <a:endParaRPr lang="en-US" sz="900" dirty="0"/>
+        </p:spPr>
+        <p:txBody>
+          <a:bodyPr wrap="none" lIns="0" rIns="0" tIns="0" bIns="0">
+            <a:spAutoFit/>
+          </a:bodyPr>
+          <a:lstStyle/>
+          <a:p>
+            <a:pPr algn="r"/>
+            <a:r>
+              <a:rPr sz="1000">
+                <a:solidFill>
+                  <a:srgbClr val="8A939B"/>
+                </a:solidFill>
+                <a:hlinkClick r:id="rId4"/>
+              </a:rPr>
+              <a:t>cuinotes.com</a:t>
+            </a:r>
+            <a:r>
+              <a:rPr sz="1000">
+                <a:solidFill>
+                  <a:srgbClr val="8A939B"/>
+                </a:solidFill>
+              </a:rPr>
+              <a:t>  ·  12</a:t>
+            </a:r>
           </a:p>
         </p:txBody>
       </p:sp>
@@ -6054,6 +5930,10 @@
           </a:solidFill>
           <a:ln/>
         </p:spPr>
+        <p:txBody>
+          <a:bodyPr/>
+          <a:p/>
+        </p:txBody>
       </p:sp>
       <p:sp>
         <p:nvSpPr>
@@ -6170,6 +6050,10 @@
             </a:outerShdw>
           </a:effectLst>
         </p:spPr>
+        <p:txBody>
+          <a:bodyPr/>
+          <a:p/>
+        </p:txBody>
       </p:sp>
       <p:pic>
         <p:nvPicPr>
@@ -6197,79 +6081,44 @@
       </p:pic>
       <p:sp>
         <p:nvSpPr>
-          <p:cNvPr id="8" name="Text 5"/>
+          <p:cNvPr id="10" name="cuinotes-footer-mark"/>
           <p:cNvSpPr txBox="1"/>
           <p:nvPr/>
         </p:nvSpPr>
         <p:spPr>
           <a:xfrm>
-            <a:off x="640080" y="6446520"/>
-            <a:ext cx="8686800" cy="292608"/>
+            <a:off x="9951720" y="6455664"/>
+            <a:ext cx="2011680" cy="292608"/>
           </a:xfrm>
           <a:prstGeom prst="rect">
             <a:avLst/>
           </a:prstGeom>
           <a:noFill/>
-          <a:ln/>
-        </p:spPr>
-        <p:txBody>
-          <a:bodyPr wrap="square" lIns="0" tIns="0" rIns="0" bIns="0" rtlCol="0" anchor="ctr"/>
-          <a:lstStyle/>
-          <a:p>
-            <a:pPr algn="l" indent="0" marL="0">
-              <a:buNone/>
-            </a:pPr>
-            <a:r>
-              <a:rPr lang="en-US" sz="900" dirty="0">
-                <a:solidFill>
-                  <a:srgbClr val="5D5D72"/>
-                </a:solidFill>
-                <a:latin typeface="Calibri" pitchFamily="34" charset="0"/>
-                <a:ea typeface="Calibri" pitchFamily="34" charset="-122"/>
-                <a:cs typeface="Calibri" pitchFamily="34" charset="-120"/>
-              </a:rPr>
-              <a:t>Usman Akram  •  COMSATS University Islamabad</a:t>
-            </a:r>
-            <a:endParaRPr lang="en-US" sz="900" dirty="0"/>
-          </a:p>
-        </p:txBody>
-      </p:sp>
-      <p:sp>
-        <p:nvSpPr>
-          <p:cNvPr id="9" name="Text 6"/>
-          <p:cNvSpPr txBox="1"/>
-          <p:nvPr/>
-        </p:nvSpPr>
-        <p:spPr>
-          <a:xfrm>
-            <a:off x="11155680" y="6446520"/>
-            <a:ext cx="457200" cy="292608"/>
-          </a:xfrm>
-          <a:prstGeom prst="rect">
-            <a:avLst/>
-          </a:prstGeom>
-          <a:noFill/>
-          <a:ln/>
-        </p:spPr>
-        <p:txBody>
-          <a:bodyPr wrap="square" lIns="0" tIns="0" rIns="0" bIns="0" rtlCol="0" anchor="ctr"/>
-          <a:lstStyle/>
-          <a:p>
-            <a:pPr algn="r" indent="0" marL="0">
-              <a:buNone/>
-            </a:pPr>
-            <a:r>
-              <a:rPr lang="en-US" sz="900" dirty="0">
-                <a:solidFill>
-                  <a:srgbClr val="5D5D72"/>
-                </a:solidFill>
-                <a:latin typeface="Calibri" pitchFamily="34" charset="0"/>
-                <a:ea typeface="Calibri" pitchFamily="34" charset="-122"/>
-                <a:cs typeface="Calibri" pitchFamily="34" charset="-120"/>
-              </a:rPr>
-              <a:t>13</a:t>
-            </a:r>
-            <a:endParaRPr lang="en-US" sz="900" dirty="0"/>
+        </p:spPr>
+        <p:txBody>
+          <a:bodyPr wrap="none" lIns="0" rIns="0" tIns="0" bIns="0">
+            <a:spAutoFit/>
+          </a:bodyPr>
+          <a:lstStyle/>
+          <a:p>
+            <a:pPr algn="r"/>
+            <a:r>
+              <a:rPr sz="1000">
+                <a:solidFill>
+                  <a:srgbClr val="8A939B"/>
+                </a:solidFill>
+                <a:hlinkClick r:id="rId4"/>
+              </a:rPr>
+              <a:t>cuinotes.com</a:t>
+            </a:r>
+            <a:r>
+              <a:rPr sz="1000">
+                <a:solidFill>
+                  <a:srgbClr val="8A939B"/>
+                </a:solidFill>
+              </a:rPr>
+              <a:t>  ·  13</a:t>
+            </a:r>
           </a:p>
         </p:txBody>
       </p:sp>
@@ -6404,6 +6253,10 @@
           </a:solidFill>
           <a:ln/>
         </p:spPr>
+        <p:txBody>
+          <a:bodyPr/>
+          <a:p/>
+        </p:txBody>
       </p:sp>
       <p:sp>
         <p:nvSpPr>
@@ -6580,6 +6433,10 @@
             </a:outerShdw>
           </a:effectLst>
         </p:spPr>
+        <p:txBody>
+          <a:bodyPr/>
+          <a:p/>
+        </p:txBody>
       </p:sp>
       <p:pic>
         <p:nvPicPr>
@@ -6607,79 +6464,44 @@
       </p:pic>
       <p:sp>
         <p:nvSpPr>
-          <p:cNvPr id="8" name="Text 5"/>
+          <p:cNvPr id="10" name="cuinotes-footer-mark"/>
           <p:cNvSpPr txBox="1"/>
           <p:nvPr/>
         </p:nvSpPr>
         <p:spPr>
           <a:xfrm>
-            <a:off x="640080" y="6446520"/>
-            <a:ext cx="8686800" cy="292608"/>
+            <a:off x="9951720" y="6455664"/>
+            <a:ext cx="2011680" cy="292608"/>
           </a:xfrm>
           <a:prstGeom prst="rect">
             <a:avLst/>
           </a:prstGeom>
           <a:noFill/>
-          <a:ln/>
-        </p:spPr>
-        <p:txBody>
-          <a:bodyPr wrap="square" lIns="0" tIns="0" rIns="0" bIns="0" rtlCol="0" anchor="ctr"/>
-          <a:lstStyle/>
-          <a:p>
-            <a:pPr algn="l" indent="0" marL="0">
-              <a:buNone/>
-            </a:pPr>
-            <a:r>
-              <a:rPr lang="en-US" sz="900" dirty="0">
-                <a:solidFill>
-                  <a:srgbClr val="5D5D72"/>
-                </a:solidFill>
-                <a:latin typeface="Calibri" pitchFamily="34" charset="0"/>
-                <a:ea typeface="Calibri" pitchFamily="34" charset="-122"/>
-                <a:cs typeface="Calibri" pitchFamily="34" charset="-120"/>
-              </a:rPr>
-              <a:t>Usman Akram  •  COMSATS University Islamabad</a:t>
-            </a:r>
-            <a:endParaRPr lang="en-US" sz="900" dirty="0"/>
-          </a:p>
-        </p:txBody>
-      </p:sp>
-      <p:sp>
-        <p:nvSpPr>
-          <p:cNvPr id="9" name="Text 6"/>
-          <p:cNvSpPr txBox="1"/>
-          <p:nvPr/>
-        </p:nvSpPr>
-        <p:spPr>
-          <a:xfrm>
-            <a:off x="11155680" y="6446520"/>
-            <a:ext cx="457200" cy="292608"/>
-          </a:xfrm>
-          <a:prstGeom prst="rect">
-            <a:avLst/>
-          </a:prstGeom>
-          <a:noFill/>
-          <a:ln/>
-        </p:spPr>
-        <p:txBody>
-          <a:bodyPr wrap="square" lIns="0" tIns="0" rIns="0" bIns="0" rtlCol="0" anchor="ctr"/>
-          <a:lstStyle/>
-          <a:p>
-            <a:pPr algn="r" indent="0" marL="0">
-              <a:buNone/>
-            </a:pPr>
-            <a:r>
-              <a:rPr lang="en-US" sz="900" dirty="0">
-                <a:solidFill>
-                  <a:srgbClr val="5D5D72"/>
-                </a:solidFill>
-                <a:latin typeface="Calibri" pitchFamily="34" charset="0"/>
-                <a:ea typeface="Calibri" pitchFamily="34" charset="-122"/>
-                <a:cs typeface="Calibri" pitchFamily="34" charset="-120"/>
-              </a:rPr>
-              <a:t>14</a:t>
-            </a:r>
-            <a:endParaRPr lang="en-US" sz="900" dirty="0"/>
+        </p:spPr>
+        <p:txBody>
+          <a:bodyPr wrap="none" lIns="0" rIns="0" tIns="0" bIns="0">
+            <a:spAutoFit/>
+          </a:bodyPr>
+          <a:lstStyle/>
+          <a:p>
+            <a:pPr algn="r"/>
+            <a:r>
+              <a:rPr sz="1000">
+                <a:solidFill>
+                  <a:srgbClr val="8A939B"/>
+                </a:solidFill>
+                <a:hlinkClick r:id="rId4"/>
+              </a:rPr>
+              <a:t>cuinotes.com</a:t>
+            </a:r>
+            <a:r>
+              <a:rPr sz="1000">
+                <a:solidFill>
+                  <a:srgbClr val="8A939B"/>
+                </a:solidFill>
+              </a:rPr>
+              <a:t>  ·  14</a:t>
+            </a:r>
           </a:p>
         </p:txBody>
       </p:sp>
@@ -6814,6 +6636,10 @@
           </a:solidFill>
           <a:ln/>
         </p:spPr>
+        <p:txBody>
+          <a:bodyPr/>
+          <a:p/>
+        </p:txBody>
       </p:sp>
       <p:sp>
         <p:nvSpPr>
@@ -6930,6 +6756,10 @@
             </a:outerShdw>
           </a:effectLst>
         </p:spPr>
+        <p:txBody>
+          <a:bodyPr/>
+          <a:p/>
+        </p:txBody>
       </p:sp>
       <p:pic>
         <p:nvPicPr>
@@ -6957,79 +6787,44 @@
       </p:pic>
       <p:sp>
         <p:nvSpPr>
-          <p:cNvPr id="8" name="Text 5"/>
+          <p:cNvPr id="10" name="cuinotes-footer-mark"/>
           <p:cNvSpPr txBox="1"/>
           <p:nvPr/>
         </p:nvSpPr>
         <p:spPr>
           <a:xfrm>
-            <a:off x="640080" y="6446520"/>
-            <a:ext cx="8686800" cy="292608"/>
+            <a:off x="9951720" y="6455664"/>
+            <a:ext cx="2011680" cy="292608"/>
           </a:xfrm>
           <a:prstGeom prst="rect">
             <a:avLst/>
           </a:prstGeom>
           <a:noFill/>
-          <a:ln/>
-        </p:spPr>
-        <p:txBody>
-          <a:bodyPr wrap="square" lIns="0" tIns="0" rIns="0" bIns="0" rtlCol="0" anchor="ctr"/>
-          <a:lstStyle/>
-          <a:p>
-            <a:pPr algn="l" indent="0" marL="0">
-              <a:buNone/>
-            </a:pPr>
-            <a:r>
-              <a:rPr lang="en-US" sz="900" dirty="0">
-                <a:solidFill>
-                  <a:srgbClr val="5D5D72"/>
-                </a:solidFill>
-                <a:latin typeface="Calibri" pitchFamily="34" charset="0"/>
-                <a:ea typeface="Calibri" pitchFamily="34" charset="-122"/>
-                <a:cs typeface="Calibri" pitchFamily="34" charset="-120"/>
-              </a:rPr>
-              <a:t>Usman Akram  •  COMSATS University Islamabad</a:t>
-            </a:r>
-            <a:endParaRPr lang="en-US" sz="900" dirty="0"/>
-          </a:p>
-        </p:txBody>
-      </p:sp>
-      <p:sp>
-        <p:nvSpPr>
-          <p:cNvPr id="9" name="Text 6"/>
-          <p:cNvSpPr txBox="1"/>
-          <p:nvPr/>
-        </p:nvSpPr>
-        <p:spPr>
-          <a:xfrm>
-            <a:off x="11155680" y="6446520"/>
-            <a:ext cx="457200" cy="292608"/>
-          </a:xfrm>
-          <a:prstGeom prst="rect">
-            <a:avLst/>
-          </a:prstGeom>
-          <a:noFill/>
-          <a:ln/>
-        </p:spPr>
-        <p:txBody>
-          <a:bodyPr wrap="square" lIns="0" tIns="0" rIns="0" bIns="0" rtlCol="0" anchor="ctr"/>
-          <a:lstStyle/>
-          <a:p>
-            <a:pPr algn="r" indent="0" marL="0">
-              <a:buNone/>
-            </a:pPr>
-            <a:r>
-              <a:rPr lang="en-US" sz="900" dirty="0">
-                <a:solidFill>
-                  <a:srgbClr val="5D5D72"/>
-                </a:solidFill>
-                <a:latin typeface="Calibri" pitchFamily="34" charset="0"/>
-                <a:ea typeface="Calibri" pitchFamily="34" charset="-122"/>
-                <a:cs typeface="Calibri" pitchFamily="34" charset="-120"/>
-              </a:rPr>
-              <a:t>15</a:t>
-            </a:r>
-            <a:endParaRPr lang="en-US" sz="900" dirty="0"/>
+        </p:spPr>
+        <p:txBody>
+          <a:bodyPr wrap="none" lIns="0" rIns="0" tIns="0" bIns="0">
+            <a:spAutoFit/>
+          </a:bodyPr>
+          <a:lstStyle/>
+          <a:p>
+            <a:pPr algn="r"/>
+            <a:r>
+              <a:rPr sz="1000">
+                <a:solidFill>
+                  <a:srgbClr val="8A939B"/>
+                </a:solidFill>
+                <a:hlinkClick r:id="rId4"/>
+              </a:rPr>
+              <a:t>cuinotes.com</a:t>
+            </a:r>
+            <a:r>
+              <a:rPr sz="1000">
+                <a:solidFill>
+                  <a:srgbClr val="8A939B"/>
+                </a:solidFill>
+              </a:rPr>
+              <a:t>  ·  15</a:t>
+            </a:r>
           </a:p>
         </p:txBody>
       </p:sp>
@@ -7162,6 +6957,10 @@
           </a:solidFill>
           <a:ln/>
         </p:spPr>
+        <p:txBody>
+          <a:bodyPr/>
+          <a:p/>
+        </p:txBody>
       </p:sp>
       <p:sp>
         <p:nvSpPr>
@@ -7221,6 +7020,10 @@
           </a:solidFill>
           <a:ln/>
         </p:spPr>
+        <p:txBody>
+          <a:bodyPr/>
+          <a:p/>
+        </p:txBody>
       </p:sp>
       <p:sp>
         <p:nvSpPr>
@@ -7280,6 +7083,10 @@
           </a:solidFill>
           <a:ln/>
         </p:spPr>
+        <p:txBody>
+          <a:bodyPr/>
+          <a:p/>
+        </p:txBody>
       </p:sp>
       <p:sp>
         <p:nvSpPr>
@@ -7339,6 +7146,10 @@
           </a:solidFill>
           <a:ln/>
         </p:spPr>
+        <p:txBody>
+          <a:bodyPr/>
+          <a:p/>
+        </p:txBody>
       </p:sp>
       <p:sp>
         <p:nvSpPr>
@@ -7381,79 +7192,44 @@
       </p:sp>
       <p:sp>
         <p:nvSpPr>
-          <p:cNvPr id="12" name="Text 10"/>
+          <p:cNvPr id="14" name="cuinotes-footer-mark"/>
           <p:cNvSpPr txBox="1"/>
           <p:nvPr/>
         </p:nvSpPr>
         <p:spPr>
           <a:xfrm>
-            <a:off x="640080" y="6446520"/>
-            <a:ext cx="8686800" cy="292608"/>
+            <a:off x="9951720" y="6455664"/>
+            <a:ext cx="2011680" cy="292608"/>
           </a:xfrm>
           <a:prstGeom prst="rect">
             <a:avLst/>
           </a:prstGeom>
           <a:noFill/>
-          <a:ln/>
-        </p:spPr>
-        <p:txBody>
-          <a:bodyPr wrap="square" lIns="0" tIns="0" rIns="0" bIns="0" rtlCol="0" anchor="ctr"/>
-          <a:lstStyle/>
-          <a:p>
-            <a:pPr algn="l" indent="0" marL="0">
-              <a:buNone/>
-            </a:pPr>
-            <a:r>
-              <a:rPr lang="en-US" sz="900" dirty="0">
-                <a:solidFill>
-                  <a:srgbClr val="5D5D72"/>
-                </a:solidFill>
-                <a:latin typeface="Calibri" pitchFamily="34" charset="0"/>
-                <a:ea typeface="Calibri" pitchFamily="34" charset="-122"/>
-                <a:cs typeface="Calibri" pitchFamily="34" charset="-120"/>
-              </a:rPr>
-              <a:t>Usman Akram  •  COMSATS University Islamabad</a:t>
-            </a:r>
-            <a:endParaRPr lang="en-US" sz="900" dirty="0"/>
-          </a:p>
-        </p:txBody>
-      </p:sp>
-      <p:sp>
-        <p:nvSpPr>
-          <p:cNvPr id="13" name="Text 11"/>
-          <p:cNvSpPr txBox="1"/>
-          <p:nvPr/>
-        </p:nvSpPr>
-        <p:spPr>
-          <a:xfrm>
-            <a:off x="11155680" y="6446520"/>
-            <a:ext cx="457200" cy="292608"/>
-          </a:xfrm>
-          <a:prstGeom prst="rect">
-            <a:avLst/>
-          </a:prstGeom>
-          <a:noFill/>
-          <a:ln/>
-        </p:spPr>
-        <p:txBody>
-          <a:bodyPr wrap="square" lIns="0" tIns="0" rIns="0" bIns="0" rtlCol="0" anchor="ctr"/>
-          <a:lstStyle/>
-          <a:p>
-            <a:pPr algn="r" indent="0" marL="0">
-              <a:buNone/>
-            </a:pPr>
-            <a:r>
-              <a:rPr lang="en-US" sz="900" dirty="0">
-                <a:solidFill>
-                  <a:srgbClr val="5D5D72"/>
-                </a:solidFill>
-                <a:latin typeface="Calibri" pitchFamily="34" charset="0"/>
-                <a:ea typeface="Calibri" pitchFamily="34" charset="-122"/>
-                <a:cs typeface="Calibri" pitchFamily="34" charset="-120"/>
-              </a:rPr>
-              <a:t>16</a:t>
-            </a:r>
-            <a:endParaRPr lang="en-US" sz="900" dirty="0"/>
+        </p:spPr>
+        <p:txBody>
+          <a:bodyPr wrap="none" lIns="0" rIns="0" tIns="0" bIns="0">
+            <a:spAutoFit/>
+          </a:bodyPr>
+          <a:lstStyle/>
+          <a:p>
+            <a:pPr algn="r"/>
+            <a:r>
+              <a:rPr sz="1000">
+                <a:solidFill>
+                  <a:srgbClr val="8A939B"/>
+                </a:solidFill>
+                <a:hlinkClick r:id="rId3"/>
+              </a:rPr>
+              <a:t>cuinotes.com</a:t>
+            </a:r>
+            <a:r>
+              <a:rPr sz="1000">
+                <a:solidFill>
+                  <a:srgbClr val="8A939B"/>
+                </a:solidFill>
+              </a:rPr>
+              <a:t>  ·  16</a:t>
+            </a:r>
           </a:p>
         </p:txBody>
       </p:sp>
@@ -8565,79 +8341,44 @@
       </p:graphicFrame>
       <p:sp>
         <p:nvSpPr>
-          <p:cNvPr id="5" name="Text 2"/>
+          <p:cNvPr id="19" name="cuinotes-footer-mark"/>
           <p:cNvSpPr txBox="1"/>
           <p:nvPr/>
         </p:nvSpPr>
         <p:spPr>
           <a:xfrm>
-            <a:off x="640080" y="6446520"/>
-            <a:ext cx="8686800" cy="292608"/>
+            <a:off x="9951720" y="6455664"/>
+            <a:ext cx="2011680" cy="292608"/>
           </a:xfrm>
           <a:prstGeom prst="rect">
             <a:avLst/>
           </a:prstGeom>
           <a:noFill/>
-          <a:ln/>
-        </p:spPr>
-        <p:txBody>
-          <a:bodyPr wrap="square" lIns="0" tIns="0" rIns="0" bIns="0" rtlCol="0" anchor="ctr"/>
-          <a:lstStyle/>
-          <a:p>
-            <a:pPr algn="l" indent="0" marL="0">
-              <a:buNone/>
-            </a:pPr>
-            <a:r>
-              <a:rPr lang="en-US" sz="900" dirty="0">
-                <a:solidFill>
-                  <a:srgbClr val="5D5D72"/>
-                </a:solidFill>
-                <a:latin typeface="Calibri" pitchFamily="34" charset="0"/>
-                <a:ea typeface="Calibri" pitchFamily="34" charset="-122"/>
-                <a:cs typeface="Calibri" pitchFamily="34" charset="-120"/>
-              </a:rPr>
-              <a:t>Usman Akram  •  COMSATS University Islamabad</a:t>
-            </a:r>
-            <a:endParaRPr lang="en-US" sz="900" dirty="0"/>
-          </a:p>
-        </p:txBody>
-      </p:sp>
-      <p:sp>
-        <p:nvSpPr>
-          <p:cNvPr id="6" name="Text 3"/>
-          <p:cNvSpPr txBox="1"/>
-          <p:nvPr/>
-        </p:nvSpPr>
-        <p:spPr>
-          <a:xfrm>
-            <a:off x="11155680" y="6446520"/>
-            <a:ext cx="457200" cy="292608"/>
-          </a:xfrm>
-          <a:prstGeom prst="rect">
-            <a:avLst/>
-          </a:prstGeom>
-          <a:noFill/>
-          <a:ln/>
-        </p:spPr>
-        <p:txBody>
-          <a:bodyPr wrap="square" lIns="0" tIns="0" rIns="0" bIns="0" rtlCol="0" anchor="ctr"/>
-          <a:lstStyle/>
-          <a:p>
-            <a:pPr algn="r" indent="0" marL="0">
-              <a:buNone/>
-            </a:pPr>
-            <a:r>
-              <a:rPr lang="en-US" sz="900" dirty="0">
-                <a:solidFill>
-                  <a:srgbClr val="5D5D72"/>
-                </a:solidFill>
-                <a:latin typeface="Calibri" pitchFamily="34" charset="0"/>
-                <a:ea typeface="Calibri" pitchFamily="34" charset="-122"/>
-                <a:cs typeface="Calibri" pitchFamily="34" charset="-120"/>
-              </a:rPr>
-              <a:t>17</a:t>
-            </a:r>
-            <a:endParaRPr lang="en-US" sz="900" dirty="0"/>
+        </p:spPr>
+        <p:txBody>
+          <a:bodyPr wrap="none" lIns="0" rIns="0" tIns="0" bIns="0">
+            <a:spAutoFit/>
+          </a:bodyPr>
+          <a:lstStyle/>
+          <a:p>
+            <a:pPr algn="r"/>
+            <a:r>
+              <a:rPr sz="1000">
+                <a:solidFill>
+                  <a:srgbClr val="8A939B"/>
+                </a:solidFill>
+                <a:hlinkClick r:id="rId3"/>
+              </a:rPr>
+              <a:t>cuinotes.com</a:t>
+            </a:r>
+            <a:r>
+              <a:rPr sz="1000">
+                <a:solidFill>
+                  <a:srgbClr val="8A939B"/>
+                </a:solidFill>
+              </a:rPr>
+              <a:t>  ·  17</a:t>
+            </a:r>
           </a:p>
         </p:txBody>
       </p:sp>
@@ -8772,6 +8513,10 @@
           </a:solidFill>
           <a:ln/>
         </p:spPr>
+        <p:txBody>
+          <a:bodyPr/>
+          <a:p/>
+        </p:txBody>
       </p:sp>
       <p:sp>
         <p:nvSpPr>
@@ -8988,6 +8733,10 @@
             </a:outerShdw>
           </a:effectLst>
         </p:spPr>
+        <p:txBody>
+          <a:bodyPr/>
+          <a:p/>
+        </p:txBody>
       </p:sp>
       <p:pic>
         <p:nvPicPr>
@@ -9015,79 +8764,44 @@
       </p:pic>
       <p:sp>
         <p:nvSpPr>
-          <p:cNvPr id="8" name="Text 5"/>
+          <p:cNvPr id="10" name="cuinotes-footer-mark"/>
           <p:cNvSpPr txBox="1"/>
           <p:nvPr/>
         </p:nvSpPr>
         <p:spPr>
           <a:xfrm>
-            <a:off x="640080" y="6446520"/>
-            <a:ext cx="8686800" cy="292608"/>
+            <a:off x="9951720" y="6455664"/>
+            <a:ext cx="2011680" cy="292608"/>
           </a:xfrm>
           <a:prstGeom prst="rect">
             <a:avLst/>
           </a:prstGeom>
           <a:noFill/>
-          <a:ln/>
-        </p:spPr>
-        <p:txBody>
-          <a:bodyPr wrap="square" lIns="0" tIns="0" rIns="0" bIns="0" rtlCol="0" anchor="ctr"/>
-          <a:lstStyle/>
-          <a:p>
-            <a:pPr algn="l" indent="0" marL="0">
-              <a:buNone/>
-            </a:pPr>
-            <a:r>
-              <a:rPr lang="en-US" sz="900" dirty="0">
-                <a:solidFill>
-                  <a:srgbClr val="5D5D72"/>
-                </a:solidFill>
-                <a:latin typeface="Calibri" pitchFamily="34" charset="0"/>
-                <a:ea typeface="Calibri" pitchFamily="34" charset="-122"/>
-                <a:cs typeface="Calibri" pitchFamily="34" charset="-120"/>
-              </a:rPr>
-              <a:t>Usman Akram  •  COMSATS University Islamabad</a:t>
-            </a:r>
-            <a:endParaRPr lang="en-US" sz="900" dirty="0"/>
-          </a:p>
-        </p:txBody>
-      </p:sp>
-      <p:sp>
-        <p:nvSpPr>
-          <p:cNvPr id="9" name="Text 6"/>
-          <p:cNvSpPr txBox="1"/>
-          <p:nvPr/>
-        </p:nvSpPr>
-        <p:spPr>
-          <a:xfrm>
-            <a:off x="11155680" y="6446520"/>
-            <a:ext cx="457200" cy="292608"/>
-          </a:xfrm>
-          <a:prstGeom prst="rect">
-            <a:avLst/>
-          </a:prstGeom>
-          <a:noFill/>
-          <a:ln/>
-        </p:spPr>
-        <p:txBody>
-          <a:bodyPr wrap="square" lIns="0" tIns="0" rIns="0" bIns="0" rtlCol="0" anchor="ctr"/>
-          <a:lstStyle/>
-          <a:p>
-            <a:pPr algn="r" indent="0" marL="0">
-              <a:buNone/>
-            </a:pPr>
-            <a:r>
-              <a:rPr lang="en-US" sz="900" dirty="0">
-                <a:solidFill>
-                  <a:srgbClr val="5D5D72"/>
-                </a:solidFill>
-                <a:latin typeface="Calibri" pitchFamily="34" charset="0"/>
-                <a:ea typeface="Calibri" pitchFamily="34" charset="-122"/>
-                <a:cs typeface="Calibri" pitchFamily="34" charset="-120"/>
-              </a:rPr>
-              <a:t>18</a:t>
-            </a:r>
-            <a:endParaRPr lang="en-US" sz="900" dirty="0"/>
+        </p:spPr>
+        <p:txBody>
+          <a:bodyPr wrap="none" lIns="0" rIns="0" tIns="0" bIns="0">
+            <a:spAutoFit/>
+          </a:bodyPr>
+          <a:lstStyle/>
+          <a:p>
+            <a:pPr algn="r"/>
+            <a:r>
+              <a:rPr sz="1000">
+                <a:solidFill>
+                  <a:srgbClr val="8A939B"/>
+                </a:solidFill>
+                <a:hlinkClick r:id="rId4"/>
+              </a:rPr>
+              <a:t>cuinotes.com</a:t>
+            </a:r>
+            <a:r>
+              <a:rPr sz="1000">
+                <a:solidFill>
+                  <a:srgbClr val="8A939B"/>
+                </a:solidFill>
+              </a:rPr>
+              <a:t>  ·  18</a:t>
+            </a:r>
           </a:p>
         </p:txBody>
       </p:sp>
@@ -10676,79 +10390,44 @@
       </p:graphicFrame>
       <p:sp>
         <p:nvSpPr>
-          <p:cNvPr id="5" name="Text 2"/>
+          <p:cNvPr id="21" name="cuinotes-footer-mark"/>
           <p:cNvSpPr txBox="1"/>
           <p:nvPr/>
         </p:nvSpPr>
         <p:spPr>
           <a:xfrm>
-            <a:off x="640080" y="6446520"/>
-            <a:ext cx="8686800" cy="292608"/>
+            <a:off x="9951720" y="6455664"/>
+            <a:ext cx="2011680" cy="292608"/>
           </a:xfrm>
           <a:prstGeom prst="rect">
             <a:avLst/>
           </a:prstGeom>
           <a:noFill/>
-          <a:ln/>
-        </p:spPr>
-        <p:txBody>
-          <a:bodyPr wrap="square" lIns="0" tIns="0" rIns="0" bIns="0" rtlCol="0" anchor="ctr"/>
-          <a:lstStyle/>
-          <a:p>
-            <a:pPr algn="l" indent="0" marL="0">
-              <a:buNone/>
-            </a:pPr>
-            <a:r>
-              <a:rPr lang="en-US" sz="900" dirty="0">
-                <a:solidFill>
-                  <a:srgbClr val="5D5D72"/>
-                </a:solidFill>
-                <a:latin typeface="Calibri" pitchFamily="34" charset="0"/>
-                <a:ea typeface="Calibri" pitchFamily="34" charset="-122"/>
-                <a:cs typeface="Calibri" pitchFamily="34" charset="-120"/>
-              </a:rPr>
-              <a:t>Usman Akram  •  COMSATS University Islamabad</a:t>
-            </a:r>
-            <a:endParaRPr lang="en-US" sz="900" dirty="0"/>
-          </a:p>
-        </p:txBody>
-      </p:sp>
-      <p:sp>
-        <p:nvSpPr>
-          <p:cNvPr id="6" name="Text 3"/>
-          <p:cNvSpPr txBox="1"/>
-          <p:nvPr/>
-        </p:nvSpPr>
-        <p:spPr>
-          <a:xfrm>
-            <a:off x="11155680" y="6446520"/>
-            <a:ext cx="457200" cy="292608"/>
-          </a:xfrm>
-          <a:prstGeom prst="rect">
-            <a:avLst/>
-          </a:prstGeom>
-          <a:noFill/>
-          <a:ln/>
-        </p:spPr>
-        <p:txBody>
-          <a:bodyPr wrap="square" lIns="0" tIns="0" rIns="0" bIns="0" rtlCol="0" anchor="ctr"/>
-          <a:lstStyle/>
-          <a:p>
-            <a:pPr algn="r" indent="0" marL="0">
-              <a:buNone/>
-            </a:pPr>
-            <a:r>
-              <a:rPr lang="en-US" sz="900" dirty="0">
-                <a:solidFill>
-                  <a:srgbClr val="5D5D72"/>
-                </a:solidFill>
-                <a:latin typeface="Calibri" pitchFamily="34" charset="0"/>
-                <a:ea typeface="Calibri" pitchFamily="34" charset="-122"/>
-                <a:cs typeface="Calibri" pitchFamily="34" charset="-120"/>
-              </a:rPr>
-              <a:t>19</a:t>
-            </a:r>
-            <a:endParaRPr lang="en-US" sz="900" dirty="0"/>
+        </p:spPr>
+        <p:txBody>
+          <a:bodyPr wrap="none" lIns="0" rIns="0" tIns="0" bIns="0">
+            <a:spAutoFit/>
+          </a:bodyPr>
+          <a:lstStyle/>
+          <a:p>
+            <a:pPr algn="r"/>
+            <a:r>
+              <a:rPr sz="1000">
+                <a:solidFill>
+                  <a:srgbClr val="8A939B"/>
+                </a:solidFill>
+                <a:hlinkClick r:id="rId3"/>
+              </a:rPr>
+              <a:t>cuinotes.com</a:t>
+            </a:r>
+            <a:r>
+              <a:rPr sz="1000">
+                <a:solidFill>
+                  <a:srgbClr val="8A939B"/>
+                </a:solidFill>
+              </a:rPr>
+              <a:t>  ·  19</a:t>
+            </a:r>
           </a:p>
         </p:txBody>
       </p:sp>
@@ -10881,6 +10560,10 @@
           </a:solidFill>
           <a:ln/>
         </p:spPr>
+        <p:txBody>
+          <a:bodyPr/>
+          <a:p/>
+        </p:txBody>
       </p:sp>
       <p:sp>
         <p:nvSpPr>
@@ -10979,6 +10662,10 @@
           </a:solidFill>
           <a:ln/>
         </p:spPr>
+        <p:txBody>
+          <a:bodyPr/>
+          <a:p/>
+        </p:txBody>
       </p:sp>
       <p:sp>
         <p:nvSpPr>
@@ -11077,6 +10764,10 @@
           </a:solidFill>
           <a:ln/>
         </p:spPr>
+        <p:txBody>
+          <a:bodyPr/>
+          <a:p/>
+        </p:txBody>
       </p:sp>
       <p:sp>
         <p:nvSpPr>
@@ -11175,6 +10866,10 @@
           </a:solidFill>
           <a:ln/>
         </p:spPr>
+        <p:txBody>
+          <a:bodyPr/>
+          <a:p/>
+        </p:txBody>
       </p:sp>
       <p:sp>
         <p:nvSpPr>
@@ -11273,6 +10968,10 @@
           </a:solidFill>
           <a:ln/>
         </p:spPr>
+        <p:txBody>
+          <a:bodyPr/>
+          <a:p/>
+        </p:txBody>
       </p:sp>
       <p:sp>
         <p:nvSpPr>
@@ -11371,6 +11070,10 @@
           </a:solidFill>
           <a:ln/>
         </p:spPr>
+        <p:txBody>
+          <a:bodyPr/>
+          <a:p/>
+        </p:txBody>
       </p:sp>
       <p:sp>
         <p:nvSpPr>
@@ -11452,79 +11155,44 @@
       </p:sp>
       <p:sp>
         <p:nvSpPr>
-          <p:cNvPr id="22" name="Text 20"/>
+          <p:cNvPr id="24" name="cuinotes-footer-mark"/>
           <p:cNvSpPr txBox="1"/>
           <p:nvPr/>
         </p:nvSpPr>
         <p:spPr>
           <a:xfrm>
-            <a:off x="640080" y="6446520"/>
-            <a:ext cx="8686800" cy="292608"/>
+            <a:off x="9951720" y="6455664"/>
+            <a:ext cx="2011680" cy="292608"/>
           </a:xfrm>
           <a:prstGeom prst="rect">
             <a:avLst/>
           </a:prstGeom>
           <a:noFill/>
-          <a:ln/>
-        </p:spPr>
-        <p:txBody>
-          <a:bodyPr wrap="square" lIns="0" tIns="0" rIns="0" bIns="0" rtlCol="0" anchor="ctr"/>
-          <a:lstStyle/>
-          <a:p>
-            <a:pPr algn="l" indent="0" marL="0">
-              <a:buNone/>
-            </a:pPr>
-            <a:r>
-              <a:rPr lang="en-US" sz="900" dirty="0">
-                <a:solidFill>
-                  <a:srgbClr val="5D5D72"/>
-                </a:solidFill>
-                <a:latin typeface="Calibri" pitchFamily="34" charset="0"/>
-                <a:ea typeface="Calibri" pitchFamily="34" charset="-122"/>
-                <a:cs typeface="Calibri" pitchFamily="34" charset="-120"/>
-              </a:rPr>
-              <a:t>Usman Akram  •  COMSATS University Islamabad</a:t>
-            </a:r>
-            <a:endParaRPr lang="en-US" sz="900" dirty="0"/>
-          </a:p>
-        </p:txBody>
-      </p:sp>
-      <p:sp>
-        <p:nvSpPr>
-          <p:cNvPr id="23" name="Text 21"/>
-          <p:cNvSpPr txBox="1"/>
-          <p:nvPr/>
-        </p:nvSpPr>
-        <p:spPr>
-          <a:xfrm>
-            <a:off x="11155680" y="6446520"/>
-            <a:ext cx="457200" cy="292608"/>
-          </a:xfrm>
-          <a:prstGeom prst="rect">
-            <a:avLst/>
-          </a:prstGeom>
-          <a:noFill/>
-          <a:ln/>
-        </p:spPr>
-        <p:txBody>
-          <a:bodyPr wrap="square" lIns="0" tIns="0" rIns="0" bIns="0" rtlCol="0" anchor="ctr"/>
-          <a:lstStyle/>
-          <a:p>
-            <a:pPr algn="r" indent="0" marL="0">
-              <a:buNone/>
-            </a:pPr>
-            <a:r>
-              <a:rPr lang="en-US" sz="900" dirty="0">
-                <a:solidFill>
-                  <a:srgbClr val="5D5D72"/>
-                </a:solidFill>
-                <a:latin typeface="Calibri" pitchFamily="34" charset="0"/>
-                <a:ea typeface="Calibri" pitchFamily="34" charset="-122"/>
-                <a:cs typeface="Calibri" pitchFamily="34" charset="-120"/>
-              </a:rPr>
-              <a:t>2</a:t>
-            </a:r>
-            <a:endParaRPr lang="en-US" sz="900" dirty="0"/>
+        </p:spPr>
+        <p:txBody>
+          <a:bodyPr wrap="none" lIns="0" rIns="0" tIns="0" bIns="0">
+            <a:spAutoFit/>
+          </a:bodyPr>
+          <a:lstStyle/>
+          <a:p>
+            <a:pPr algn="r"/>
+            <a:r>
+              <a:rPr sz="1000">
+                <a:solidFill>
+                  <a:srgbClr val="8A939B"/>
+                </a:solidFill>
+                <a:hlinkClick r:id="rId3"/>
+              </a:rPr>
+              <a:t>cuinotes.com</a:t>
+            </a:r>
+            <a:r>
+              <a:rPr sz="1000">
+                <a:solidFill>
+                  <a:srgbClr val="8A939B"/>
+                </a:solidFill>
+              </a:rPr>
+              <a:t>  ·  2</a:t>
+            </a:r>
           </a:p>
         </p:txBody>
       </p:sp>
@@ -11659,6 +11327,10 @@
           </a:solidFill>
           <a:ln/>
         </p:spPr>
+        <p:txBody>
+          <a:bodyPr/>
+          <a:p/>
+        </p:txBody>
       </p:sp>
       <p:sp>
         <p:nvSpPr>
@@ -11775,6 +11447,10 @@
             </a:outerShdw>
           </a:effectLst>
         </p:spPr>
+        <p:txBody>
+          <a:bodyPr/>
+          <a:p/>
+        </p:txBody>
       </p:sp>
       <p:pic>
         <p:nvPicPr>
@@ -11802,79 +11478,44 @@
       </p:pic>
       <p:sp>
         <p:nvSpPr>
-          <p:cNvPr id="8" name="Text 5"/>
+          <p:cNvPr id="10" name="cuinotes-footer-mark"/>
           <p:cNvSpPr txBox="1"/>
           <p:nvPr/>
         </p:nvSpPr>
         <p:spPr>
           <a:xfrm>
-            <a:off x="640080" y="6446520"/>
-            <a:ext cx="8686800" cy="292608"/>
+            <a:off x="9951720" y="6455664"/>
+            <a:ext cx="2011680" cy="292608"/>
           </a:xfrm>
           <a:prstGeom prst="rect">
             <a:avLst/>
           </a:prstGeom>
           <a:noFill/>
-          <a:ln/>
-        </p:spPr>
-        <p:txBody>
-          <a:bodyPr wrap="square" lIns="0" tIns="0" rIns="0" bIns="0" rtlCol="0" anchor="ctr"/>
-          <a:lstStyle/>
-          <a:p>
-            <a:pPr algn="l" indent="0" marL="0">
-              <a:buNone/>
-            </a:pPr>
-            <a:r>
-              <a:rPr lang="en-US" sz="900" dirty="0">
-                <a:solidFill>
-                  <a:srgbClr val="5D5D72"/>
-                </a:solidFill>
-                <a:latin typeface="Calibri" pitchFamily="34" charset="0"/>
-                <a:ea typeface="Calibri" pitchFamily="34" charset="-122"/>
-                <a:cs typeface="Calibri" pitchFamily="34" charset="-120"/>
-              </a:rPr>
-              <a:t>Usman Akram  •  COMSATS University Islamabad</a:t>
-            </a:r>
-            <a:endParaRPr lang="en-US" sz="900" dirty="0"/>
-          </a:p>
-        </p:txBody>
-      </p:sp>
-      <p:sp>
-        <p:nvSpPr>
-          <p:cNvPr id="9" name="Text 6"/>
-          <p:cNvSpPr txBox="1"/>
-          <p:nvPr/>
-        </p:nvSpPr>
-        <p:spPr>
-          <a:xfrm>
-            <a:off x="11155680" y="6446520"/>
-            <a:ext cx="457200" cy="292608"/>
-          </a:xfrm>
-          <a:prstGeom prst="rect">
-            <a:avLst/>
-          </a:prstGeom>
-          <a:noFill/>
-          <a:ln/>
-        </p:spPr>
-        <p:txBody>
-          <a:bodyPr wrap="square" lIns="0" tIns="0" rIns="0" bIns="0" rtlCol="0" anchor="ctr"/>
-          <a:lstStyle/>
-          <a:p>
-            <a:pPr algn="r" indent="0" marL="0">
-              <a:buNone/>
-            </a:pPr>
-            <a:r>
-              <a:rPr lang="en-US" sz="900" dirty="0">
-                <a:solidFill>
-                  <a:srgbClr val="5D5D72"/>
-                </a:solidFill>
-                <a:latin typeface="Calibri" pitchFamily="34" charset="0"/>
-                <a:ea typeface="Calibri" pitchFamily="34" charset="-122"/>
-                <a:cs typeface="Calibri" pitchFamily="34" charset="-120"/>
-              </a:rPr>
-              <a:t>20</a:t>
-            </a:r>
-            <a:endParaRPr lang="en-US" sz="900" dirty="0"/>
+        </p:spPr>
+        <p:txBody>
+          <a:bodyPr wrap="none" lIns="0" rIns="0" tIns="0" bIns="0">
+            <a:spAutoFit/>
+          </a:bodyPr>
+          <a:lstStyle/>
+          <a:p>
+            <a:pPr algn="r"/>
+            <a:r>
+              <a:rPr sz="1000">
+                <a:solidFill>
+                  <a:srgbClr val="8A939B"/>
+                </a:solidFill>
+                <a:hlinkClick r:id="rId4"/>
+              </a:rPr>
+              <a:t>cuinotes.com</a:t>
+            </a:r>
+            <a:r>
+              <a:rPr sz="1000">
+                <a:solidFill>
+                  <a:srgbClr val="8A939B"/>
+                </a:solidFill>
+              </a:rPr>
+              <a:t>  ·  20</a:t>
+            </a:r>
           </a:p>
         </p:txBody>
       </p:sp>
@@ -12014,6 +11655,10 @@
             <a:prstDash val="solid"/>
           </a:ln>
         </p:spPr>
+        <p:txBody>
+          <a:bodyPr/>
+          <a:p/>
+        </p:txBody>
       </p:sp>
       <p:sp>
         <p:nvSpPr>
@@ -12165,6 +11810,10 @@
             <a:prstDash val="solid"/>
           </a:ln>
         </p:spPr>
+        <p:txBody>
+          <a:bodyPr/>
+          <a:p/>
+        </p:txBody>
       </p:sp>
       <p:sp>
         <p:nvSpPr>
@@ -12292,79 +11941,44 @@
       </p:sp>
       <p:sp>
         <p:nvSpPr>
-          <p:cNvPr id="10" name="Text 8"/>
+          <p:cNvPr id="12" name="cuinotes-footer-mark"/>
           <p:cNvSpPr txBox="1"/>
           <p:nvPr/>
         </p:nvSpPr>
         <p:spPr>
           <a:xfrm>
-            <a:off x="640080" y="6446520"/>
-            <a:ext cx="8686800" cy="292608"/>
+            <a:off x="9951720" y="6455664"/>
+            <a:ext cx="2011680" cy="292608"/>
           </a:xfrm>
           <a:prstGeom prst="rect">
             <a:avLst/>
           </a:prstGeom>
           <a:noFill/>
-          <a:ln/>
-        </p:spPr>
-        <p:txBody>
-          <a:bodyPr wrap="square" lIns="0" tIns="0" rIns="0" bIns="0" rtlCol="0" anchor="ctr"/>
-          <a:lstStyle/>
-          <a:p>
-            <a:pPr algn="l" indent="0" marL="0">
-              <a:buNone/>
-            </a:pPr>
-            <a:r>
-              <a:rPr lang="en-US" sz="900" dirty="0">
-                <a:solidFill>
-                  <a:srgbClr val="5D5D72"/>
-                </a:solidFill>
-                <a:latin typeface="Calibri" pitchFamily="34" charset="0"/>
-                <a:ea typeface="Calibri" pitchFamily="34" charset="-122"/>
-                <a:cs typeface="Calibri" pitchFamily="34" charset="-120"/>
-              </a:rPr>
-              <a:t>Usman Akram  •  COMSATS University Islamabad</a:t>
-            </a:r>
-            <a:endParaRPr lang="en-US" sz="900" dirty="0"/>
-          </a:p>
-        </p:txBody>
-      </p:sp>
-      <p:sp>
-        <p:nvSpPr>
-          <p:cNvPr id="11" name="Text 9"/>
-          <p:cNvSpPr txBox="1"/>
-          <p:nvPr/>
-        </p:nvSpPr>
-        <p:spPr>
-          <a:xfrm>
-            <a:off x="11155680" y="6446520"/>
-            <a:ext cx="457200" cy="292608"/>
-          </a:xfrm>
-          <a:prstGeom prst="rect">
-            <a:avLst/>
-          </a:prstGeom>
-          <a:noFill/>
-          <a:ln/>
-        </p:spPr>
-        <p:txBody>
-          <a:bodyPr wrap="square" lIns="0" tIns="0" rIns="0" bIns="0" rtlCol="0" anchor="ctr"/>
-          <a:lstStyle/>
-          <a:p>
-            <a:pPr algn="r" indent="0" marL="0">
-              <a:buNone/>
-            </a:pPr>
-            <a:r>
-              <a:rPr lang="en-US" sz="900" dirty="0">
-                <a:solidFill>
-                  <a:srgbClr val="5D5D72"/>
-                </a:solidFill>
-                <a:latin typeface="Calibri" pitchFamily="34" charset="0"/>
-                <a:ea typeface="Calibri" pitchFamily="34" charset="-122"/>
-                <a:cs typeface="Calibri" pitchFamily="34" charset="-120"/>
-              </a:rPr>
-              <a:t>21</a:t>
-            </a:r>
-            <a:endParaRPr lang="en-US" sz="900" dirty="0"/>
+        </p:spPr>
+        <p:txBody>
+          <a:bodyPr wrap="none" lIns="0" rIns="0" tIns="0" bIns="0">
+            <a:spAutoFit/>
+          </a:bodyPr>
+          <a:lstStyle/>
+          <a:p>
+            <a:pPr algn="r"/>
+            <a:r>
+              <a:rPr sz="1000">
+                <a:solidFill>
+                  <a:srgbClr val="8A939B"/>
+                </a:solidFill>
+                <a:hlinkClick r:id="rId3"/>
+              </a:rPr>
+              <a:t>cuinotes.com</a:t>
+            </a:r>
+            <a:r>
+              <a:rPr sz="1000">
+                <a:solidFill>
+                  <a:srgbClr val="8A939B"/>
+                </a:solidFill>
+              </a:rPr>
+              <a:t>  ·  21</a:t>
+            </a:r>
           </a:p>
         </p:txBody>
       </p:sp>
@@ -12499,6 +12113,10 @@
           </a:solidFill>
           <a:ln/>
         </p:spPr>
+        <p:txBody>
+          <a:bodyPr/>
+          <a:p/>
+        </p:txBody>
       </p:sp>
       <p:sp>
         <p:nvSpPr>
@@ -12655,6 +12273,10 @@
             </a:outerShdw>
           </a:effectLst>
         </p:spPr>
+        <p:txBody>
+          <a:bodyPr/>
+          <a:p/>
+        </p:txBody>
       </p:sp>
       <p:pic>
         <p:nvPicPr>
@@ -12682,79 +12304,44 @@
       </p:pic>
       <p:sp>
         <p:nvSpPr>
-          <p:cNvPr id="8" name="Text 5"/>
+          <p:cNvPr id="10" name="cuinotes-footer-mark"/>
           <p:cNvSpPr txBox="1"/>
           <p:nvPr/>
         </p:nvSpPr>
         <p:spPr>
           <a:xfrm>
-            <a:off x="640080" y="6446520"/>
-            <a:ext cx="8686800" cy="292608"/>
+            <a:off x="9951720" y="6455664"/>
+            <a:ext cx="2011680" cy="292608"/>
           </a:xfrm>
           <a:prstGeom prst="rect">
             <a:avLst/>
           </a:prstGeom>
           <a:noFill/>
-          <a:ln/>
-        </p:spPr>
-        <p:txBody>
-          <a:bodyPr wrap="square" lIns="0" tIns="0" rIns="0" bIns="0" rtlCol="0" anchor="ctr"/>
-          <a:lstStyle/>
-          <a:p>
-            <a:pPr algn="l" indent="0" marL="0">
-              <a:buNone/>
-            </a:pPr>
-            <a:r>
-              <a:rPr lang="en-US" sz="900" dirty="0">
-                <a:solidFill>
-                  <a:srgbClr val="5D5D72"/>
-                </a:solidFill>
-                <a:latin typeface="Calibri" pitchFamily="34" charset="0"/>
-                <a:ea typeface="Calibri" pitchFamily="34" charset="-122"/>
-                <a:cs typeface="Calibri" pitchFamily="34" charset="-120"/>
-              </a:rPr>
-              <a:t>Usman Akram  •  COMSATS University Islamabad</a:t>
-            </a:r>
-            <a:endParaRPr lang="en-US" sz="900" dirty="0"/>
-          </a:p>
-        </p:txBody>
-      </p:sp>
-      <p:sp>
-        <p:nvSpPr>
-          <p:cNvPr id="9" name="Text 6"/>
-          <p:cNvSpPr txBox="1"/>
-          <p:nvPr/>
-        </p:nvSpPr>
-        <p:spPr>
-          <a:xfrm>
-            <a:off x="11155680" y="6446520"/>
-            <a:ext cx="457200" cy="292608"/>
-          </a:xfrm>
-          <a:prstGeom prst="rect">
-            <a:avLst/>
-          </a:prstGeom>
-          <a:noFill/>
-          <a:ln/>
-        </p:spPr>
-        <p:txBody>
-          <a:bodyPr wrap="square" lIns="0" tIns="0" rIns="0" bIns="0" rtlCol="0" anchor="ctr"/>
-          <a:lstStyle/>
-          <a:p>
-            <a:pPr algn="r" indent="0" marL="0">
-              <a:buNone/>
-            </a:pPr>
-            <a:r>
-              <a:rPr lang="en-US" sz="900" dirty="0">
-                <a:solidFill>
-                  <a:srgbClr val="5D5D72"/>
-                </a:solidFill>
-                <a:latin typeface="Calibri" pitchFamily="34" charset="0"/>
-                <a:ea typeface="Calibri" pitchFamily="34" charset="-122"/>
-                <a:cs typeface="Calibri" pitchFamily="34" charset="-120"/>
-              </a:rPr>
-              <a:t>22</a:t>
-            </a:r>
-            <a:endParaRPr lang="en-US" sz="900" dirty="0"/>
+        </p:spPr>
+        <p:txBody>
+          <a:bodyPr wrap="none" lIns="0" rIns="0" tIns="0" bIns="0">
+            <a:spAutoFit/>
+          </a:bodyPr>
+          <a:lstStyle/>
+          <a:p>
+            <a:pPr algn="r"/>
+            <a:r>
+              <a:rPr sz="1000">
+                <a:solidFill>
+                  <a:srgbClr val="8A939B"/>
+                </a:solidFill>
+                <a:hlinkClick r:id="rId4"/>
+              </a:rPr>
+              <a:t>cuinotes.com</a:t>
+            </a:r>
+            <a:r>
+              <a:rPr sz="1000">
+                <a:solidFill>
+                  <a:srgbClr val="8A939B"/>
+                </a:solidFill>
+              </a:rPr>
+              <a:t>  ·  22</a:t>
+            </a:r>
           </a:p>
         </p:txBody>
       </p:sp>
@@ -12889,6 +12476,10 @@
           </a:solidFill>
           <a:ln/>
         </p:spPr>
+        <p:txBody>
+          <a:bodyPr/>
+          <a:p/>
+        </p:txBody>
       </p:sp>
       <p:sp>
         <p:nvSpPr>
@@ -12965,6 +12556,10 @@
             </a:outerShdw>
           </a:effectLst>
         </p:spPr>
+        <p:txBody>
+          <a:bodyPr/>
+          <a:p/>
+        </p:txBody>
       </p:sp>
       <p:pic>
         <p:nvPicPr>
@@ -12992,79 +12587,44 @@
       </p:pic>
       <p:sp>
         <p:nvSpPr>
-          <p:cNvPr id="8" name="Text 5"/>
+          <p:cNvPr id="10" name="cuinotes-footer-mark"/>
           <p:cNvSpPr txBox="1"/>
           <p:nvPr/>
         </p:nvSpPr>
         <p:spPr>
           <a:xfrm>
-            <a:off x="640080" y="6446520"/>
-            <a:ext cx="8686800" cy="292608"/>
+            <a:off x="9951720" y="6455664"/>
+            <a:ext cx="2011680" cy="292608"/>
           </a:xfrm>
           <a:prstGeom prst="rect">
             <a:avLst/>
           </a:prstGeom>
           <a:noFill/>
-          <a:ln/>
-        </p:spPr>
-        <p:txBody>
-          <a:bodyPr wrap="square" lIns="0" tIns="0" rIns="0" bIns="0" rtlCol="0" anchor="ctr"/>
-          <a:lstStyle/>
-          <a:p>
-            <a:pPr algn="l" indent="0" marL="0">
-              <a:buNone/>
-            </a:pPr>
-            <a:r>
-              <a:rPr lang="en-US" sz="900" dirty="0">
-                <a:solidFill>
-                  <a:srgbClr val="5D5D72"/>
-                </a:solidFill>
-                <a:latin typeface="Calibri" pitchFamily="34" charset="0"/>
-                <a:ea typeface="Calibri" pitchFamily="34" charset="-122"/>
-                <a:cs typeface="Calibri" pitchFamily="34" charset="-120"/>
-              </a:rPr>
-              <a:t>Usman Akram  •  COMSATS University Islamabad</a:t>
-            </a:r>
-            <a:endParaRPr lang="en-US" sz="900" dirty="0"/>
-          </a:p>
-        </p:txBody>
-      </p:sp>
-      <p:sp>
-        <p:nvSpPr>
-          <p:cNvPr id="9" name="Text 6"/>
-          <p:cNvSpPr txBox="1"/>
-          <p:nvPr/>
-        </p:nvSpPr>
-        <p:spPr>
-          <a:xfrm>
-            <a:off x="11155680" y="6446520"/>
-            <a:ext cx="457200" cy="292608"/>
-          </a:xfrm>
-          <a:prstGeom prst="rect">
-            <a:avLst/>
-          </a:prstGeom>
-          <a:noFill/>
-          <a:ln/>
-        </p:spPr>
-        <p:txBody>
-          <a:bodyPr wrap="square" lIns="0" tIns="0" rIns="0" bIns="0" rtlCol="0" anchor="ctr"/>
-          <a:lstStyle/>
-          <a:p>
-            <a:pPr algn="r" indent="0" marL="0">
-              <a:buNone/>
-            </a:pPr>
-            <a:r>
-              <a:rPr lang="en-US" sz="900" dirty="0">
-                <a:solidFill>
-                  <a:srgbClr val="5D5D72"/>
-                </a:solidFill>
-                <a:latin typeface="Calibri" pitchFamily="34" charset="0"/>
-                <a:ea typeface="Calibri" pitchFamily="34" charset="-122"/>
-                <a:cs typeface="Calibri" pitchFamily="34" charset="-120"/>
-              </a:rPr>
-              <a:t>23</a:t>
-            </a:r>
-            <a:endParaRPr lang="en-US" sz="900" dirty="0"/>
+        </p:spPr>
+        <p:txBody>
+          <a:bodyPr wrap="none" lIns="0" rIns="0" tIns="0" bIns="0">
+            <a:spAutoFit/>
+          </a:bodyPr>
+          <a:lstStyle/>
+          <a:p>
+            <a:pPr algn="r"/>
+            <a:r>
+              <a:rPr sz="1000">
+                <a:solidFill>
+                  <a:srgbClr val="8A939B"/>
+                </a:solidFill>
+                <a:hlinkClick r:id="rId4"/>
+              </a:rPr>
+              <a:t>cuinotes.com</a:t>
+            </a:r>
+            <a:r>
+              <a:rPr sz="1000">
+                <a:solidFill>
+                  <a:srgbClr val="8A939B"/>
+                </a:solidFill>
+              </a:rPr>
+              <a:t>  ·  23</a:t>
+            </a:r>
           </a:p>
         </p:txBody>
       </p:sp>
@@ -13199,6 +12759,10 @@
           </a:solidFill>
           <a:ln/>
         </p:spPr>
+        <p:txBody>
+          <a:bodyPr/>
+          <a:p/>
+        </p:txBody>
       </p:sp>
       <p:sp>
         <p:nvSpPr>
@@ -13424,6 +12988,10 @@
             </a:outerShdw>
           </a:effectLst>
         </p:spPr>
+        <p:txBody>
+          <a:bodyPr/>
+          <a:p/>
+        </p:txBody>
       </p:sp>
       <p:pic>
         <p:nvPicPr>
@@ -13451,79 +13019,44 @@
       </p:pic>
       <p:sp>
         <p:nvSpPr>
-          <p:cNvPr id="8" name="Text 5"/>
+          <p:cNvPr id="10" name="cuinotes-footer-mark"/>
           <p:cNvSpPr txBox="1"/>
           <p:nvPr/>
         </p:nvSpPr>
         <p:spPr>
           <a:xfrm>
-            <a:off x="640080" y="6446520"/>
-            <a:ext cx="8686800" cy="292608"/>
+            <a:off x="9951720" y="6455664"/>
+            <a:ext cx="2011680" cy="292608"/>
           </a:xfrm>
           <a:prstGeom prst="rect">
             <a:avLst/>
           </a:prstGeom>
           <a:noFill/>
-          <a:ln/>
-        </p:spPr>
-        <p:txBody>
-          <a:bodyPr wrap="square" lIns="0" tIns="0" rIns="0" bIns="0" rtlCol="0" anchor="ctr"/>
-          <a:lstStyle/>
-          <a:p>
-            <a:pPr algn="l" indent="0" marL="0">
-              <a:buNone/>
-            </a:pPr>
-            <a:r>
-              <a:rPr lang="en-US" sz="900" dirty="0">
-                <a:solidFill>
-                  <a:srgbClr val="5D5D72"/>
-                </a:solidFill>
-                <a:latin typeface="Calibri" pitchFamily="34" charset="0"/>
-                <a:ea typeface="Calibri" pitchFamily="34" charset="-122"/>
-                <a:cs typeface="Calibri" pitchFamily="34" charset="-120"/>
-              </a:rPr>
-              <a:t>Usman Akram  •  COMSATS University Islamabad</a:t>
-            </a:r>
-            <a:endParaRPr lang="en-US" sz="900" dirty="0"/>
-          </a:p>
-        </p:txBody>
-      </p:sp>
-      <p:sp>
-        <p:nvSpPr>
-          <p:cNvPr id="9" name="Text 6"/>
-          <p:cNvSpPr txBox="1"/>
-          <p:nvPr/>
-        </p:nvSpPr>
-        <p:spPr>
-          <a:xfrm>
-            <a:off x="11155680" y="6446520"/>
-            <a:ext cx="457200" cy="292608"/>
-          </a:xfrm>
-          <a:prstGeom prst="rect">
-            <a:avLst/>
-          </a:prstGeom>
-          <a:noFill/>
-          <a:ln/>
-        </p:spPr>
-        <p:txBody>
-          <a:bodyPr wrap="square" lIns="0" tIns="0" rIns="0" bIns="0" rtlCol="0" anchor="ctr"/>
-          <a:lstStyle/>
-          <a:p>
-            <a:pPr algn="r" indent="0" marL="0">
-              <a:buNone/>
-            </a:pPr>
-            <a:r>
-              <a:rPr lang="en-US" sz="900" dirty="0">
-                <a:solidFill>
-                  <a:srgbClr val="5D5D72"/>
-                </a:solidFill>
-                <a:latin typeface="Calibri" pitchFamily="34" charset="0"/>
-                <a:ea typeface="Calibri" pitchFamily="34" charset="-122"/>
-                <a:cs typeface="Calibri" pitchFamily="34" charset="-120"/>
-              </a:rPr>
-              <a:t>24</a:t>
-            </a:r>
-            <a:endParaRPr lang="en-US" sz="900" dirty="0"/>
+        </p:spPr>
+        <p:txBody>
+          <a:bodyPr wrap="none" lIns="0" rIns="0" tIns="0" bIns="0">
+            <a:spAutoFit/>
+          </a:bodyPr>
+          <a:lstStyle/>
+          <a:p>
+            <a:pPr algn="r"/>
+            <a:r>
+              <a:rPr sz="1000">
+                <a:solidFill>
+                  <a:srgbClr val="8A939B"/>
+                </a:solidFill>
+                <a:hlinkClick r:id="rId4"/>
+              </a:rPr>
+              <a:t>cuinotes.com</a:t>
+            </a:r>
+            <a:r>
+              <a:rPr sz="1000">
+                <a:solidFill>
+                  <a:srgbClr val="8A939B"/>
+                </a:solidFill>
+              </a:rPr>
+              <a:t>  ·  24</a:t>
+            </a:r>
           </a:p>
         </p:txBody>
       </p:sp>
@@ -13658,6 +13191,10 @@
           </a:solidFill>
           <a:ln/>
         </p:spPr>
+        <p:txBody>
+          <a:bodyPr/>
+          <a:p/>
+        </p:txBody>
       </p:sp>
       <p:sp>
         <p:nvSpPr>
@@ -13894,6 +13431,10 @@
             </a:outerShdw>
           </a:effectLst>
         </p:spPr>
+        <p:txBody>
+          <a:bodyPr/>
+          <a:p/>
+        </p:txBody>
       </p:sp>
       <p:pic>
         <p:nvPicPr>
@@ -13921,79 +13462,44 @@
       </p:pic>
       <p:sp>
         <p:nvSpPr>
-          <p:cNvPr id="8" name="Text 5"/>
+          <p:cNvPr id="10" name="cuinotes-footer-mark"/>
           <p:cNvSpPr txBox="1"/>
           <p:nvPr/>
         </p:nvSpPr>
         <p:spPr>
           <a:xfrm>
-            <a:off x="640080" y="6446520"/>
-            <a:ext cx="8686800" cy="292608"/>
+            <a:off x="9951720" y="6455664"/>
+            <a:ext cx="2011680" cy="292608"/>
           </a:xfrm>
           <a:prstGeom prst="rect">
             <a:avLst/>
           </a:prstGeom>
           <a:noFill/>
-          <a:ln/>
-        </p:spPr>
-        <p:txBody>
-          <a:bodyPr wrap="square" lIns="0" tIns="0" rIns="0" bIns="0" rtlCol="0" anchor="ctr"/>
-          <a:lstStyle/>
-          <a:p>
-            <a:pPr algn="l" indent="0" marL="0">
-              <a:buNone/>
-            </a:pPr>
-            <a:r>
-              <a:rPr lang="en-US" sz="900" dirty="0">
-                <a:solidFill>
-                  <a:srgbClr val="5D5D72"/>
-                </a:solidFill>
-                <a:latin typeface="Calibri" pitchFamily="34" charset="0"/>
-                <a:ea typeface="Calibri" pitchFamily="34" charset="-122"/>
-                <a:cs typeface="Calibri" pitchFamily="34" charset="-120"/>
-              </a:rPr>
-              <a:t>Usman Akram  •  COMSATS University Islamabad</a:t>
-            </a:r>
-            <a:endParaRPr lang="en-US" sz="900" dirty="0"/>
-          </a:p>
-        </p:txBody>
-      </p:sp>
-      <p:sp>
-        <p:nvSpPr>
-          <p:cNvPr id="9" name="Text 6"/>
-          <p:cNvSpPr txBox="1"/>
-          <p:nvPr/>
-        </p:nvSpPr>
-        <p:spPr>
-          <a:xfrm>
-            <a:off x="11155680" y="6446520"/>
-            <a:ext cx="457200" cy="292608"/>
-          </a:xfrm>
-          <a:prstGeom prst="rect">
-            <a:avLst/>
-          </a:prstGeom>
-          <a:noFill/>
-          <a:ln/>
-        </p:spPr>
-        <p:txBody>
-          <a:bodyPr wrap="square" lIns="0" tIns="0" rIns="0" bIns="0" rtlCol="0" anchor="ctr"/>
-          <a:lstStyle/>
-          <a:p>
-            <a:pPr algn="r" indent="0" marL="0">
-              <a:buNone/>
-            </a:pPr>
-            <a:r>
-              <a:rPr lang="en-US" sz="900" dirty="0">
-                <a:solidFill>
-                  <a:srgbClr val="5D5D72"/>
-                </a:solidFill>
-                <a:latin typeface="Calibri" pitchFamily="34" charset="0"/>
-                <a:ea typeface="Calibri" pitchFamily="34" charset="-122"/>
-                <a:cs typeface="Calibri" pitchFamily="34" charset="-120"/>
-              </a:rPr>
-              <a:t>25</a:t>
-            </a:r>
-            <a:endParaRPr lang="en-US" sz="900" dirty="0"/>
+        </p:spPr>
+        <p:txBody>
+          <a:bodyPr wrap="none" lIns="0" rIns="0" tIns="0" bIns="0">
+            <a:spAutoFit/>
+          </a:bodyPr>
+          <a:lstStyle/>
+          <a:p>
+            <a:pPr algn="r"/>
+            <a:r>
+              <a:rPr sz="1000">
+                <a:solidFill>
+                  <a:srgbClr val="8A939B"/>
+                </a:solidFill>
+                <a:hlinkClick r:id="rId4"/>
+              </a:rPr>
+              <a:t>cuinotes.com</a:t>
+            </a:r>
+            <a:r>
+              <a:rPr sz="1000">
+                <a:solidFill>
+                  <a:srgbClr val="8A939B"/>
+                </a:solidFill>
+              </a:rPr>
+              <a:t>  ·  25</a:t>
+            </a:r>
           </a:p>
         </p:txBody>
       </p:sp>
@@ -14128,6 +13634,10 @@
           </a:solidFill>
           <a:ln/>
         </p:spPr>
+        <p:txBody>
+          <a:bodyPr/>
+          <a:p/>
+        </p:txBody>
       </p:sp>
       <p:sp>
         <p:nvSpPr>
@@ -14382,6 +13892,10 @@
             </a:outerShdw>
           </a:effectLst>
         </p:spPr>
+        <p:txBody>
+          <a:bodyPr/>
+          <a:p/>
+        </p:txBody>
       </p:sp>
       <p:pic>
         <p:nvPicPr>
@@ -14409,79 +13923,44 @@
       </p:pic>
       <p:sp>
         <p:nvSpPr>
-          <p:cNvPr id="8" name="Text 5"/>
+          <p:cNvPr id="10" name="cuinotes-footer-mark"/>
           <p:cNvSpPr txBox="1"/>
           <p:nvPr/>
         </p:nvSpPr>
         <p:spPr>
           <a:xfrm>
-            <a:off x="640080" y="6446520"/>
-            <a:ext cx="8686800" cy="292608"/>
+            <a:off x="9951720" y="6455664"/>
+            <a:ext cx="2011680" cy="292608"/>
           </a:xfrm>
           <a:prstGeom prst="rect">
             <a:avLst/>
           </a:prstGeom>
           <a:noFill/>
-          <a:ln/>
-        </p:spPr>
-        <p:txBody>
-          <a:bodyPr wrap="square" lIns="0" tIns="0" rIns="0" bIns="0" rtlCol="0" anchor="ctr"/>
-          <a:lstStyle/>
-          <a:p>
-            <a:pPr algn="l" indent="0" marL="0">
-              <a:buNone/>
-            </a:pPr>
-            <a:r>
-              <a:rPr lang="en-US" sz="900" dirty="0">
-                <a:solidFill>
-                  <a:srgbClr val="5D5D72"/>
-                </a:solidFill>
-                <a:latin typeface="Calibri" pitchFamily="34" charset="0"/>
-                <a:ea typeface="Calibri" pitchFamily="34" charset="-122"/>
-                <a:cs typeface="Calibri" pitchFamily="34" charset="-120"/>
-              </a:rPr>
-              <a:t>Usman Akram  •  COMSATS University Islamabad</a:t>
-            </a:r>
-            <a:endParaRPr lang="en-US" sz="900" dirty="0"/>
-          </a:p>
-        </p:txBody>
-      </p:sp>
-      <p:sp>
-        <p:nvSpPr>
-          <p:cNvPr id="9" name="Text 6"/>
-          <p:cNvSpPr txBox="1"/>
-          <p:nvPr/>
-        </p:nvSpPr>
-        <p:spPr>
-          <a:xfrm>
-            <a:off x="11155680" y="6446520"/>
-            <a:ext cx="457200" cy="292608"/>
-          </a:xfrm>
-          <a:prstGeom prst="rect">
-            <a:avLst/>
-          </a:prstGeom>
-          <a:noFill/>
-          <a:ln/>
-        </p:spPr>
-        <p:txBody>
-          <a:bodyPr wrap="square" lIns="0" tIns="0" rIns="0" bIns="0" rtlCol="0" anchor="ctr"/>
-          <a:lstStyle/>
-          <a:p>
-            <a:pPr algn="r" indent="0" marL="0">
-              <a:buNone/>
-            </a:pPr>
-            <a:r>
-              <a:rPr lang="en-US" sz="900" dirty="0">
-                <a:solidFill>
-                  <a:srgbClr val="5D5D72"/>
-                </a:solidFill>
-                <a:latin typeface="Calibri" pitchFamily="34" charset="0"/>
-                <a:ea typeface="Calibri" pitchFamily="34" charset="-122"/>
-                <a:cs typeface="Calibri" pitchFamily="34" charset="-120"/>
-              </a:rPr>
-              <a:t>26</a:t>
-            </a:r>
-            <a:endParaRPr lang="en-US" sz="900" dirty="0"/>
+        </p:spPr>
+        <p:txBody>
+          <a:bodyPr wrap="none" lIns="0" rIns="0" tIns="0" bIns="0">
+            <a:spAutoFit/>
+          </a:bodyPr>
+          <a:lstStyle/>
+          <a:p>
+            <a:pPr algn="r"/>
+            <a:r>
+              <a:rPr sz="1000">
+                <a:solidFill>
+                  <a:srgbClr val="8A939B"/>
+                </a:solidFill>
+                <a:hlinkClick r:id="rId4"/>
+              </a:rPr>
+              <a:t>cuinotes.com</a:t>
+            </a:r>
+            <a:r>
+              <a:rPr sz="1000">
+                <a:solidFill>
+                  <a:srgbClr val="8A939B"/>
+                </a:solidFill>
+              </a:rPr>
+              <a:t>  ·  26</a:t>
+            </a:r>
           </a:p>
         </p:txBody>
       </p:sp>
@@ -14616,6 +14095,10 @@
           </a:solidFill>
           <a:ln/>
         </p:spPr>
+        <p:txBody>
+          <a:bodyPr/>
+          <a:p/>
+        </p:txBody>
       </p:sp>
       <p:sp>
         <p:nvSpPr>
@@ -14792,6 +14275,10 @@
             </a:outerShdw>
           </a:effectLst>
         </p:spPr>
+        <p:txBody>
+          <a:bodyPr/>
+          <a:p/>
+        </p:txBody>
       </p:sp>
       <p:pic>
         <p:nvPicPr>
@@ -14819,79 +14306,44 @@
       </p:pic>
       <p:sp>
         <p:nvSpPr>
-          <p:cNvPr id="8" name="Text 5"/>
+          <p:cNvPr id="10" name="cuinotes-footer-mark"/>
           <p:cNvSpPr txBox="1"/>
           <p:nvPr/>
         </p:nvSpPr>
         <p:spPr>
           <a:xfrm>
-            <a:off x="640080" y="6446520"/>
-            <a:ext cx="8686800" cy="292608"/>
+            <a:off x="9951720" y="6455664"/>
+            <a:ext cx="2011680" cy="292608"/>
           </a:xfrm>
           <a:prstGeom prst="rect">
             <a:avLst/>
           </a:prstGeom>
           <a:noFill/>
-          <a:ln/>
-        </p:spPr>
-        <p:txBody>
-          <a:bodyPr wrap="square" lIns="0" tIns="0" rIns="0" bIns="0" rtlCol="0" anchor="ctr"/>
-          <a:lstStyle/>
-          <a:p>
-            <a:pPr algn="l" indent="0" marL="0">
-              <a:buNone/>
-            </a:pPr>
-            <a:r>
-              <a:rPr lang="en-US" sz="900" dirty="0">
-                <a:solidFill>
-                  <a:srgbClr val="5D5D72"/>
-                </a:solidFill>
-                <a:latin typeface="Calibri" pitchFamily="34" charset="0"/>
-                <a:ea typeface="Calibri" pitchFamily="34" charset="-122"/>
-                <a:cs typeface="Calibri" pitchFamily="34" charset="-120"/>
-              </a:rPr>
-              <a:t>Usman Akram  •  COMSATS University Islamabad</a:t>
-            </a:r>
-            <a:endParaRPr lang="en-US" sz="900" dirty="0"/>
-          </a:p>
-        </p:txBody>
-      </p:sp>
-      <p:sp>
-        <p:nvSpPr>
-          <p:cNvPr id="9" name="Text 6"/>
-          <p:cNvSpPr txBox="1"/>
-          <p:nvPr/>
-        </p:nvSpPr>
-        <p:spPr>
-          <a:xfrm>
-            <a:off x="11155680" y="6446520"/>
-            <a:ext cx="457200" cy="292608"/>
-          </a:xfrm>
-          <a:prstGeom prst="rect">
-            <a:avLst/>
-          </a:prstGeom>
-          <a:noFill/>
-          <a:ln/>
-        </p:spPr>
-        <p:txBody>
-          <a:bodyPr wrap="square" lIns="0" tIns="0" rIns="0" bIns="0" rtlCol="0" anchor="ctr"/>
-          <a:lstStyle/>
-          <a:p>
-            <a:pPr algn="r" indent="0" marL="0">
-              <a:buNone/>
-            </a:pPr>
-            <a:r>
-              <a:rPr lang="en-US" sz="900" dirty="0">
-                <a:solidFill>
-                  <a:srgbClr val="5D5D72"/>
-                </a:solidFill>
-                <a:latin typeface="Calibri" pitchFamily="34" charset="0"/>
-                <a:ea typeface="Calibri" pitchFamily="34" charset="-122"/>
-                <a:cs typeface="Calibri" pitchFamily="34" charset="-120"/>
-              </a:rPr>
-              <a:t>27</a:t>
-            </a:r>
-            <a:endParaRPr lang="en-US" sz="900" dirty="0"/>
+        </p:spPr>
+        <p:txBody>
+          <a:bodyPr wrap="none" lIns="0" rIns="0" tIns="0" bIns="0">
+            <a:spAutoFit/>
+          </a:bodyPr>
+          <a:lstStyle/>
+          <a:p>
+            <a:pPr algn="r"/>
+            <a:r>
+              <a:rPr sz="1000">
+                <a:solidFill>
+                  <a:srgbClr val="8A939B"/>
+                </a:solidFill>
+                <a:hlinkClick r:id="rId4"/>
+              </a:rPr>
+              <a:t>cuinotes.com</a:t>
+            </a:r>
+            <a:r>
+              <a:rPr sz="1000">
+                <a:solidFill>
+                  <a:srgbClr val="8A939B"/>
+                </a:solidFill>
+              </a:rPr>
+              <a:t>  ·  27</a:t>
+            </a:r>
           </a:p>
         </p:txBody>
       </p:sp>
@@ -15026,6 +14478,10 @@
           </a:solidFill>
           <a:ln/>
         </p:spPr>
+        <p:txBody>
+          <a:bodyPr/>
+          <a:p/>
+        </p:txBody>
       </p:sp>
       <p:sp>
         <p:nvSpPr>
@@ -15362,6 +14818,10 @@
             </a:outerShdw>
           </a:effectLst>
         </p:spPr>
+        <p:txBody>
+          <a:bodyPr/>
+          <a:p/>
+        </p:txBody>
       </p:sp>
       <p:pic>
         <p:nvPicPr>
@@ -15389,79 +14849,44 @@
       </p:pic>
       <p:sp>
         <p:nvSpPr>
-          <p:cNvPr id="8" name="Text 5"/>
+          <p:cNvPr id="10" name="cuinotes-footer-mark"/>
           <p:cNvSpPr txBox="1"/>
           <p:nvPr/>
         </p:nvSpPr>
         <p:spPr>
           <a:xfrm>
-            <a:off x="640080" y="6446520"/>
-            <a:ext cx="8686800" cy="292608"/>
+            <a:off x="9951720" y="6455664"/>
+            <a:ext cx="2011680" cy="292608"/>
           </a:xfrm>
           <a:prstGeom prst="rect">
             <a:avLst/>
           </a:prstGeom>
           <a:noFill/>
-          <a:ln/>
-        </p:spPr>
-        <p:txBody>
-          <a:bodyPr wrap="square" lIns="0" tIns="0" rIns="0" bIns="0" rtlCol="0" anchor="ctr"/>
-          <a:lstStyle/>
-          <a:p>
-            <a:pPr algn="l" indent="0" marL="0">
-              <a:buNone/>
-            </a:pPr>
-            <a:r>
-              <a:rPr lang="en-US" sz="900" dirty="0">
-                <a:solidFill>
-                  <a:srgbClr val="5D5D72"/>
-                </a:solidFill>
-                <a:latin typeface="Calibri" pitchFamily="34" charset="0"/>
-                <a:ea typeface="Calibri" pitchFamily="34" charset="-122"/>
-                <a:cs typeface="Calibri" pitchFamily="34" charset="-120"/>
-              </a:rPr>
-              <a:t>Usman Akram  •  COMSATS University Islamabad</a:t>
-            </a:r>
-            <a:endParaRPr lang="en-US" sz="900" dirty="0"/>
-          </a:p>
-        </p:txBody>
-      </p:sp>
-      <p:sp>
-        <p:nvSpPr>
-          <p:cNvPr id="9" name="Text 6"/>
-          <p:cNvSpPr txBox="1"/>
-          <p:nvPr/>
-        </p:nvSpPr>
-        <p:spPr>
-          <a:xfrm>
-            <a:off x="11155680" y="6446520"/>
-            <a:ext cx="457200" cy="292608"/>
-          </a:xfrm>
-          <a:prstGeom prst="rect">
-            <a:avLst/>
-          </a:prstGeom>
-          <a:noFill/>
-          <a:ln/>
-        </p:spPr>
-        <p:txBody>
-          <a:bodyPr wrap="square" lIns="0" tIns="0" rIns="0" bIns="0" rtlCol="0" anchor="ctr"/>
-          <a:lstStyle/>
-          <a:p>
-            <a:pPr algn="r" indent="0" marL="0">
-              <a:buNone/>
-            </a:pPr>
-            <a:r>
-              <a:rPr lang="en-US" sz="900" dirty="0">
-                <a:solidFill>
-                  <a:srgbClr val="5D5D72"/>
-                </a:solidFill>
-                <a:latin typeface="Calibri" pitchFamily="34" charset="0"/>
-                <a:ea typeface="Calibri" pitchFamily="34" charset="-122"/>
-                <a:cs typeface="Calibri" pitchFamily="34" charset="-120"/>
-              </a:rPr>
-              <a:t>28</a:t>
-            </a:r>
-            <a:endParaRPr lang="en-US" sz="900" dirty="0"/>
+        </p:spPr>
+        <p:txBody>
+          <a:bodyPr wrap="none" lIns="0" rIns="0" tIns="0" bIns="0">
+            <a:spAutoFit/>
+          </a:bodyPr>
+          <a:lstStyle/>
+          <a:p>
+            <a:pPr algn="r"/>
+            <a:r>
+              <a:rPr sz="1000">
+                <a:solidFill>
+                  <a:srgbClr val="8A939B"/>
+                </a:solidFill>
+                <a:hlinkClick r:id="rId4"/>
+              </a:rPr>
+              <a:t>cuinotes.com</a:t>
+            </a:r>
+            <a:r>
+              <a:rPr sz="1000">
+                <a:solidFill>
+                  <a:srgbClr val="8A939B"/>
+                </a:solidFill>
+              </a:rPr>
+              <a:t>  ·  28</a:t>
+            </a:r>
           </a:p>
         </p:txBody>
       </p:sp>
@@ -15594,6 +15019,10 @@
           </a:solidFill>
           <a:ln/>
         </p:spPr>
+        <p:txBody>
+          <a:bodyPr/>
+          <a:p/>
+        </p:txBody>
       </p:sp>
       <p:sp>
         <p:nvSpPr>
@@ -15653,6 +15082,10 @@
           </a:solidFill>
           <a:ln/>
         </p:spPr>
+        <p:txBody>
+          <a:bodyPr/>
+          <a:p/>
+        </p:txBody>
       </p:sp>
       <p:sp>
         <p:nvSpPr>
@@ -15712,6 +15145,10 @@
           </a:solidFill>
           <a:ln/>
         </p:spPr>
+        <p:txBody>
+          <a:bodyPr/>
+          <a:p/>
+        </p:txBody>
       </p:sp>
       <p:sp>
         <p:nvSpPr>
@@ -15754,79 +15191,44 @@
       </p:sp>
       <p:sp>
         <p:nvSpPr>
-          <p:cNvPr id="10" name="Text 8"/>
+          <p:cNvPr id="12" name="cuinotes-footer-mark"/>
           <p:cNvSpPr txBox="1"/>
           <p:nvPr/>
         </p:nvSpPr>
         <p:spPr>
           <a:xfrm>
-            <a:off x="640080" y="6446520"/>
-            <a:ext cx="8686800" cy="292608"/>
+            <a:off x="9951720" y="6455664"/>
+            <a:ext cx="2011680" cy="292608"/>
           </a:xfrm>
           <a:prstGeom prst="rect">
             <a:avLst/>
           </a:prstGeom>
           <a:noFill/>
-          <a:ln/>
-        </p:spPr>
-        <p:txBody>
-          <a:bodyPr wrap="square" lIns="0" tIns="0" rIns="0" bIns="0" rtlCol="0" anchor="ctr"/>
-          <a:lstStyle/>
-          <a:p>
-            <a:pPr algn="l" indent="0" marL="0">
-              <a:buNone/>
-            </a:pPr>
-            <a:r>
-              <a:rPr lang="en-US" sz="900" dirty="0">
-                <a:solidFill>
-                  <a:srgbClr val="5D5D72"/>
-                </a:solidFill>
-                <a:latin typeface="Calibri" pitchFamily="34" charset="0"/>
-                <a:ea typeface="Calibri" pitchFamily="34" charset="-122"/>
-                <a:cs typeface="Calibri" pitchFamily="34" charset="-120"/>
-              </a:rPr>
-              <a:t>Usman Akram  •  COMSATS University Islamabad</a:t>
-            </a:r>
-            <a:endParaRPr lang="en-US" sz="900" dirty="0"/>
-          </a:p>
-        </p:txBody>
-      </p:sp>
-      <p:sp>
-        <p:nvSpPr>
-          <p:cNvPr id="11" name="Text 9"/>
-          <p:cNvSpPr txBox="1"/>
-          <p:nvPr/>
-        </p:nvSpPr>
-        <p:spPr>
-          <a:xfrm>
-            <a:off x="11155680" y="6446520"/>
-            <a:ext cx="457200" cy="292608"/>
-          </a:xfrm>
-          <a:prstGeom prst="rect">
-            <a:avLst/>
-          </a:prstGeom>
-          <a:noFill/>
-          <a:ln/>
-        </p:spPr>
-        <p:txBody>
-          <a:bodyPr wrap="square" lIns="0" tIns="0" rIns="0" bIns="0" rtlCol="0" anchor="ctr"/>
-          <a:lstStyle/>
-          <a:p>
-            <a:pPr algn="r" indent="0" marL="0">
-              <a:buNone/>
-            </a:pPr>
-            <a:r>
-              <a:rPr lang="en-US" sz="900" dirty="0">
-                <a:solidFill>
-                  <a:srgbClr val="5D5D72"/>
-                </a:solidFill>
-                <a:latin typeface="Calibri" pitchFamily="34" charset="0"/>
-                <a:ea typeface="Calibri" pitchFamily="34" charset="-122"/>
-                <a:cs typeface="Calibri" pitchFamily="34" charset="-120"/>
-              </a:rPr>
-              <a:t>29</a:t>
-            </a:r>
-            <a:endParaRPr lang="en-US" sz="900" dirty="0"/>
+        </p:spPr>
+        <p:txBody>
+          <a:bodyPr wrap="none" lIns="0" rIns="0" tIns="0" bIns="0">
+            <a:spAutoFit/>
+          </a:bodyPr>
+          <a:lstStyle/>
+          <a:p>
+            <a:pPr algn="r"/>
+            <a:r>
+              <a:rPr sz="1000">
+                <a:solidFill>
+                  <a:srgbClr val="8A939B"/>
+                </a:solidFill>
+                <a:hlinkClick r:id="rId3"/>
+              </a:rPr>
+              <a:t>cuinotes.com</a:t>
+            </a:r>
+            <a:r>
+              <a:rPr sz="1000">
+                <a:solidFill>
+                  <a:srgbClr val="8A939B"/>
+                </a:solidFill>
+              </a:rPr>
+              <a:t>  ·  29</a:t>
+            </a:r>
           </a:p>
         </p:txBody>
       </p:sp>
@@ -15959,6 +15361,10 @@
           </a:solidFill>
           <a:ln/>
         </p:spPr>
+        <p:txBody>
+          <a:bodyPr/>
+          <a:p/>
+        </p:txBody>
       </p:sp>
       <p:sp>
         <p:nvSpPr>
@@ -16057,6 +15463,10 @@
           </a:solidFill>
           <a:ln/>
         </p:spPr>
+        <p:txBody>
+          <a:bodyPr/>
+          <a:p/>
+        </p:txBody>
       </p:sp>
       <p:sp>
         <p:nvSpPr>
@@ -16155,6 +15565,10 @@
           </a:solidFill>
           <a:ln/>
         </p:spPr>
+        <p:txBody>
+          <a:bodyPr/>
+          <a:p/>
+        </p:txBody>
       </p:sp>
       <p:sp>
         <p:nvSpPr>
@@ -16253,6 +15667,10 @@
           </a:solidFill>
           <a:ln/>
         </p:spPr>
+        <p:txBody>
+          <a:bodyPr/>
+          <a:p/>
+        </p:txBody>
       </p:sp>
       <p:sp>
         <p:nvSpPr>
@@ -16334,79 +15752,44 @@
       </p:sp>
       <p:sp>
         <p:nvSpPr>
-          <p:cNvPr id="16" name="Text 14"/>
+          <p:cNvPr id="18" name="cuinotes-footer-mark"/>
           <p:cNvSpPr txBox="1"/>
           <p:nvPr/>
         </p:nvSpPr>
         <p:spPr>
           <a:xfrm>
-            <a:off x="640080" y="6446520"/>
-            <a:ext cx="8686800" cy="292608"/>
+            <a:off x="9951720" y="6455664"/>
+            <a:ext cx="2011680" cy="292608"/>
           </a:xfrm>
           <a:prstGeom prst="rect">
             <a:avLst/>
           </a:prstGeom>
           <a:noFill/>
-          <a:ln/>
-        </p:spPr>
-        <p:txBody>
-          <a:bodyPr wrap="square" lIns="0" tIns="0" rIns="0" bIns="0" rtlCol="0" anchor="ctr"/>
-          <a:lstStyle/>
-          <a:p>
-            <a:pPr algn="l" indent="0" marL="0">
-              <a:buNone/>
-            </a:pPr>
-            <a:r>
-              <a:rPr lang="en-US" sz="900" dirty="0">
-                <a:solidFill>
-                  <a:srgbClr val="5D5D72"/>
-                </a:solidFill>
-                <a:latin typeface="Calibri" pitchFamily="34" charset="0"/>
-                <a:ea typeface="Calibri" pitchFamily="34" charset="-122"/>
-                <a:cs typeface="Calibri" pitchFamily="34" charset="-120"/>
-              </a:rPr>
-              <a:t>Usman Akram  •  COMSATS University Islamabad</a:t>
-            </a:r>
-            <a:endParaRPr lang="en-US" sz="900" dirty="0"/>
-          </a:p>
-        </p:txBody>
-      </p:sp>
-      <p:sp>
-        <p:nvSpPr>
-          <p:cNvPr id="17" name="Text 15"/>
-          <p:cNvSpPr txBox="1"/>
-          <p:nvPr/>
-        </p:nvSpPr>
-        <p:spPr>
-          <a:xfrm>
-            <a:off x="11155680" y="6446520"/>
-            <a:ext cx="457200" cy="292608"/>
-          </a:xfrm>
-          <a:prstGeom prst="rect">
-            <a:avLst/>
-          </a:prstGeom>
-          <a:noFill/>
-          <a:ln/>
-        </p:spPr>
-        <p:txBody>
-          <a:bodyPr wrap="square" lIns="0" tIns="0" rIns="0" bIns="0" rtlCol="0" anchor="ctr"/>
-          <a:lstStyle/>
-          <a:p>
-            <a:pPr algn="r" indent="0" marL="0">
-              <a:buNone/>
-            </a:pPr>
-            <a:r>
-              <a:rPr lang="en-US" sz="900" dirty="0">
-                <a:solidFill>
-                  <a:srgbClr val="5D5D72"/>
-                </a:solidFill>
-                <a:latin typeface="Calibri" pitchFamily="34" charset="0"/>
-                <a:ea typeface="Calibri" pitchFamily="34" charset="-122"/>
-                <a:cs typeface="Calibri" pitchFamily="34" charset="-120"/>
-              </a:rPr>
-              <a:t>3</a:t>
-            </a:r>
-            <a:endParaRPr lang="en-US" sz="900" dirty="0"/>
+        </p:spPr>
+        <p:txBody>
+          <a:bodyPr wrap="none" lIns="0" rIns="0" tIns="0" bIns="0">
+            <a:spAutoFit/>
+          </a:bodyPr>
+          <a:lstStyle/>
+          <a:p>
+            <a:pPr algn="r"/>
+            <a:r>
+              <a:rPr sz="1000">
+                <a:solidFill>
+                  <a:srgbClr val="8A939B"/>
+                </a:solidFill>
+                <a:hlinkClick r:id="rId3"/>
+              </a:rPr>
+              <a:t>cuinotes.com</a:t>
+            </a:r>
+            <a:r>
+              <a:rPr sz="1000">
+                <a:solidFill>
+                  <a:srgbClr val="8A939B"/>
+                </a:solidFill>
+              </a:rPr>
+              <a:t>  ·  3</a:t>
+            </a:r>
           </a:p>
         </p:txBody>
       </p:sp>
@@ -16539,6 +15922,10 @@
           </a:solidFill>
           <a:ln/>
         </p:spPr>
+        <p:txBody>
+          <a:bodyPr/>
+          <a:p/>
+        </p:txBody>
       </p:sp>
       <p:sp>
         <p:nvSpPr>
@@ -16598,6 +15985,10 @@
           </a:solidFill>
           <a:ln/>
         </p:spPr>
+        <p:txBody>
+          <a:bodyPr/>
+          <a:p/>
+        </p:txBody>
       </p:sp>
       <p:sp>
         <p:nvSpPr>
@@ -16657,6 +16048,10 @@
           </a:solidFill>
           <a:ln/>
         </p:spPr>
+        <p:txBody>
+          <a:bodyPr/>
+          <a:p/>
+        </p:txBody>
       </p:sp>
       <p:sp>
         <p:nvSpPr>
@@ -16716,6 +16111,10 @@
           </a:solidFill>
           <a:ln/>
         </p:spPr>
+        <p:txBody>
+          <a:bodyPr/>
+          <a:p/>
+        </p:txBody>
       </p:sp>
       <p:sp>
         <p:nvSpPr>
@@ -16758,79 +16157,44 @@
       </p:sp>
       <p:sp>
         <p:nvSpPr>
-          <p:cNvPr id="12" name="Text 10"/>
+          <p:cNvPr id="14" name="cuinotes-footer-mark"/>
           <p:cNvSpPr txBox="1"/>
           <p:nvPr/>
         </p:nvSpPr>
         <p:spPr>
           <a:xfrm>
-            <a:off x="640080" y="6446520"/>
-            <a:ext cx="8686800" cy="292608"/>
+            <a:off x="9951720" y="6455664"/>
+            <a:ext cx="2011680" cy="292608"/>
           </a:xfrm>
           <a:prstGeom prst="rect">
             <a:avLst/>
           </a:prstGeom>
           <a:noFill/>
-          <a:ln/>
-        </p:spPr>
-        <p:txBody>
-          <a:bodyPr wrap="square" lIns="0" tIns="0" rIns="0" bIns="0" rtlCol="0" anchor="ctr"/>
-          <a:lstStyle/>
-          <a:p>
-            <a:pPr algn="l" indent="0" marL="0">
-              <a:buNone/>
-            </a:pPr>
-            <a:r>
-              <a:rPr lang="en-US" sz="900" dirty="0">
-                <a:solidFill>
-                  <a:srgbClr val="5D5D72"/>
-                </a:solidFill>
-                <a:latin typeface="Calibri" pitchFamily="34" charset="0"/>
-                <a:ea typeface="Calibri" pitchFamily="34" charset="-122"/>
-                <a:cs typeface="Calibri" pitchFamily="34" charset="-120"/>
-              </a:rPr>
-              <a:t>Usman Akram  •  COMSATS University Islamabad</a:t>
-            </a:r>
-            <a:endParaRPr lang="en-US" sz="900" dirty="0"/>
-          </a:p>
-        </p:txBody>
-      </p:sp>
-      <p:sp>
-        <p:nvSpPr>
-          <p:cNvPr id="13" name="Text 11"/>
-          <p:cNvSpPr txBox="1"/>
-          <p:nvPr/>
-        </p:nvSpPr>
-        <p:spPr>
-          <a:xfrm>
-            <a:off x="11155680" y="6446520"/>
-            <a:ext cx="457200" cy="292608"/>
-          </a:xfrm>
-          <a:prstGeom prst="rect">
-            <a:avLst/>
-          </a:prstGeom>
-          <a:noFill/>
-          <a:ln/>
-        </p:spPr>
-        <p:txBody>
-          <a:bodyPr wrap="square" lIns="0" tIns="0" rIns="0" bIns="0" rtlCol="0" anchor="ctr"/>
-          <a:lstStyle/>
-          <a:p>
-            <a:pPr algn="r" indent="0" marL="0">
-              <a:buNone/>
-            </a:pPr>
-            <a:r>
-              <a:rPr lang="en-US" sz="900" dirty="0">
-                <a:solidFill>
-                  <a:srgbClr val="5D5D72"/>
-                </a:solidFill>
-                <a:latin typeface="Calibri" pitchFamily="34" charset="0"/>
-                <a:ea typeface="Calibri" pitchFamily="34" charset="-122"/>
-                <a:cs typeface="Calibri" pitchFamily="34" charset="-120"/>
-              </a:rPr>
-              <a:t>30</a:t>
-            </a:r>
-            <a:endParaRPr lang="en-US" sz="900" dirty="0"/>
+        </p:spPr>
+        <p:txBody>
+          <a:bodyPr wrap="none" lIns="0" rIns="0" tIns="0" bIns="0">
+            <a:spAutoFit/>
+          </a:bodyPr>
+          <a:lstStyle/>
+          <a:p>
+            <a:pPr algn="r"/>
+            <a:r>
+              <a:rPr sz="1000">
+                <a:solidFill>
+                  <a:srgbClr val="8A939B"/>
+                </a:solidFill>
+                <a:hlinkClick r:id="rId3"/>
+              </a:rPr>
+              <a:t>cuinotes.com</a:t>
+            </a:r>
+            <a:r>
+              <a:rPr sz="1000">
+                <a:solidFill>
+                  <a:srgbClr val="8A939B"/>
+                </a:solidFill>
+              </a:rPr>
+              <a:t>  ·  30</a:t>
+            </a:r>
           </a:p>
         </p:txBody>
       </p:sp>
@@ -16970,6 +16334,10 @@
             <a:prstDash val="solid"/>
           </a:ln>
         </p:spPr>
+        <p:txBody>
+          <a:bodyPr/>
+          <a:p/>
+        </p:txBody>
       </p:sp>
       <p:sp>
         <p:nvSpPr>
@@ -17051,79 +16419,44 @@
       </p:sp>
       <p:sp>
         <p:nvSpPr>
-          <p:cNvPr id="7" name="Text 5"/>
+          <p:cNvPr id="9" name="cuinotes-footer-mark"/>
           <p:cNvSpPr txBox="1"/>
           <p:nvPr/>
         </p:nvSpPr>
         <p:spPr>
           <a:xfrm>
-            <a:off x="640080" y="6446520"/>
-            <a:ext cx="8686800" cy="292608"/>
+            <a:off x="9951720" y="6455664"/>
+            <a:ext cx="2011680" cy="292608"/>
           </a:xfrm>
           <a:prstGeom prst="rect">
             <a:avLst/>
           </a:prstGeom>
           <a:noFill/>
-          <a:ln/>
-        </p:spPr>
-        <p:txBody>
-          <a:bodyPr wrap="square" lIns="0" tIns="0" rIns="0" bIns="0" rtlCol="0" anchor="ctr"/>
-          <a:lstStyle/>
-          <a:p>
-            <a:pPr algn="l" indent="0" marL="0">
-              <a:buNone/>
-            </a:pPr>
-            <a:r>
-              <a:rPr lang="en-US" sz="900" dirty="0">
-                <a:solidFill>
-                  <a:srgbClr val="5D5D72"/>
-                </a:solidFill>
-                <a:latin typeface="Calibri" pitchFamily="34" charset="0"/>
-                <a:ea typeface="Calibri" pitchFamily="34" charset="-122"/>
-                <a:cs typeface="Calibri" pitchFamily="34" charset="-120"/>
-              </a:rPr>
-              <a:t>Usman Akram  •  COMSATS University Islamabad</a:t>
-            </a:r>
-            <a:endParaRPr lang="en-US" sz="900" dirty="0"/>
-          </a:p>
-        </p:txBody>
-      </p:sp>
-      <p:sp>
-        <p:nvSpPr>
-          <p:cNvPr id="8" name="Text 6"/>
-          <p:cNvSpPr txBox="1"/>
-          <p:nvPr/>
-        </p:nvSpPr>
-        <p:spPr>
-          <a:xfrm>
-            <a:off x="11155680" y="6446520"/>
-            <a:ext cx="457200" cy="292608"/>
-          </a:xfrm>
-          <a:prstGeom prst="rect">
-            <a:avLst/>
-          </a:prstGeom>
-          <a:noFill/>
-          <a:ln/>
-        </p:spPr>
-        <p:txBody>
-          <a:bodyPr wrap="square" lIns="0" tIns="0" rIns="0" bIns="0" rtlCol="0" anchor="ctr"/>
-          <a:lstStyle/>
-          <a:p>
-            <a:pPr algn="r" indent="0" marL="0">
-              <a:buNone/>
-            </a:pPr>
-            <a:r>
-              <a:rPr lang="en-US" sz="900" dirty="0">
-                <a:solidFill>
-                  <a:srgbClr val="5D5D72"/>
-                </a:solidFill>
-                <a:latin typeface="Calibri" pitchFamily="34" charset="0"/>
-                <a:ea typeface="Calibri" pitchFamily="34" charset="-122"/>
-                <a:cs typeface="Calibri" pitchFamily="34" charset="-120"/>
-              </a:rPr>
-              <a:t>31</a:t>
-            </a:r>
-            <a:endParaRPr lang="en-US" sz="900" dirty="0"/>
+        </p:spPr>
+        <p:txBody>
+          <a:bodyPr wrap="none" lIns="0" rIns="0" tIns="0" bIns="0">
+            <a:spAutoFit/>
+          </a:bodyPr>
+          <a:lstStyle/>
+          <a:p>
+            <a:pPr algn="r"/>
+            <a:r>
+              <a:rPr sz="1000">
+                <a:solidFill>
+                  <a:srgbClr val="8A939B"/>
+                </a:solidFill>
+                <a:hlinkClick r:id="rId3"/>
+              </a:rPr>
+              <a:t>cuinotes.com</a:t>
+            </a:r>
+            <a:r>
+              <a:rPr sz="1000">
+                <a:solidFill>
+                  <a:srgbClr val="8A939B"/>
+                </a:solidFill>
+              </a:rPr>
+              <a:t>  ·  31</a:t>
+            </a:r>
           </a:p>
         </p:txBody>
       </p:sp>
@@ -17256,6 +16589,10 @@
           </a:solidFill>
           <a:ln/>
         </p:spPr>
+        <p:txBody>
+          <a:bodyPr/>
+          <a:p/>
+        </p:txBody>
       </p:sp>
       <p:sp>
         <p:nvSpPr>
@@ -17354,6 +16691,10 @@
           </a:solidFill>
           <a:ln/>
         </p:spPr>
+        <p:txBody>
+          <a:bodyPr/>
+          <a:p/>
+        </p:txBody>
       </p:sp>
       <p:sp>
         <p:nvSpPr>
@@ -17452,6 +16793,10 @@
           </a:solidFill>
           <a:ln/>
         </p:spPr>
+        <p:txBody>
+          <a:bodyPr/>
+          <a:p/>
+        </p:txBody>
       </p:sp>
       <p:sp>
         <p:nvSpPr>
@@ -17550,6 +16895,10 @@
           </a:solidFill>
           <a:ln/>
         </p:spPr>
+        <p:txBody>
+          <a:bodyPr/>
+          <a:p/>
+        </p:txBody>
       </p:sp>
       <p:sp>
         <p:nvSpPr>
@@ -17648,6 +16997,10 @@
           </a:solidFill>
           <a:ln/>
         </p:spPr>
+        <p:txBody>
+          <a:bodyPr/>
+          <a:p/>
+        </p:txBody>
       </p:sp>
       <p:sp>
         <p:nvSpPr>
@@ -17746,6 +17099,10 @@
           </a:solidFill>
           <a:ln/>
         </p:spPr>
+        <p:txBody>
+          <a:bodyPr/>
+          <a:p/>
+        </p:txBody>
       </p:sp>
       <p:sp>
         <p:nvSpPr>
@@ -17827,79 +17184,44 @@
       </p:sp>
       <p:sp>
         <p:nvSpPr>
-          <p:cNvPr id="22" name="Text 20"/>
+          <p:cNvPr id="24" name="cuinotes-footer-mark"/>
           <p:cNvSpPr txBox="1"/>
           <p:nvPr/>
         </p:nvSpPr>
         <p:spPr>
           <a:xfrm>
-            <a:off x="640080" y="6446520"/>
-            <a:ext cx="8686800" cy="292608"/>
+            <a:off x="9951720" y="6455664"/>
+            <a:ext cx="2011680" cy="292608"/>
           </a:xfrm>
           <a:prstGeom prst="rect">
             <a:avLst/>
           </a:prstGeom>
           <a:noFill/>
-          <a:ln/>
-        </p:spPr>
-        <p:txBody>
-          <a:bodyPr wrap="square" lIns="0" tIns="0" rIns="0" bIns="0" rtlCol="0" anchor="ctr"/>
-          <a:lstStyle/>
-          <a:p>
-            <a:pPr algn="l" indent="0" marL="0">
-              <a:buNone/>
-            </a:pPr>
-            <a:r>
-              <a:rPr lang="en-US" sz="900" dirty="0">
-                <a:solidFill>
-                  <a:srgbClr val="9AA3D8"/>
-                </a:solidFill>
-                <a:latin typeface="Calibri" pitchFamily="34" charset="0"/>
-                <a:ea typeface="Calibri" pitchFamily="34" charset="-122"/>
-                <a:cs typeface="Calibri" pitchFamily="34" charset="-120"/>
-              </a:rPr>
-              <a:t>Usman Akram  •  COMSATS University Islamabad</a:t>
-            </a:r>
-            <a:endParaRPr lang="en-US" sz="900" dirty="0"/>
-          </a:p>
-        </p:txBody>
-      </p:sp>
-      <p:sp>
-        <p:nvSpPr>
-          <p:cNvPr id="23" name="Text 21"/>
-          <p:cNvSpPr txBox="1"/>
-          <p:nvPr/>
-        </p:nvSpPr>
-        <p:spPr>
-          <a:xfrm>
-            <a:off x="11155680" y="6446520"/>
-            <a:ext cx="457200" cy="292608"/>
-          </a:xfrm>
-          <a:prstGeom prst="rect">
-            <a:avLst/>
-          </a:prstGeom>
-          <a:noFill/>
-          <a:ln/>
-        </p:spPr>
-        <p:txBody>
-          <a:bodyPr wrap="square" lIns="0" tIns="0" rIns="0" bIns="0" rtlCol="0" anchor="ctr"/>
-          <a:lstStyle/>
-          <a:p>
-            <a:pPr algn="r" indent="0" marL="0">
-              <a:buNone/>
-            </a:pPr>
-            <a:r>
-              <a:rPr lang="en-US" sz="900" dirty="0">
-                <a:solidFill>
-                  <a:srgbClr val="9AA3D8"/>
-                </a:solidFill>
-                <a:latin typeface="Calibri" pitchFamily="34" charset="0"/>
-                <a:ea typeface="Calibri" pitchFamily="34" charset="-122"/>
-                <a:cs typeface="Calibri" pitchFamily="34" charset="-120"/>
-              </a:rPr>
-              <a:t>32</a:t>
-            </a:r>
-            <a:endParaRPr lang="en-US" sz="900" dirty="0"/>
+        </p:spPr>
+        <p:txBody>
+          <a:bodyPr wrap="none" lIns="0" rIns="0" tIns="0" bIns="0">
+            <a:spAutoFit/>
+          </a:bodyPr>
+          <a:lstStyle/>
+          <a:p>
+            <a:pPr algn="r"/>
+            <a:r>
+              <a:rPr sz="1000">
+                <a:solidFill>
+                  <a:srgbClr val="8A939B"/>
+                </a:solidFill>
+                <a:hlinkClick r:id="rId3"/>
+              </a:rPr>
+              <a:t>cuinotes.com</a:t>
+            </a:r>
+            <a:r>
+              <a:rPr sz="1000">
+                <a:solidFill>
+                  <a:srgbClr val="8A939B"/>
+                </a:solidFill>
+              </a:rPr>
+              <a:t>  ·  32</a:t>
+            </a:r>
           </a:p>
         </p:txBody>
       </p:sp>
@@ -19488,79 +18810,44 @@
       </p:graphicFrame>
       <p:sp>
         <p:nvSpPr>
-          <p:cNvPr id="5" name="Text 2"/>
+          <p:cNvPr id="7" name="cuinotes-footer-mark"/>
           <p:cNvSpPr txBox="1"/>
           <p:nvPr/>
         </p:nvSpPr>
         <p:spPr>
           <a:xfrm>
-            <a:off x="640080" y="6446520"/>
-            <a:ext cx="8686800" cy="292608"/>
+            <a:off x="9951720" y="6455664"/>
+            <a:ext cx="2011680" cy="292608"/>
           </a:xfrm>
           <a:prstGeom prst="rect">
             <a:avLst/>
           </a:prstGeom>
           <a:noFill/>
-          <a:ln/>
-        </p:spPr>
-        <p:txBody>
-          <a:bodyPr wrap="square" lIns="0" tIns="0" rIns="0" bIns="0" rtlCol="0" anchor="ctr"/>
-          <a:lstStyle/>
-          <a:p>
-            <a:pPr algn="l" indent="0" marL="0">
-              <a:buNone/>
-            </a:pPr>
-            <a:r>
-              <a:rPr lang="en-US" sz="900" dirty="0">
-                <a:solidFill>
-                  <a:srgbClr val="5D5D72"/>
-                </a:solidFill>
-                <a:latin typeface="Calibri" pitchFamily="34" charset="0"/>
-                <a:ea typeface="Calibri" pitchFamily="34" charset="-122"/>
-                <a:cs typeface="Calibri" pitchFamily="34" charset="-120"/>
-              </a:rPr>
-              <a:t>Usman Akram  •  COMSATS University Islamabad</a:t>
-            </a:r>
-            <a:endParaRPr lang="en-US" sz="900" dirty="0"/>
-          </a:p>
-        </p:txBody>
-      </p:sp>
-      <p:sp>
-        <p:nvSpPr>
-          <p:cNvPr id="6" name="Text 3"/>
-          <p:cNvSpPr txBox="1"/>
-          <p:nvPr/>
-        </p:nvSpPr>
-        <p:spPr>
-          <a:xfrm>
-            <a:off x="11155680" y="6446520"/>
-            <a:ext cx="457200" cy="292608"/>
-          </a:xfrm>
-          <a:prstGeom prst="rect">
-            <a:avLst/>
-          </a:prstGeom>
-          <a:noFill/>
-          <a:ln/>
-        </p:spPr>
-        <p:txBody>
-          <a:bodyPr wrap="square" lIns="0" tIns="0" rIns="0" bIns="0" rtlCol="0" anchor="ctr"/>
-          <a:lstStyle/>
-          <a:p>
-            <a:pPr algn="r" indent="0" marL="0">
-              <a:buNone/>
-            </a:pPr>
-            <a:r>
-              <a:rPr lang="en-US" sz="900" dirty="0">
-                <a:solidFill>
-                  <a:srgbClr val="5D5D72"/>
-                </a:solidFill>
-                <a:latin typeface="Calibri" pitchFamily="34" charset="0"/>
-                <a:ea typeface="Calibri" pitchFamily="34" charset="-122"/>
-                <a:cs typeface="Calibri" pitchFamily="34" charset="-120"/>
-              </a:rPr>
-              <a:t>4</a:t>
-            </a:r>
-            <a:endParaRPr lang="en-US" sz="900" dirty="0"/>
+        </p:spPr>
+        <p:txBody>
+          <a:bodyPr wrap="none" lIns="0" rIns="0" tIns="0" bIns="0">
+            <a:spAutoFit/>
+          </a:bodyPr>
+          <a:lstStyle/>
+          <a:p>
+            <a:pPr algn="r"/>
+            <a:r>
+              <a:rPr sz="1000">
+                <a:solidFill>
+                  <a:srgbClr val="8A939B"/>
+                </a:solidFill>
+                <a:hlinkClick r:id="rId3"/>
+              </a:rPr>
+              <a:t>cuinotes.com</a:t>
+            </a:r>
+            <a:r>
+              <a:rPr sz="1000">
+                <a:solidFill>
+                  <a:srgbClr val="8A939B"/>
+                </a:solidFill>
+              </a:rPr>
+              <a:t>  ·  4</a:t>
+            </a:r>
           </a:p>
         </p:txBody>
       </p:sp>
@@ -19695,6 +18982,10 @@
           </a:solidFill>
           <a:ln/>
         </p:spPr>
+        <p:txBody>
+          <a:bodyPr/>
+          <a:p/>
+        </p:txBody>
       </p:sp>
       <p:sp>
         <p:nvSpPr>
@@ -19791,6 +19082,10 @@
             </a:outerShdw>
           </a:effectLst>
         </p:spPr>
+        <p:txBody>
+          <a:bodyPr/>
+          <a:p/>
+        </p:txBody>
       </p:sp>
       <p:pic>
         <p:nvPicPr>
@@ -19818,79 +19113,44 @@
       </p:pic>
       <p:sp>
         <p:nvSpPr>
-          <p:cNvPr id="8" name="Text 5"/>
+          <p:cNvPr id="10" name="cuinotes-footer-mark"/>
           <p:cNvSpPr txBox="1"/>
           <p:nvPr/>
         </p:nvSpPr>
         <p:spPr>
           <a:xfrm>
-            <a:off x="640080" y="6446520"/>
-            <a:ext cx="8686800" cy="292608"/>
+            <a:off x="9951720" y="6455664"/>
+            <a:ext cx="2011680" cy="292608"/>
           </a:xfrm>
           <a:prstGeom prst="rect">
             <a:avLst/>
           </a:prstGeom>
           <a:noFill/>
-          <a:ln/>
-        </p:spPr>
-        <p:txBody>
-          <a:bodyPr wrap="square" lIns="0" tIns="0" rIns="0" bIns="0" rtlCol="0" anchor="ctr"/>
-          <a:lstStyle/>
-          <a:p>
-            <a:pPr algn="l" indent="0" marL="0">
-              <a:buNone/>
-            </a:pPr>
-            <a:r>
-              <a:rPr lang="en-US" sz="900" dirty="0">
-                <a:solidFill>
-                  <a:srgbClr val="5D5D72"/>
-                </a:solidFill>
-                <a:latin typeface="Calibri" pitchFamily="34" charset="0"/>
-                <a:ea typeface="Calibri" pitchFamily="34" charset="-122"/>
-                <a:cs typeface="Calibri" pitchFamily="34" charset="-120"/>
-              </a:rPr>
-              <a:t>Usman Akram  •  COMSATS University Islamabad</a:t>
-            </a:r>
-            <a:endParaRPr lang="en-US" sz="900" dirty="0"/>
-          </a:p>
-        </p:txBody>
-      </p:sp>
-      <p:sp>
-        <p:nvSpPr>
-          <p:cNvPr id="9" name="Text 6"/>
-          <p:cNvSpPr txBox="1"/>
-          <p:nvPr/>
-        </p:nvSpPr>
-        <p:spPr>
-          <a:xfrm>
-            <a:off x="11155680" y="6446520"/>
-            <a:ext cx="457200" cy="292608"/>
-          </a:xfrm>
-          <a:prstGeom prst="rect">
-            <a:avLst/>
-          </a:prstGeom>
-          <a:noFill/>
-          <a:ln/>
-        </p:spPr>
-        <p:txBody>
-          <a:bodyPr wrap="square" lIns="0" tIns="0" rIns="0" bIns="0" rtlCol="0" anchor="ctr"/>
-          <a:lstStyle/>
-          <a:p>
-            <a:pPr algn="r" indent="0" marL="0">
-              <a:buNone/>
-            </a:pPr>
-            <a:r>
-              <a:rPr lang="en-US" sz="900" dirty="0">
-                <a:solidFill>
-                  <a:srgbClr val="5D5D72"/>
-                </a:solidFill>
-                <a:latin typeface="Calibri" pitchFamily="34" charset="0"/>
-                <a:ea typeface="Calibri" pitchFamily="34" charset="-122"/>
-                <a:cs typeface="Calibri" pitchFamily="34" charset="-120"/>
-              </a:rPr>
-              <a:t>5</a:t>
-            </a:r>
-            <a:endParaRPr lang="en-US" sz="900" dirty="0"/>
+        </p:spPr>
+        <p:txBody>
+          <a:bodyPr wrap="none" lIns="0" rIns="0" tIns="0" bIns="0">
+            <a:spAutoFit/>
+          </a:bodyPr>
+          <a:lstStyle/>
+          <a:p>
+            <a:pPr algn="r"/>
+            <a:r>
+              <a:rPr sz="1000">
+                <a:solidFill>
+                  <a:srgbClr val="8A939B"/>
+                </a:solidFill>
+                <a:hlinkClick r:id="rId4"/>
+              </a:rPr>
+              <a:t>cuinotes.com</a:t>
+            </a:r>
+            <a:r>
+              <a:rPr sz="1000">
+                <a:solidFill>
+                  <a:srgbClr val="8A939B"/>
+                </a:solidFill>
+              </a:rPr>
+              <a:t>  ·  5</a:t>
+            </a:r>
           </a:p>
         </p:txBody>
       </p:sp>
@@ -20025,6 +19285,10 @@
           </a:solidFill>
           <a:ln/>
         </p:spPr>
+        <p:txBody>
+          <a:bodyPr/>
+          <a:p/>
+        </p:txBody>
       </p:sp>
       <p:sp>
         <p:nvSpPr>
@@ -20301,6 +19565,10 @@
             </a:outerShdw>
           </a:effectLst>
         </p:spPr>
+        <p:txBody>
+          <a:bodyPr/>
+          <a:p/>
+        </p:txBody>
       </p:sp>
       <p:pic>
         <p:nvPicPr>
@@ -20328,79 +19596,44 @@
       </p:pic>
       <p:sp>
         <p:nvSpPr>
-          <p:cNvPr id="8" name="Text 5"/>
+          <p:cNvPr id="10" name="cuinotes-footer-mark"/>
           <p:cNvSpPr txBox="1"/>
           <p:nvPr/>
         </p:nvSpPr>
         <p:spPr>
           <a:xfrm>
-            <a:off x="640080" y="6446520"/>
-            <a:ext cx="8686800" cy="292608"/>
+            <a:off x="9951720" y="6455664"/>
+            <a:ext cx="2011680" cy="292608"/>
           </a:xfrm>
           <a:prstGeom prst="rect">
             <a:avLst/>
           </a:prstGeom>
           <a:noFill/>
-          <a:ln/>
-        </p:spPr>
-        <p:txBody>
-          <a:bodyPr wrap="square" lIns="0" tIns="0" rIns="0" bIns="0" rtlCol="0" anchor="ctr"/>
-          <a:lstStyle/>
-          <a:p>
-            <a:pPr algn="l" indent="0" marL="0">
-              <a:buNone/>
-            </a:pPr>
-            <a:r>
-              <a:rPr lang="en-US" sz="900" dirty="0">
-                <a:solidFill>
-                  <a:srgbClr val="5D5D72"/>
-                </a:solidFill>
-                <a:latin typeface="Calibri" pitchFamily="34" charset="0"/>
-                <a:ea typeface="Calibri" pitchFamily="34" charset="-122"/>
-                <a:cs typeface="Calibri" pitchFamily="34" charset="-120"/>
-              </a:rPr>
-              <a:t>Usman Akram  •  COMSATS University Islamabad</a:t>
-            </a:r>
-            <a:endParaRPr lang="en-US" sz="900" dirty="0"/>
-          </a:p>
-        </p:txBody>
-      </p:sp>
-      <p:sp>
-        <p:nvSpPr>
-          <p:cNvPr id="9" name="Text 6"/>
-          <p:cNvSpPr txBox="1"/>
-          <p:nvPr/>
-        </p:nvSpPr>
-        <p:spPr>
-          <a:xfrm>
-            <a:off x="11155680" y="6446520"/>
-            <a:ext cx="457200" cy="292608"/>
-          </a:xfrm>
-          <a:prstGeom prst="rect">
-            <a:avLst/>
-          </a:prstGeom>
-          <a:noFill/>
-          <a:ln/>
-        </p:spPr>
-        <p:txBody>
-          <a:bodyPr wrap="square" lIns="0" tIns="0" rIns="0" bIns="0" rtlCol="0" anchor="ctr"/>
-          <a:lstStyle/>
-          <a:p>
-            <a:pPr algn="r" indent="0" marL="0">
-              <a:buNone/>
-            </a:pPr>
-            <a:r>
-              <a:rPr lang="en-US" sz="900" dirty="0">
-                <a:solidFill>
-                  <a:srgbClr val="5D5D72"/>
-                </a:solidFill>
-                <a:latin typeface="Calibri" pitchFamily="34" charset="0"/>
-                <a:ea typeface="Calibri" pitchFamily="34" charset="-122"/>
-                <a:cs typeface="Calibri" pitchFamily="34" charset="-120"/>
-              </a:rPr>
-              <a:t>6</a:t>
-            </a:r>
-            <a:endParaRPr lang="en-US" sz="900" dirty="0"/>
+        </p:spPr>
+        <p:txBody>
+          <a:bodyPr wrap="none" lIns="0" rIns="0" tIns="0" bIns="0">
+            <a:spAutoFit/>
+          </a:bodyPr>
+          <a:lstStyle/>
+          <a:p>
+            <a:pPr algn="r"/>
+            <a:r>
+              <a:rPr sz="1000">
+                <a:solidFill>
+                  <a:srgbClr val="8A939B"/>
+                </a:solidFill>
+                <a:hlinkClick r:id="rId4"/>
+              </a:rPr>
+              <a:t>cuinotes.com</a:t>
+            </a:r>
+            <a:r>
+              <a:rPr sz="1000">
+                <a:solidFill>
+                  <a:srgbClr val="8A939B"/>
+                </a:solidFill>
+              </a:rPr>
+              <a:t>  ·  6</a:t>
+            </a:r>
           </a:p>
         </p:txBody>
       </p:sp>
@@ -21413,79 +20646,44 @@
       </p:sp>
       <p:sp>
         <p:nvSpPr>
-          <p:cNvPr id="6" name="Text 3"/>
+          <p:cNvPr id="9" name="cuinotes-footer-mark"/>
           <p:cNvSpPr txBox="1"/>
           <p:nvPr/>
         </p:nvSpPr>
         <p:spPr>
           <a:xfrm>
-            <a:off x="640080" y="6446520"/>
-            <a:ext cx="8686800" cy="292608"/>
+            <a:off x="9951720" y="6455664"/>
+            <a:ext cx="2011680" cy="292608"/>
           </a:xfrm>
           <a:prstGeom prst="rect">
             <a:avLst/>
           </a:prstGeom>
           <a:noFill/>
-          <a:ln/>
-        </p:spPr>
-        <p:txBody>
-          <a:bodyPr wrap="square" lIns="0" tIns="0" rIns="0" bIns="0" rtlCol="0" anchor="ctr"/>
-          <a:lstStyle/>
-          <a:p>
-            <a:pPr algn="l" indent="0" marL="0">
-              <a:buNone/>
-            </a:pPr>
-            <a:r>
-              <a:rPr lang="en-US" sz="900" dirty="0">
-                <a:solidFill>
-                  <a:srgbClr val="5D5D72"/>
-                </a:solidFill>
-                <a:latin typeface="Calibri" pitchFamily="34" charset="0"/>
-                <a:ea typeface="Calibri" pitchFamily="34" charset="-122"/>
-                <a:cs typeface="Calibri" pitchFamily="34" charset="-120"/>
-              </a:rPr>
-              <a:t>Usman Akram  •  COMSATS University Islamabad</a:t>
-            </a:r>
-            <a:endParaRPr lang="en-US" sz="900" dirty="0"/>
-          </a:p>
-        </p:txBody>
-      </p:sp>
-      <p:sp>
-        <p:nvSpPr>
-          <p:cNvPr id="7" name="Text 4"/>
-          <p:cNvSpPr txBox="1"/>
-          <p:nvPr/>
-        </p:nvSpPr>
-        <p:spPr>
-          <a:xfrm>
-            <a:off x="11155680" y="6446520"/>
-            <a:ext cx="457200" cy="292608"/>
-          </a:xfrm>
-          <a:prstGeom prst="rect">
-            <a:avLst/>
-          </a:prstGeom>
-          <a:noFill/>
-          <a:ln/>
-        </p:spPr>
-        <p:txBody>
-          <a:bodyPr wrap="square" lIns="0" tIns="0" rIns="0" bIns="0" rtlCol="0" anchor="ctr"/>
-          <a:lstStyle/>
-          <a:p>
-            <a:pPr algn="r" indent="0" marL="0">
-              <a:buNone/>
-            </a:pPr>
-            <a:r>
-              <a:rPr lang="en-US" sz="900" dirty="0">
-                <a:solidFill>
-                  <a:srgbClr val="5D5D72"/>
-                </a:solidFill>
-                <a:latin typeface="Calibri" pitchFamily="34" charset="0"/>
-                <a:ea typeface="Calibri" pitchFamily="34" charset="-122"/>
-                <a:cs typeface="Calibri" pitchFamily="34" charset="-120"/>
-              </a:rPr>
-              <a:t>7</a:t>
-            </a:r>
-            <a:endParaRPr lang="en-US" sz="900" dirty="0"/>
+        </p:spPr>
+        <p:txBody>
+          <a:bodyPr wrap="none" lIns="0" rIns="0" tIns="0" bIns="0">
+            <a:spAutoFit/>
+          </a:bodyPr>
+          <a:lstStyle/>
+          <a:p>
+            <a:pPr algn="r"/>
+            <a:r>
+              <a:rPr sz="1000">
+                <a:solidFill>
+                  <a:srgbClr val="8A939B"/>
+                </a:solidFill>
+                <a:hlinkClick r:id="rId3"/>
+              </a:rPr>
+              <a:t>cuinotes.com</a:t>
+            </a:r>
+            <a:r>
+              <a:rPr sz="1000">
+                <a:solidFill>
+                  <a:srgbClr val="8A939B"/>
+                </a:solidFill>
+              </a:rPr>
+              <a:t>  ·  7</a:t>
+            </a:r>
           </a:p>
         </p:txBody>
       </p:sp>
@@ -21620,6 +20818,10 @@
           </a:solidFill>
           <a:ln/>
         </p:spPr>
+        <p:txBody>
+          <a:bodyPr/>
+          <a:p/>
+        </p:txBody>
       </p:sp>
       <p:sp>
         <p:nvSpPr>
@@ -21756,6 +20958,10 @@
             </a:outerShdw>
           </a:effectLst>
         </p:spPr>
+        <p:txBody>
+          <a:bodyPr/>
+          <a:p/>
+        </p:txBody>
       </p:sp>
       <p:pic>
         <p:nvPicPr>
@@ -21783,79 +20989,44 @@
       </p:pic>
       <p:sp>
         <p:nvSpPr>
-          <p:cNvPr id="8" name="Text 5"/>
+          <p:cNvPr id="10" name="cuinotes-footer-mark"/>
           <p:cNvSpPr txBox="1"/>
           <p:nvPr/>
         </p:nvSpPr>
         <p:spPr>
           <a:xfrm>
-            <a:off x="640080" y="6446520"/>
-            <a:ext cx="8686800" cy="292608"/>
+            <a:off x="9951720" y="6455664"/>
+            <a:ext cx="2011680" cy="292608"/>
           </a:xfrm>
           <a:prstGeom prst="rect">
             <a:avLst/>
           </a:prstGeom>
           <a:noFill/>
-          <a:ln/>
-        </p:spPr>
-        <p:txBody>
-          <a:bodyPr wrap="square" lIns="0" tIns="0" rIns="0" bIns="0" rtlCol="0" anchor="ctr"/>
-          <a:lstStyle/>
-          <a:p>
-            <a:pPr algn="l" indent="0" marL="0">
-              <a:buNone/>
-            </a:pPr>
-            <a:r>
-              <a:rPr lang="en-US" sz="900" dirty="0">
-                <a:solidFill>
-                  <a:srgbClr val="5D5D72"/>
-                </a:solidFill>
-                <a:latin typeface="Calibri" pitchFamily="34" charset="0"/>
-                <a:ea typeface="Calibri" pitchFamily="34" charset="-122"/>
-                <a:cs typeface="Calibri" pitchFamily="34" charset="-120"/>
-              </a:rPr>
-              <a:t>Usman Akram  •  COMSATS University Islamabad</a:t>
-            </a:r>
-            <a:endParaRPr lang="en-US" sz="900" dirty="0"/>
-          </a:p>
-        </p:txBody>
-      </p:sp>
-      <p:sp>
-        <p:nvSpPr>
-          <p:cNvPr id="9" name="Text 6"/>
-          <p:cNvSpPr txBox="1"/>
-          <p:nvPr/>
-        </p:nvSpPr>
-        <p:spPr>
-          <a:xfrm>
-            <a:off x="11155680" y="6446520"/>
-            <a:ext cx="457200" cy="292608"/>
-          </a:xfrm>
-          <a:prstGeom prst="rect">
-            <a:avLst/>
-          </a:prstGeom>
-          <a:noFill/>
-          <a:ln/>
-        </p:spPr>
-        <p:txBody>
-          <a:bodyPr wrap="square" lIns="0" tIns="0" rIns="0" bIns="0" rtlCol="0" anchor="ctr"/>
-          <a:lstStyle/>
-          <a:p>
-            <a:pPr algn="r" indent="0" marL="0">
-              <a:buNone/>
-            </a:pPr>
-            <a:r>
-              <a:rPr lang="en-US" sz="900" dirty="0">
-                <a:solidFill>
-                  <a:srgbClr val="5D5D72"/>
-                </a:solidFill>
-                <a:latin typeface="Calibri" pitchFamily="34" charset="0"/>
-                <a:ea typeface="Calibri" pitchFamily="34" charset="-122"/>
-                <a:cs typeface="Calibri" pitchFamily="34" charset="-120"/>
-              </a:rPr>
-              <a:t>8</a:t>
-            </a:r>
-            <a:endParaRPr lang="en-US" sz="900" dirty="0"/>
+        </p:spPr>
+        <p:txBody>
+          <a:bodyPr wrap="none" lIns="0" rIns="0" tIns="0" bIns="0">
+            <a:spAutoFit/>
+          </a:bodyPr>
+          <a:lstStyle/>
+          <a:p>
+            <a:pPr algn="r"/>
+            <a:r>
+              <a:rPr sz="1000">
+                <a:solidFill>
+                  <a:srgbClr val="8A939B"/>
+                </a:solidFill>
+                <a:hlinkClick r:id="rId4"/>
+              </a:rPr>
+              <a:t>cuinotes.com</a:t>
+            </a:r>
+            <a:r>
+              <a:rPr sz="1000">
+                <a:solidFill>
+                  <a:srgbClr val="8A939B"/>
+                </a:solidFill>
+              </a:rPr>
+              <a:t>  ·  8</a:t>
+            </a:r>
           </a:p>
         </p:txBody>
       </p:sp>
@@ -22815,79 +21986,44 @@
       </p:graphicFrame>
       <p:sp>
         <p:nvSpPr>
-          <p:cNvPr id="5" name="Text 2"/>
+          <p:cNvPr id="11" name="cuinotes-footer-mark"/>
           <p:cNvSpPr txBox="1"/>
           <p:nvPr/>
         </p:nvSpPr>
         <p:spPr>
           <a:xfrm>
-            <a:off x="640080" y="6446520"/>
-            <a:ext cx="8686800" cy="292608"/>
+            <a:off x="9951720" y="6455664"/>
+            <a:ext cx="2011680" cy="292608"/>
           </a:xfrm>
           <a:prstGeom prst="rect">
             <a:avLst/>
           </a:prstGeom>
           <a:noFill/>
-          <a:ln/>
-        </p:spPr>
-        <p:txBody>
-          <a:bodyPr wrap="square" lIns="0" tIns="0" rIns="0" bIns="0" rtlCol="0" anchor="ctr"/>
-          <a:lstStyle/>
-          <a:p>
-            <a:pPr algn="l" indent="0" marL="0">
-              <a:buNone/>
-            </a:pPr>
-            <a:r>
-              <a:rPr lang="en-US" sz="900" dirty="0">
-                <a:solidFill>
-                  <a:srgbClr val="5D5D72"/>
-                </a:solidFill>
-                <a:latin typeface="Calibri" pitchFamily="34" charset="0"/>
-                <a:ea typeface="Calibri" pitchFamily="34" charset="-122"/>
-                <a:cs typeface="Calibri" pitchFamily="34" charset="-120"/>
-              </a:rPr>
-              <a:t>Usman Akram  •  COMSATS University Islamabad</a:t>
-            </a:r>
-            <a:endParaRPr lang="en-US" sz="900" dirty="0"/>
-          </a:p>
-        </p:txBody>
-      </p:sp>
-      <p:sp>
-        <p:nvSpPr>
-          <p:cNvPr id="6" name="Text 3"/>
-          <p:cNvSpPr txBox="1"/>
-          <p:nvPr/>
-        </p:nvSpPr>
-        <p:spPr>
-          <a:xfrm>
-            <a:off x="11155680" y="6446520"/>
-            <a:ext cx="457200" cy="292608"/>
-          </a:xfrm>
-          <a:prstGeom prst="rect">
-            <a:avLst/>
-          </a:prstGeom>
-          <a:noFill/>
-          <a:ln/>
-        </p:spPr>
-        <p:txBody>
-          <a:bodyPr wrap="square" lIns="0" tIns="0" rIns="0" bIns="0" rtlCol="0" anchor="ctr"/>
-          <a:lstStyle/>
-          <a:p>
-            <a:pPr algn="r" indent="0" marL="0">
-              <a:buNone/>
-            </a:pPr>
-            <a:r>
-              <a:rPr lang="en-US" sz="900" dirty="0">
-                <a:solidFill>
-                  <a:srgbClr val="5D5D72"/>
-                </a:solidFill>
-                <a:latin typeface="Calibri" pitchFamily="34" charset="0"/>
-                <a:ea typeface="Calibri" pitchFamily="34" charset="-122"/>
-                <a:cs typeface="Calibri" pitchFamily="34" charset="-120"/>
-              </a:rPr>
-              <a:t>9</a:t>
-            </a:r>
-            <a:endParaRPr lang="en-US" sz="900" dirty="0"/>
+        </p:spPr>
+        <p:txBody>
+          <a:bodyPr wrap="none" lIns="0" rIns="0" tIns="0" bIns="0">
+            <a:spAutoFit/>
+          </a:bodyPr>
+          <a:lstStyle/>
+          <a:p>
+            <a:pPr algn="r"/>
+            <a:r>
+              <a:rPr sz="1000">
+                <a:solidFill>
+                  <a:srgbClr val="8A939B"/>
+                </a:solidFill>
+                <a:hlinkClick r:id="rId3"/>
+              </a:rPr>
+              <a:t>cuinotes.com</a:t>
+            </a:r>
+            <a:r>
+              <a:rPr sz="1000">
+                <a:solidFill>
+                  <a:srgbClr val="8A939B"/>
+                </a:solidFill>
+              </a:rPr>
+              <a:t>  ·  9</a:t>
+            </a:r>
           </a:p>
         </p:txBody>
       </p:sp>

--- a/slides/CSC336-Lecture-03-HTML-and-HTML5-Fundamentals.pptx
+++ b/slides/CSC336-Lecture-03-HTML-and-HTML5-Fundamentals.pptx
@@ -3983,9 +3983,13 @@
             </a:avLst>
           </a:prstGeom>
           <a:solidFill>
-            <a:srgbClr val="1E1E4C"/>
+            <a:srgbClr val="F7F8F9"/>
           </a:solidFill>
-          <a:ln/>
+          <a:ln w="9525">
+            <a:solidFill>
+              <a:srgbClr val="D0D5DD"/>
+            </a:solidFill>
+          </a:ln>
         </p:spPr>
         <p:txBody>
           <a:bodyPr/>
@@ -4022,7 +4026,7 @@
             <a:r>
               <a:rPr lang="en-US" sz="1250" dirty="0">
                 <a:solidFill>
-                  <a:srgbClr val="C9D3F5"/>
+                  <a:srgbClr val="1F2429"/>
                 </a:solidFill>
                 <a:latin typeface="Courier New" pitchFamily="34" charset="0"/>
                 <a:ea typeface="Courier New" pitchFamily="34" charset="-122"/>
@@ -4042,7 +4046,7 @@
             <a:r>
               <a:rPr lang="en-US" sz="1250" dirty="0">
                 <a:solidFill>
-                  <a:srgbClr val="C9D3F5"/>
+                  <a:srgbClr val="1F2429"/>
                 </a:solidFill>
                 <a:latin typeface="Courier New" pitchFamily="34" charset="0"/>
                 <a:ea typeface="Courier New" pitchFamily="34" charset="-122"/>
@@ -4062,7 +4066,7 @@
             <a:r>
               <a:rPr lang="en-US" sz="1250" dirty="0">
                 <a:solidFill>
-                  <a:srgbClr val="C9D3F5"/>
+                  <a:srgbClr val="1F2429"/>
                 </a:solidFill>
                 <a:latin typeface="Courier New" pitchFamily="34" charset="0"/>
                 <a:ea typeface="Courier New" pitchFamily="34" charset="-122"/>
@@ -4091,7 +4095,7 @@
             <a:r>
               <a:rPr lang="en-US" sz="1250" dirty="0">
                 <a:solidFill>
-                  <a:srgbClr val="C9D3F5"/>
+                  <a:srgbClr val="1F2429"/>
                 </a:solidFill>
                 <a:latin typeface="Courier New" pitchFamily="34" charset="0"/>
                 <a:ea typeface="Courier New" pitchFamily="34" charset="-122"/>
@@ -4111,7 +4115,7 @@
             <a:r>
               <a:rPr lang="en-US" sz="1250" dirty="0">
                 <a:solidFill>
-                  <a:srgbClr val="C9D3F5"/>
+                  <a:srgbClr val="1F2429"/>
                 </a:solidFill>
                 <a:latin typeface="Courier New" pitchFamily="34" charset="0"/>
                 <a:ea typeface="Courier New" pitchFamily="34" charset="-122"/>
@@ -5543,9 +5547,13 @@
             </a:avLst>
           </a:prstGeom>
           <a:solidFill>
-            <a:srgbClr val="1E1E4C"/>
+            <a:srgbClr val="F7F8F9"/>
           </a:solidFill>
-          <a:ln/>
+          <a:ln w="9525">
+            <a:solidFill>
+              <a:srgbClr val="D0D5DD"/>
+            </a:solidFill>
+          </a:ln>
         </p:spPr>
         <p:txBody>
           <a:bodyPr/>
@@ -5582,7 +5590,7 @@
             <a:r>
               <a:rPr lang="en-US" sz="1250" dirty="0">
                 <a:solidFill>
-                  <a:srgbClr val="C9D3F5"/>
+                  <a:srgbClr val="1F2429"/>
                 </a:solidFill>
                 <a:latin typeface="Courier New" pitchFamily="34" charset="0"/>
                 <a:ea typeface="Courier New" pitchFamily="34" charset="-122"/>
@@ -5602,7 +5610,7 @@
             <a:r>
               <a:rPr lang="en-US" sz="1250" dirty="0">
                 <a:solidFill>
-                  <a:srgbClr val="C9D3F5"/>
+                  <a:srgbClr val="1F2429"/>
                 </a:solidFill>
                 <a:latin typeface="Courier New" pitchFamily="34" charset="0"/>
                 <a:ea typeface="Courier New" pitchFamily="34" charset="-122"/>
@@ -5622,7 +5630,7 @@
             <a:r>
               <a:rPr lang="en-US" sz="1250" dirty="0">
                 <a:solidFill>
-                  <a:srgbClr val="C9D3F5"/>
+                  <a:srgbClr val="1F2429"/>
                 </a:solidFill>
                 <a:latin typeface="Courier New" pitchFamily="34" charset="0"/>
                 <a:ea typeface="Courier New" pitchFamily="34" charset="-122"/>
@@ -5642,7 +5650,7 @@
             <a:r>
               <a:rPr lang="en-US" sz="1250" dirty="0">
                 <a:solidFill>
-                  <a:srgbClr val="C9D3F5"/>
+                  <a:srgbClr val="1F2429"/>
                 </a:solidFill>
                 <a:latin typeface="Courier New" pitchFamily="34" charset="0"/>
                 <a:ea typeface="Courier New" pitchFamily="34" charset="-122"/>
@@ -5662,7 +5670,7 @@
             <a:r>
               <a:rPr lang="en-US" sz="1250" dirty="0">
                 <a:solidFill>
-                  <a:srgbClr val="C9D3F5"/>
+                  <a:srgbClr val="1F2429"/>
                 </a:solidFill>
                 <a:latin typeface="Courier New" pitchFamily="34" charset="0"/>
                 <a:ea typeface="Courier New" pitchFamily="34" charset="-122"/>
@@ -5682,7 +5690,7 @@
             <a:r>
               <a:rPr lang="en-US" sz="1250" dirty="0">
                 <a:solidFill>
-                  <a:srgbClr val="C9D3F5"/>
+                  <a:srgbClr val="1F2429"/>
                 </a:solidFill>
                 <a:latin typeface="Courier New" pitchFamily="34" charset="0"/>
                 <a:ea typeface="Courier New" pitchFamily="34" charset="-122"/>
@@ -5926,9 +5934,13 @@
             </a:avLst>
           </a:prstGeom>
           <a:solidFill>
-            <a:srgbClr val="1E1E4C"/>
+            <a:srgbClr val="F7F8F9"/>
           </a:solidFill>
-          <a:ln/>
+          <a:ln w="9525">
+            <a:solidFill>
+              <a:srgbClr val="D0D5DD"/>
+            </a:solidFill>
+          </a:ln>
         </p:spPr>
         <p:txBody>
           <a:bodyPr/>
@@ -5965,7 +5977,7 @@
             <a:r>
               <a:rPr lang="en-US" sz="1250" dirty="0">
                 <a:solidFill>
-                  <a:srgbClr val="C9D3F5"/>
+                  <a:srgbClr val="1F2429"/>
                 </a:solidFill>
                 <a:latin typeface="Courier New" pitchFamily="34" charset="0"/>
                 <a:ea typeface="Courier New" pitchFamily="34" charset="-122"/>
@@ -5985,7 +5997,7 @@
             <a:r>
               <a:rPr lang="en-US" sz="1250" dirty="0">
                 <a:solidFill>
-                  <a:srgbClr val="C9D3F5"/>
+                  <a:srgbClr val="1F2429"/>
                 </a:solidFill>
                 <a:latin typeface="Courier New" pitchFamily="34" charset="0"/>
                 <a:ea typeface="Courier New" pitchFamily="34" charset="-122"/>
@@ -6005,7 +6017,7 @@
             <a:r>
               <a:rPr lang="en-US" sz="1250" dirty="0">
                 <a:solidFill>
-                  <a:srgbClr val="C9D3F5"/>
+                  <a:srgbClr val="1F2429"/>
                 </a:solidFill>
                 <a:latin typeface="Courier New" pitchFamily="34" charset="0"/>
                 <a:ea typeface="Courier New" pitchFamily="34" charset="-122"/>
@@ -6249,9 +6261,13 @@
             </a:avLst>
           </a:prstGeom>
           <a:solidFill>
-            <a:srgbClr val="1E1E4C"/>
+            <a:srgbClr val="F7F8F9"/>
           </a:solidFill>
-          <a:ln/>
+          <a:ln w="9525">
+            <a:solidFill>
+              <a:srgbClr val="D0D5DD"/>
+            </a:solidFill>
+          </a:ln>
         </p:spPr>
         <p:txBody>
           <a:bodyPr/>
@@ -6288,7 +6304,7 @@
             <a:r>
               <a:rPr lang="en-US" sz="1250" dirty="0">
                 <a:solidFill>
-                  <a:srgbClr val="C9D3F5"/>
+                  <a:srgbClr val="1F2429"/>
                 </a:solidFill>
                 <a:latin typeface="Courier New" pitchFamily="34" charset="0"/>
                 <a:ea typeface="Courier New" pitchFamily="34" charset="-122"/>
@@ -6308,7 +6324,7 @@
             <a:r>
               <a:rPr lang="en-US" sz="1250" dirty="0">
                 <a:solidFill>
-                  <a:srgbClr val="C9D3F5"/>
+                  <a:srgbClr val="1F2429"/>
                 </a:solidFill>
                 <a:latin typeface="Courier New" pitchFamily="34" charset="0"/>
                 <a:ea typeface="Courier New" pitchFamily="34" charset="-122"/>
@@ -6328,7 +6344,7 @@
             <a:r>
               <a:rPr lang="en-US" sz="1250" dirty="0">
                 <a:solidFill>
-                  <a:srgbClr val="C9D3F5"/>
+                  <a:srgbClr val="1F2429"/>
                 </a:solidFill>
                 <a:latin typeface="Courier New" pitchFamily="34" charset="0"/>
                 <a:ea typeface="Courier New" pitchFamily="34" charset="-122"/>
@@ -6348,7 +6364,7 @@
             <a:r>
               <a:rPr lang="en-US" sz="1250" dirty="0">
                 <a:solidFill>
-                  <a:srgbClr val="C9D3F5"/>
+                  <a:srgbClr val="1F2429"/>
                 </a:solidFill>
                 <a:latin typeface="Courier New" pitchFamily="34" charset="0"/>
                 <a:ea typeface="Courier New" pitchFamily="34" charset="-122"/>
@@ -6368,7 +6384,7 @@
             <a:r>
               <a:rPr lang="en-US" sz="1250" dirty="0">
                 <a:solidFill>
-                  <a:srgbClr val="C9D3F5"/>
+                  <a:srgbClr val="1F2429"/>
                 </a:solidFill>
                 <a:latin typeface="Courier New" pitchFamily="34" charset="0"/>
                 <a:ea typeface="Courier New" pitchFamily="34" charset="-122"/>
@@ -6388,7 +6404,7 @@
             <a:r>
               <a:rPr lang="en-US" sz="1250" dirty="0">
                 <a:solidFill>
-                  <a:srgbClr val="C9D3F5"/>
+                  <a:srgbClr val="1F2429"/>
                 </a:solidFill>
                 <a:latin typeface="Courier New" pitchFamily="34" charset="0"/>
                 <a:ea typeface="Courier New" pitchFamily="34" charset="-122"/>
@@ -6632,9 +6648,13 @@
             </a:avLst>
           </a:prstGeom>
           <a:solidFill>
-            <a:srgbClr val="1E1E4C"/>
+            <a:srgbClr val="F7F8F9"/>
           </a:solidFill>
-          <a:ln/>
+          <a:ln w="9525">
+            <a:solidFill>
+              <a:srgbClr val="D0D5DD"/>
+            </a:solidFill>
+          </a:ln>
         </p:spPr>
         <p:txBody>
           <a:bodyPr/>
@@ -6671,7 +6691,7 @@
             <a:r>
               <a:rPr lang="en-US" sz="1250" dirty="0">
                 <a:solidFill>
-                  <a:srgbClr val="C9D3F5"/>
+                  <a:srgbClr val="1F2429"/>
                 </a:solidFill>
                 <a:latin typeface="Courier New" pitchFamily="34" charset="0"/>
                 <a:ea typeface="Courier New" pitchFamily="34" charset="-122"/>
@@ -6691,7 +6711,7 @@
             <a:r>
               <a:rPr lang="en-US" sz="1250" dirty="0">
                 <a:solidFill>
-                  <a:srgbClr val="C9D3F5"/>
+                  <a:srgbClr val="1F2429"/>
                 </a:solidFill>
                 <a:latin typeface="Courier New" pitchFamily="34" charset="0"/>
                 <a:ea typeface="Courier New" pitchFamily="34" charset="-122"/>
@@ -6711,7 +6731,7 @@
             <a:r>
               <a:rPr lang="en-US" sz="1250" dirty="0">
                 <a:solidFill>
-                  <a:srgbClr val="C9D3F5"/>
+                  <a:srgbClr val="1F2429"/>
                 </a:solidFill>
                 <a:latin typeface="Courier New" pitchFamily="34" charset="0"/>
                 <a:ea typeface="Courier New" pitchFamily="34" charset="-122"/>
@@ -8509,9 +8529,13 @@
             </a:avLst>
           </a:prstGeom>
           <a:solidFill>
-            <a:srgbClr val="1E1E4C"/>
+            <a:srgbClr val="F7F8F9"/>
           </a:solidFill>
-          <a:ln/>
+          <a:ln w="9525">
+            <a:solidFill>
+              <a:srgbClr val="D0D5DD"/>
+            </a:solidFill>
+          </a:ln>
         </p:spPr>
         <p:txBody>
           <a:bodyPr/>
@@ -8548,7 +8572,7 @@
             <a:r>
               <a:rPr lang="en-US" sz="1250" dirty="0">
                 <a:solidFill>
-                  <a:srgbClr val="C9D3F5"/>
+                  <a:srgbClr val="1F2429"/>
                 </a:solidFill>
                 <a:latin typeface="Courier New" pitchFamily="34" charset="0"/>
                 <a:ea typeface="Courier New" pitchFamily="34" charset="-122"/>
@@ -8568,7 +8592,7 @@
             <a:r>
               <a:rPr lang="en-US" sz="1250" dirty="0">
                 <a:solidFill>
-                  <a:srgbClr val="C9D3F5"/>
+                  <a:srgbClr val="1F2429"/>
                 </a:solidFill>
                 <a:latin typeface="Courier New" pitchFamily="34" charset="0"/>
                 <a:ea typeface="Courier New" pitchFamily="34" charset="-122"/>
@@ -8588,7 +8612,7 @@
             <a:r>
               <a:rPr lang="en-US" sz="1250" dirty="0">
                 <a:solidFill>
-                  <a:srgbClr val="C9D3F5"/>
+                  <a:srgbClr val="1F2429"/>
                 </a:solidFill>
                 <a:latin typeface="Courier New" pitchFamily="34" charset="0"/>
                 <a:ea typeface="Courier New" pitchFamily="34" charset="-122"/>
@@ -8608,7 +8632,7 @@
             <a:r>
               <a:rPr lang="en-US" sz="1250" dirty="0">
                 <a:solidFill>
-                  <a:srgbClr val="C9D3F5"/>
+                  <a:srgbClr val="1F2429"/>
                 </a:solidFill>
                 <a:latin typeface="Courier New" pitchFamily="34" charset="0"/>
                 <a:ea typeface="Courier New" pitchFamily="34" charset="-122"/>
@@ -8628,7 +8652,7 @@
             <a:r>
               <a:rPr lang="en-US" sz="1250" dirty="0">
                 <a:solidFill>
-                  <a:srgbClr val="C9D3F5"/>
+                  <a:srgbClr val="1F2429"/>
                 </a:solidFill>
                 <a:latin typeface="Courier New" pitchFamily="34" charset="0"/>
                 <a:ea typeface="Courier New" pitchFamily="34" charset="-122"/>
@@ -8648,7 +8672,7 @@
             <a:r>
               <a:rPr lang="en-US" sz="1250" dirty="0">
                 <a:solidFill>
-                  <a:srgbClr val="C9D3F5"/>
+                  <a:srgbClr val="1F2429"/>
                 </a:solidFill>
                 <a:latin typeface="Courier New" pitchFamily="34" charset="0"/>
                 <a:ea typeface="Courier New" pitchFamily="34" charset="-122"/>
@@ -8668,7 +8692,7 @@
             <a:r>
               <a:rPr lang="en-US" sz="1250" dirty="0">
                 <a:solidFill>
-                  <a:srgbClr val="C9D3F5"/>
+                  <a:srgbClr val="1F2429"/>
                 </a:solidFill>
                 <a:latin typeface="Courier New" pitchFamily="34" charset="0"/>
                 <a:ea typeface="Courier New" pitchFamily="34" charset="-122"/>
@@ -8688,7 +8712,7 @@
             <a:r>
               <a:rPr lang="en-US" sz="1250" dirty="0">
                 <a:solidFill>
-                  <a:srgbClr val="C9D3F5"/>
+                  <a:srgbClr val="1F2429"/>
                 </a:solidFill>
                 <a:latin typeface="Courier New" pitchFamily="34" charset="0"/>
                 <a:ea typeface="Courier New" pitchFamily="34" charset="-122"/>
@@ -11323,9 +11347,13 @@
             </a:avLst>
           </a:prstGeom>
           <a:solidFill>
-            <a:srgbClr val="1E1E4C"/>
+            <a:srgbClr val="F7F8F9"/>
           </a:solidFill>
-          <a:ln/>
+          <a:ln w="9525">
+            <a:solidFill>
+              <a:srgbClr val="D0D5DD"/>
+            </a:solidFill>
+          </a:ln>
         </p:spPr>
         <p:txBody>
           <a:bodyPr/>
@@ -11362,7 +11390,7 @@
             <a:r>
               <a:rPr lang="en-US" sz="1250" dirty="0">
                 <a:solidFill>
-                  <a:srgbClr val="C9D3F5"/>
+                  <a:srgbClr val="1F2429"/>
                 </a:solidFill>
                 <a:latin typeface="Courier New" pitchFamily="34" charset="0"/>
                 <a:ea typeface="Courier New" pitchFamily="34" charset="-122"/>
@@ -11382,7 +11410,7 @@
             <a:r>
               <a:rPr lang="en-US" sz="1250" dirty="0">
                 <a:solidFill>
-                  <a:srgbClr val="C9D3F5"/>
+                  <a:srgbClr val="1F2429"/>
                 </a:solidFill>
                 <a:latin typeface="Courier New" pitchFamily="34" charset="0"/>
                 <a:ea typeface="Courier New" pitchFamily="34" charset="-122"/>
@@ -11402,7 +11430,7 @@
             <a:r>
               <a:rPr lang="en-US" sz="1250" dirty="0">
                 <a:solidFill>
-                  <a:srgbClr val="C9D3F5"/>
+                  <a:srgbClr val="1F2429"/>
                 </a:solidFill>
                 <a:latin typeface="Courier New" pitchFamily="34" charset="0"/>
                 <a:ea typeface="Courier New" pitchFamily="34" charset="-122"/>
@@ -12109,9 +12137,13 @@
             </a:avLst>
           </a:prstGeom>
           <a:solidFill>
-            <a:srgbClr val="1E1E4C"/>
+            <a:srgbClr val="F7F8F9"/>
           </a:solidFill>
-          <a:ln/>
+          <a:ln w="9525">
+            <a:solidFill>
+              <a:srgbClr val="D0D5DD"/>
+            </a:solidFill>
+          </a:ln>
         </p:spPr>
         <p:txBody>
           <a:bodyPr/>
@@ -12148,7 +12180,7 @@
             <a:r>
               <a:rPr lang="en-US" sz="1250" dirty="0">
                 <a:solidFill>
-                  <a:srgbClr val="C9D3F5"/>
+                  <a:srgbClr val="1F2429"/>
                 </a:solidFill>
                 <a:latin typeface="Courier New" pitchFamily="34" charset="0"/>
                 <a:ea typeface="Courier New" pitchFamily="34" charset="-122"/>
@@ -12168,7 +12200,7 @@
             <a:r>
               <a:rPr lang="en-US" sz="1250" dirty="0">
                 <a:solidFill>
-                  <a:srgbClr val="C9D3F5"/>
+                  <a:srgbClr val="1F2429"/>
                 </a:solidFill>
                 <a:latin typeface="Courier New" pitchFamily="34" charset="0"/>
                 <a:ea typeface="Courier New" pitchFamily="34" charset="-122"/>
@@ -12188,7 +12220,7 @@
             <a:r>
               <a:rPr lang="en-US" sz="1250" dirty="0">
                 <a:solidFill>
-                  <a:srgbClr val="C9D3F5"/>
+                  <a:srgbClr val="1F2429"/>
                 </a:solidFill>
                 <a:latin typeface="Courier New" pitchFamily="34" charset="0"/>
                 <a:ea typeface="Courier New" pitchFamily="34" charset="-122"/>
@@ -12208,7 +12240,7 @@
             <a:r>
               <a:rPr lang="en-US" sz="1250" dirty="0">
                 <a:solidFill>
-                  <a:srgbClr val="C9D3F5"/>
+                  <a:srgbClr val="1F2429"/>
                 </a:solidFill>
                 <a:latin typeface="Courier New" pitchFamily="34" charset="0"/>
                 <a:ea typeface="Courier New" pitchFamily="34" charset="-122"/>
@@ -12228,7 +12260,7 @@
             <a:r>
               <a:rPr lang="en-US" sz="1250" dirty="0">
                 <a:solidFill>
-                  <a:srgbClr val="C9D3F5"/>
+                  <a:srgbClr val="1F2429"/>
                 </a:solidFill>
                 <a:latin typeface="Courier New" pitchFamily="34" charset="0"/>
                 <a:ea typeface="Courier New" pitchFamily="34" charset="-122"/>
@@ -12472,9 +12504,13 @@
             </a:avLst>
           </a:prstGeom>
           <a:solidFill>
-            <a:srgbClr val="1E1E4C"/>
+            <a:srgbClr val="F7F8F9"/>
           </a:solidFill>
-          <a:ln/>
+          <a:ln w="9525">
+            <a:solidFill>
+              <a:srgbClr val="D0D5DD"/>
+            </a:solidFill>
+          </a:ln>
         </p:spPr>
         <p:txBody>
           <a:bodyPr/>
@@ -12511,7 +12547,7 @@
             <a:r>
               <a:rPr lang="en-US" sz="1250" dirty="0">
                 <a:solidFill>
-                  <a:srgbClr val="C9D3F5"/>
+                  <a:srgbClr val="1F2429"/>
                 </a:solidFill>
                 <a:latin typeface="Courier New" pitchFamily="34" charset="0"/>
                 <a:ea typeface="Courier New" pitchFamily="34" charset="-122"/>
@@ -12755,9 +12791,13 @@
             </a:avLst>
           </a:prstGeom>
           <a:solidFill>
-            <a:srgbClr val="1E1E4C"/>
+            <a:srgbClr val="F7F8F9"/>
           </a:solidFill>
-          <a:ln/>
+          <a:ln w="9525">
+            <a:solidFill>
+              <a:srgbClr val="D0D5DD"/>
+            </a:solidFill>
+          </a:ln>
         </p:spPr>
         <p:txBody>
           <a:bodyPr/>
@@ -12794,7 +12834,7 @@
             <a:r>
               <a:rPr lang="en-US" sz="1250" dirty="0">
                 <a:solidFill>
-                  <a:srgbClr val="C9D3F5"/>
+                  <a:srgbClr val="1F2429"/>
                 </a:solidFill>
                 <a:latin typeface="Courier New" pitchFamily="34" charset="0"/>
                 <a:ea typeface="Courier New" pitchFamily="34" charset="-122"/>
@@ -12814,7 +12854,7 @@
             <a:r>
               <a:rPr lang="en-US" sz="1250" dirty="0">
                 <a:solidFill>
-                  <a:srgbClr val="C9D3F5"/>
+                  <a:srgbClr val="1F2429"/>
                 </a:solidFill>
                 <a:latin typeface="Courier New" pitchFamily="34" charset="0"/>
                 <a:ea typeface="Courier New" pitchFamily="34" charset="-122"/>
@@ -12834,7 +12874,7 @@
             <a:r>
               <a:rPr lang="en-US" sz="1250" dirty="0">
                 <a:solidFill>
-                  <a:srgbClr val="C9D3F5"/>
+                  <a:srgbClr val="1F2429"/>
                 </a:solidFill>
                 <a:latin typeface="Courier New" pitchFamily="34" charset="0"/>
                 <a:ea typeface="Courier New" pitchFamily="34" charset="-122"/>
@@ -12854,7 +12894,7 @@
             <a:r>
               <a:rPr lang="en-US" sz="1250" dirty="0">
                 <a:solidFill>
-                  <a:srgbClr val="C9D3F5"/>
+                  <a:srgbClr val="1F2429"/>
                 </a:solidFill>
                 <a:latin typeface="Courier New" pitchFamily="34" charset="0"/>
                 <a:ea typeface="Courier New" pitchFamily="34" charset="-122"/>
@@ -12883,7 +12923,7 @@
             <a:r>
               <a:rPr lang="en-US" sz="1250" dirty="0">
                 <a:solidFill>
-                  <a:srgbClr val="C9D3F5"/>
+                  <a:srgbClr val="1F2429"/>
                 </a:solidFill>
                 <a:latin typeface="Courier New" pitchFamily="34" charset="0"/>
                 <a:ea typeface="Courier New" pitchFamily="34" charset="-122"/>
@@ -12903,7 +12943,7 @@
             <a:r>
               <a:rPr lang="en-US" sz="1250" dirty="0">
                 <a:solidFill>
-                  <a:srgbClr val="C9D3F5"/>
+                  <a:srgbClr val="1F2429"/>
                 </a:solidFill>
                 <a:latin typeface="Courier New" pitchFamily="34" charset="0"/>
                 <a:ea typeface="Courier New" pitchFamily="34" charset="-122"/>
@@ -12923,7 +12963,7 @@
             <a:r>
               <a:rPr lang="en-US" sz="1250" dirty="0">
                 <a:solidFill>
-                  <a:srgbClr val="C9D3F5"/>
+                  <a:srgbClr val="1F2429"/>
                 </a:solidFill>
                 <a:latin typeface="Courier New" pitchFamily="34" charset="0"/>
                 <a:ea typeface="Courier New" pitchFamily="34" charset="-122"/>
@@ -12943,7 +12983,7 @@
             <a:r>
               <a:rPr lang="en-US" sz="1250" dirty="0">
                 <a:solidFill>
-                  <a:srgbClr val="C9D3F5"/>
+                  <a:srgbClr val="1F2429"/>
                 </a:solidFill>
                 <a:latin typeface="Courier New" pitchFamily="34" charset="0"/>
                 <a:ea typeface="Courier New" pitchFamily="34" charset="-122"/>
@@ -13187,9 +13227,13 @@
             </a:avLst>
           </a:prstGeom>
           <a:solidFill>
-            <a:srgbClr val="1E1E4C"/>
+            <a:srgbClr val="F7F8F9"/>
           </a:solidFill>
-          <a:ln/>
+          <a:ln w="9525">
+            <a:solidFill>
+              <a:srgbClr val="D0D5DD"/>
+            </a:solidFill>
+          </a:ln>
         </p:spPr>
         <p:txBody>
           <a:bodyPr/>
@@ -13226,7 +13270,7 @@
             <a:r>
               <a:rPr lang="en-US" sz="1250" dirty="0">
                 <a:solidFill>
-                  <a:srgbClr val="C9D3F5"/>
+                  <a:srgbClr val="1F2429"/>
                 </a:solidFill>
                 <a:latin typeface="Courier New" pitchFamily="34" charset="0"/>
                 <a:ea typeface="Courier New" pitchFamily="34" charset="-122"/>
@@ -13246,7 +13290,7 @@
             <a:r>
               <a:rPr lang="en-US" sz="1250" dirty="0">
                 <a:solidFill>
-                  <a:srgbClr val="C9D3F5"/>
+                  <a:srgbClr val="1F2429"/>
                 </a:solidFill>
                 <a:latin typeface="Courier New" pitchFamily="34" charset="0"/>
                 <a:ea typeface="Courier New" pitchFamily="34" charset="-122"/>
@@ -13266,7 +13310,7 @@
             <a:r>
               <a:rPr lang="en-US" sz="1250" dirty="0">
                 <a:solidFill>
-                  <a:srgbClr val="C9D3F5"/>
+                  <a:srgbClr val="1F2429"/>
                 </a:solidFill>
                 <a:latin typeface="Courier New" pitchFamily="34" charset="0"/>
                 <a:ea typeface="Courier New" pitchFamily="34" charset="-122"/>
@@ -13286,7 +13330,7 @@
             <a:r>
               <a:rPr lang="en-US" sz="1250" dirty="0">
                 <a:solidFill>
-                  <a:srgbClr val="C9D3F5"/>
+                  <a:srgbClr val="1F2429"/>
                 </a:solidFill>
                 <a:latin typeface="Courier New" pitchFamily="34" charset="0"/>
                 <a:ea typeface="Courier New" pitchFamily="34" charset="-122"/>
@@ -13306,7 +13350,7 @@
             <a:r>
               <a:rPr lang="en-US" sz="1250" dirty="0">
                 <a:solidFill>
-                  <a:srgbClr val="C9D3F5"/>
+                  <a:srgbClr val="1F2429"/>
                 </a:solidFill>
                 <a:latin typeface="Courier New" pitchFamily="34" charset="0"/>
                 <a:ea typeface="Courier New" pitchFamily="34" charset="-122"/>
@@ -13326,7 +13370,7 @@
             <a:r>
               <a:rPr lang="en-US" sz="1250" dirty="0">
                 <a:solidFill>
-                  <a:srgbClr val="C9D3F5"/>
+                  <a:srgbClr val="1F2429"/>
                 </a:solidFill>
                 <a:latin typeface="Courier New" pitchFamily="34" charset="0"/>
                 <a:ea typeface="Courier New" pitchFamily="34" charset="-122"/>
@@ -13346,7 +13390,7 @@
             <a:r>
               <a:rPr lang="en-US" sz="1250" dirty="0">
                 <a:solidFill>
-                  <a:srgbClr val="C9D3F5"/>
+                  <a:srgbClr val="1F2429"/>
                 </a:solidFill>
                 <a:latin typeface="Courier New" pitchFamily="34" charset="0"/>
                 <a:ea typeface="Courier New" pitchFamily="34" charset="-122"/>
@@ -13366,7 +13410,7 @@
             <a:r>
               <a:rPr lang="en-US" sz="1250" dirty="0">
                 <a:solidFill>
-                  <a:srgbClr val="C9D3F5"/>
+                  <a:srgbClr val="1F2429"/>
                 </a:solidFill>
                 <a:latin typeface="Courier New" pitchFamily="34" charset="0"/>
                 <a:ea typeface="Courier New" pitchFamily="34" charset="-122"/>
@@ -13386,7 +13430,7 @@
             <a:r>
               <a:rPr lang="en-US" sz="1250" dirty="0">
                 <a:solidFill>
-                  <a:srgbClr val="C9D3F5"/>
+                  <a:srgbClr val="1F2429"/>
                 </a:solidFill>
                 <a:latin typeface="Courier New" pitchFamily="34" charset="0"/>
                 <a:ea typeface="Courier New" pitchFamily="34" charset="-122"/>
@@ -13630,9 +13674,13 @@
             </a:avLst>
           </a:prstGeom>
           <a:solidFill>
-            <a:srgbClr val="1E1E4C"/>
+            <a:srgbClr val="F7F8F9"/>
           </a:solidFill>
-          <a:ln/>
+          <a:ln w="9525">
+            <a:solidFill>
+              <a:srgbClr val="D0D5DD"/>
+            </a:solidFill>
+          </a:ln>
         </p:spPr>
         <p:txBody>
           <a:bodyPr/>
@@ -13669,7 +13717,7 @@
             <a:r>
               <a:rPr lang="en-US" sz="1200" dirty="0">
                 <a:solidFill>
-                  <a:srgbClr val="C9D3F5"/>
+                  <a:srgbClr val="1F2429"/>
                 </a:solidFill>
                 <a:latin typeface="Courier New" pitchFamily="34" charset="0"/>
                 <a:ea typeface="Courier New" pitchFamily="34" charset="-122"/>
@@ -13689,7 +13737,7 @@
             <a:r>
               <a:rPr lang="en-US" sz="1200" dirty="0">
                 <a:solidFill>
-                  <a:srgbClr val="C9D3F5"/>
+                  <a:srgbClr val="1F2429"/>
                 </a:solidFill>
                 <a:latin typeface="Courier New" pitchFamily="34" charset="0"/>
                 <a:ea typeface="Courier New" pitchFamily="34" charset="-122"/>
@@ -13709,7 +13757,7 @@
             <a:r>
               <a:rPr lang="en-US" sz="1200" dirty="0">
                 <a:solidFill>
-                  <a:srgbClr val="C9D3F5"/>
+                  <a:srgbClr val="1F2429"/>
                 </a:solidFill>
                 <a:latin typeface="Courier New" pitchFamily="34" charset="0"/>
                 <a:ea typeface="Courier New" pitchFamily="34" charset="-122"/>
@@ -13738,7 +13786,7 @@
             <a:r>
               <a:rPr lang="en-US" sz="1200" dirty="0">
                 <a:solidFill>
-                  <a:srgbClr val="C9D3F5"/>
+                  <a:srgbClr val="1F2429"/>
                 </a:solidFill>
                 <a:latin typeface="Courier New" pitchFamily="34" charset="0"/>
                 <a:ea typeface="Courier New" pitchFamily="34" charset="-122"/>
@@ -13758,7 +13806,7 @@
             <a:r>
               <a:rPr lang="en-US" sz="1200" dirty="0">
                 <a:solidFill>
-                  <a:srgbClr val="C9D3F5"/>
+                  <a:srgbClr val="1F2429"/>
                 </a:solidFill>
                 <a:latin typeface="Courier New" pitchFamily="34" charset="0"/>
                 <a:ea typeface="Courier New" pitchFamily="34" charset="-122"/>
@@ -13778,7 +13826,7 @@
             <a:r>
               <a:rPr lang="en-US" sz="1200" dirty="0">
                 <a:solidFill>
-                  <a:srgbClr val="C9D3F5"/>
+                  <a:srgbClr val="1F2429"/>
                 </a:solidFill>
                 <a:latin typeface="Courier New" pitchFamily="34" charset="0"/>
                 <a:ea typeface="Courier New" pitchFamily="34" charset="-122"/>
@@ -13807,7 +13855,7 @@
             <a:r>
               <a:rPr lang="en-US" sz="1200" dirty="0">
                 <a:solidFill>
-                  <a:srgbClr val="C9D3F5"/>
+                  <a:srgbClr val="1F2429"/>
                 </a:solidFill>
                 <a:latin typeface="Courier New" pitchFamily="34" charset="0"/>
                 <a:ea typeface="Courier New" pitchFamily="34" charset="-122"/>
@@ -13827,7 +13875,7 @@
             <a:r>
               <a:rPr lang="en-US" sz="1200" dirty="0">
                 <a:solidFill>
-                  <a:srgbClr val="C9D3F5"/>
+                  <a:srgbClr val="1F2429"/>
                 </a:solidFill>
                 <a:latin typeface="Courier New" pitchFamily="34" charset="0"/>
                 <a:ea typeface="Courier New" pitchFamily="34" charset="-122"/>
@@ -13847,7 +13895,7 @@
             <a:r>
               <a:rPr lang="en-US" sz="1200" dirty="0">
                 <a:solidFill>
-                  <a:srgbClr val="C9D3F5"/>
+                  <a:srgbClr val="1F2429"/>
                 </a:solidFill>
                 <a:latin typeface="Courier New" pitchFamily="34" charset="0"/>
                 <a:ea typeface="Courier New" pitchFamily="34" charset="-122"/>
@@ -14091,9 +14139,13 @@
             </a:avLst>
           </a:prstGeom>
           <a:solidFill>
-            <a:srgbClr val="1E1E4C"/>
+            <a:srgbClr val="F7F8F9"/>
           </a:solidFill>
-          <a:ln/>
+          <a:ln w="9525">
+            <a:solidFill>
+              <a:srgbClr val="D0D5DD"/>
+            </a:solidFill>
+          </a:ln>
         </p:spPr>
         <p:txBody>
           <a:bodyPr/>
@@ -14130,7 +14182,7 @@
             <a:r>
               <a:rPr lang="en-US" sz="1250" dirty="0">
                 <a:solidFill>
-                  <a:srgbClr val="C9D3F5"/>
+                  <a:srgbClr val="1F2429"/>
                 </a:solidFill>
                 <a:latin typeface="Courier New" pitchFamily="34" charset="0"/>
                 <a:ea typeface="Courier New" pitchFamily="34" charset="-122"/>
@@ -14150,7 +14202,7 @@
             <a:r>
               <a:rPr lang="en-US" sz="1250" dirty="0">
                 <a:solidFill>
-                  <a:srgbClr val="C9D3F5"/>
+                  <a:srgbClr val="1F2429"/>
                 </a:solidFill>
                 <a:latin typeface="Courier New" pitchFamily="34" charset="0"/>
                 <a:ea typeface="Courier New" pitchFamily="34" charset="-122"/>
@@ -14170,7 +14222,7 @@
             <a:r>
               <a:rPr lang="en-US" sz="1250" dirty="0">
                 <a:solidFill>
-                  <a:srgbClr val="C9D3F5"/>
+                  <a:srgbClr val="1F2429"/>
                 </a:solidFill>
                 <a:latin typeface="Courier New" pitchFamily="34" charset="0"/>
                 <a:ea typeface="Courier New" pitchFamily="34" charset="-122"/>
@@ -14190,7 +14242,7 @@
             <a:r>
               <a:rPr lang="en-US" sz="1250" dirty="0">
                 <a:solidFill>
-                  <a:srgbClr val="C9D3F5"/>
+                  <a:srgbClr val="1F2429"/>
                 </a:solidFill>
                 <a:latin typeface="Courier New" pitchFamily="34" charset="0"/>
                 <a:ea typeface="Courier New" pitchFamily="34" charset="-122"/>
@@ -14210,7 +14262,7 @@
             <a:r>
               <a:rPr lang="en-US" sz="1250" dirty="0">
                 <a:solidFill>
-                  <a:srgbClr val="C9D3F5"/>
+                  <a:srgbClr val="1F2429"/>
                 </a:solidFill>
                 <a:latin typeface="Courier New" pitchFamily="34" charset="0"/>
                 <a:ea typeface="Courier New" pitchFamily="34" charset="-122"/>
@@ -14230,7 +14282,7 @@
             <a:r>
               <a:rPr lang="en-US" sz="1250" dirty="0">
                 <a:solidFill>
-                  <a:srgbClr val="C9D3F5"/>
+                  <a:srgbClr val="1F2429"/>
                 </a:solidFill>
                 <a:latin typeface="Courier New" pitchFamily="34" charset="0"/>
                 <a:ea typeface="Courier New" pitchFamily="34" charset="-122"/>
@@ -14474,9 +14526,13 @@
             </a:avLst>
           </a:prstGeom>
           <a:solidFill>
-            <a:srgbClr val="1E1E4C"/>
+            <a:srgbClr val="F7F8F9"/>
           </a:solidFill>
-          <a:ln/>
+          <a:ln w="9525">
+            <a:solidFill>
+              <a:srgbClr val="D0D5DD"/>
+            </a:solidFill>
+          </a:ln>
         </p:spPr>
         <p:txBody>
           <a:bodyPr/>
@@ -14513,7 +14569,7 @@
             <a:r>
               <a:rPr lang="en-US" sz="1000" dirty="0">
                 <a:solidFill>
-                  <a:srgbClr val="C9D3F5"/>
+                  <a:srgbClr val="1F2429"/>
                 </a:solidFill>
                 <a:latin typeface="Courier New" pitchFamily="34" charset="0"/>
                 <a:ea typeface="Courier New" pitchFamily="34" charset="-122"/>
@@ -14533,7 +14589,7 @@
             <a:r>
               <a:rPr lang="en-US" sz="1000" dirty="0">
                 <a:solidFill>
-                  <a:srgbClr val="C9D3F5"/>
+                  <a:srgbClr val="1F2429"/>
                 </a:solidFill>
                 <a:latin typeface="Courier New" pitchFamily="34" charset="0"/>
                 <a:ea typeface="Courier New" pitchFamily="34" charset="-122"/>
@@ -14553,7 +14609,7 @@
             <a:r>
               <a:rPr lang="en-US" sz="1000" dirty="0">
                 <a:solidFill>
-                  <a:srgbClr val="C9D3F5"/>
+                  <a:srgbClr val="1F2429"/>
                 </a:solidFill>
                 <a:latin typeface="Courier New" pitchFamily="34" charset="0"/>
                 <a:ea typeface="Courier New" pitchFamily="34" charset="-122"/>
@@ -14573,7 +14629,7 @@
             <a:r>
               <a:rPr lang="en-US" sz="1000" dirty="0">
                 <a:solidFill>
-                  <a:srgbClr val="C9D3F5"/>
+                  <a:srgbClr val="1F2429"/>
                 </a:solidFill>
                 <a:latin typeface="Courier New" pitchFamily="34" charset="0"/>
                 <a:ea typeface="Courier New" pitchFamily="34" charset="-122"/>
@@ -14593,7 +14649,7 @@
             <a:r>
               <a:rPr lang="en-US" sz="1000" dirty="0">
                 <a:solidFill>
-                  <a:srgbClr val="C9D3F5"/>
+                  <a:srgbClr val="1F2429"/>
                 </a:solidFill>
                 <a:latin typeface="Courier New" pitchFamily="34" charset="0"/>
                 <a:ea typeface="Courier New" pitchFamily="34" charset="-122"/>
@@ -14613,7 +14669,7 @@
             <a:r>
               <a:rPr lang="en-US" sz="1000" dirty="0">
                 <a:solidFill>
-                  <a:srgbClr val="C9D3F5"/>
+                  <a:srgbClr val="1F2429"/>
                 </a:solidFill>
                 <a:latin typeface="Courier New" pitchFamily="34" charset="0"/>
                 <a:ea typeface="Courier New" pitchFamily="34" charset="-122"/>
@@ -14633,7 +14689,7 @@
             <a:r>
               <a:rPr lang="en-US" sz="1000" dirty="0">
                 <a:solidFill>
-                  <a:srgbClr val="C9D3F5"/>
+                  <a:srgbClr val="1F2429"/>
                 </a:solidFill>
                 <a:latin typeface="Courier New" pitchFamily="34" charset="0"/>
                 <a:ea typeface="Courier New" pitchFamily="34" charset="-122"/>
@@ -14653,7 +14709,7 @@
             <a:r>
               <a:rPr lang="en-US" sz="1000" dirty="0">
                 <a:solidFill>
-                  <a:srgbClr val="C9D3F5"/>
+                  <a:srgbClr val="1F2429"/>
                 </a:solidFill>
                 <a:latin typeface="Courier New" pitchFamily="34" charset="0"/>
                 <a:ea typeface="Courier New" pitchFamily="34" charset="-122"/>
@@ -14673,7 +14729,7 @@
             <a:r>
               <a:rPr lang="en-US" sz="1000" dirty="0">
                 <a:solidFill>
-                  <a:srgbClr val="C9D3F5"/>
+                  <a:srgbClr val="1F2429"/>
                 </a:solidFill>
                 <a:latin typeface="Courier New" pitchFamily="34" charset="0"/>
                 <a:ea typeface="Courier New" pitchFamily="34" charset="-122"/>
@@ -14693,7 +14749,7 @@
             <a:r>
               <a:rPr lang="en-US" sz="1000" dirty="0">
                 <a:solidFill>
-                  <a:srgbClr val="C9D3F5"/>
+                  <a:srgbClr val="1F2429"/>
                 </a:solidFill>
                 <a:latin typeface="Courier New" pitchFamily="34" charset="0"/>
                 <a:ea typeface="Courier New" pitchFamily="34" charset="-122"/>
@@ -14713,7 +14769,7 @@
             <a:r>
               <a:rPr lang="en-US" sz="1000" dirty="0">
                 <a:solidFill>
-                  <a:srgbClr val="C9D3F5"/>
+                  <a:srgbClr val="1F2429"/>
                 </a:solidFill>
                 <a:latin typeface="Courier New" pitchFamily="34" charset="0"/>
                 <a:ea typeface="Courier New" pitchFamily="34" charset="-122"/>
@@ -14733,7 +14789,7 @@
             <a:r>
               <a:rPr lang="en-US" sz="1000" dirty="0">
                 <a:solidFill>
-                  <a:srgbClr val="C9D3F5"/>
+                  <a:srgbClr val="1F2429"/>
                 </a:solidFill>
                 <a:latin typeface="Courier New" pitchFamily="34" charset="0"/>
                 <a:ea typeface="Courier New" pitchFamily="34" charset="-122"/>
@@ -14753,7 +14809,7 @@
             <a:r>
               <a:rPr lang="en-US" sz="1000" dirty="0">
                 <a:solidFill>
-                  <a:srgbClr val="C9D3F5"/>
+                  <a:srgbClr val="1F2429"/>
                 </a:solidFill>
                 <a:latin typeface="Courier New" pitchFamily="34" charset="0"/>
                 <a:ea typeface="Courier New" pitchFamily="34" charset="-122"/>
@@ -14773,7 +14829,7 @@
             <a:r>
               <a:rPr lang="en-US" sz="1000" dirty="0">
                 <a:solidFill>
-                  <a:srgbClr val="C9D3F5"/>
+                  <a:srgbClr val="1F2429"/>
                 </a:solidFill>
                 <a:latin typeface="Courier New" pitchFamily="34" charset="0"/>
                 <a:ea typeface="Courier New" pitchFamily="34" charset="-122"/>
@@ -16317,7 +16373,7 @@
         <p:spPr>
           <a:xfrm>
             <a:off x="640080" y="1965960"/>
-            <a:ext cx="10911535" cy="1737360"/>
+            <a:ext cx="10911535" cy="3657600"/>
           </a:xfrm>
           <a:prstGeom prst="roundRect">
             <a:avLst>
@@ -16348,7 +16404,7 @@
         <p:spPr>
           <a:xfrm>
             <a:off x="868680" y="2103120"/>
-            <a:ext cx="10454335" cy="274320"/>
+            <a:ext cx="10454335" cy="400000"/>
           </a:xfrm>
           <a:prstGeom prst="rect">
             <a:avLst/>
@@ -16364,7 +16420,7 @@
               <a:buNone/>
             </a:pPr>
             <a:r>
-              <a:rPr lang="en-US" sz="1000" b="1" spc="200" kern="0" dirty="0">
+              <a:rPr lang="en-US" sz="1800" b="1" spc="200" kern="0" dirty="0">
                 <a:solidFill>
                   <a:srgbClr val="1F7A46"/>
                 </a:solidFill>
@@ -16374,7 +16430,7 @@
               </a:rPr>
               <a:t>TIP</a:t>
             </a:r>
-            <a:endParaRPr lang="en-US" sz="1000" dirty="0"/>
+            <a:endParaRPr lang="en-US" sz="1800" dirty="0"/>
           </a:p>
         </p:txBody>
       </p:sp>
@@ -16386,8 +16442,8 @@
         </p:nvSpPr>
         <p:spPr>
           <a:xfrm>
-            <a:off x="868680" y="2404872"/>
-            <a:ext cx="10454335" cy="1143000"/>
+            <a:off x="868680" y="2795960"/>
+            <a:ext cx="10454335" cy="2500000"/>
           </a:xfrm>
           <a:prstGeom prst="rect">
             <a:avLst/>
@@ -16396,14 +16452,14 @@
           <a:ln/>
         </p:spPr>
         <p:txBody>
-          <a:bodyPr wrap="square" lIns="0" tIns="0" rIns="0" bIns="0" rtlCol="0" anchor="t"/>
+          <a:bodyPr wrap="square" lIns="0" tIns="0" rIns="0" bIns="0" rtlCol="0" anchor="ctr"/>
           <a:lstStyle/>
           <a:p>
             <a:pPr indent="0" marL="0">
               <a:buNone/>
             </a:pPr>
             <a:r>
-              <a:rPr lang="en-US" sz="1250" dirty="0">
+              <a:rPr lang="en-US" sz="2800" dirty="0">
                 <a:solidFill>
                   <a:srgbClr val="26262F"/>
                 </a:solidFill>
@@ -16413,7 +16469,7 @@
               </a:rPr>
               <a:t>Not every browser supports every HTML5 feature. Check caniuse.com before relying on a newer one, and design your page so it still works reasonably well in older browsers while enhancing the experience for those that support more.</a:t>
             </a:r>
-            <a:endParaRPr lang="en-US" sz="1250" dirty="0"/>
+            <a:endParaRPr lang="en-US" sz="2800" dirty="0"/>
           </a:p>
         </p:txBody>
       </p:sp>
@@ -18978,9 +19034,13 @@
             </a:avLst>
           </a:prstGeom>
           <a:solidFill>
-            <a:srgbClr val="1E1E4C"/>
+            <a:srgbClr val="F7F8F9"/>
           </a:solidFill>
-          <a:ln/>
+          <a:ln w="9525">
+            <a:solidFill>
+              <a:srgbClr val="D0D5DD"/>
+            </a:solidFill>
+          </a:ln>
         </p:spPr>
         <p:txBody>
           <a:bodyPr/>
@@ -19017,7 +19077,7 @@
             <a:r>
               <a:rPr lang="en-US" sz="1250" dirty="0">
                 <a:solidFill>
-                  <a:srgbClr val="C9D3F5"/>
+                  <a:srgbClr val="1F2429"/>
                 </a:solidFill>
                 <a:latin typeface="Courier New" pitchFamily="34" charset="0"/>
                 <a:ea typeface="Courier New" pitchFamily="34" charset="-122"/>
@@ -19037,7 +19097,7 @@
             <a:r>
               <a:rPr lang="en-US" sz="1250" dirty="0">
                 <a:solidFill>
-                  <a:srgbClr val="C9D3F5"/>
+                  <a:srgbClr val="1F2429"/>
                 </a:solidFill>
                 <a:latin typeface="Courier New" pitchFamily="34" charset="0"/>
                 <a:ea typeface="Courier New" pitchFamily="34" charset="-122"/>
@@ -19281,9 +19341,13 @@
             </a:avLst>
           </a:prstGeom>
           <a:solidFill>
-            <a:srgbClr val="1E1E4C"/>
+            <a:srgbClr val="F7F8F9"/>
           </a:solidFill>
-          <a:ln/>
+          <a:ln w="9525">
+            <a:solidFill>
+              <a:srgbClr val="D0D5DD"/>
+            </a:solidFill>
+          </a:ln>
         </p:spPr>
         <p:txBody>
           <a:bodyPr/>
@@ -19320,7 +19384,7 @@
             <a:r>
               <a:rPr lang="en-US" sz="1200" dirty="0">
                 <a:solidFill>
-                  <a:srgbClr val="C9D3F5"/>
+                  <a:srgbClr val="1F2429"/>
                 </a:solidFill>
                 <a:latin typeface="Courier New" pitchFamily="34" charset="0"/>
                 <a:ea typeface="Courier New" pitchFamily="34" charset="-122"/>
@@ -19340,7 +19404,7 @@
             <a:r>
               <a:rPr lang="en-US" sz="1200" dirty="0">
                 <a:solidFill>
-                  <a:srgbClr val="C9D3F5"/>
+                  <a:srgbClr val="1F2429"/>
                 </a:solidFill>
                 <a:latin typeface="Courier New" pitchFamily="34" charset="0"/>
                 <a:ea typeface="Courier New" pitchFamily="34" charset="-122"/>
@@ -19360,7 +19424,7 @@
             <a:r>
               <a:rPr lang="en-US" sz="1200" dirty="0">
                 <a:solidFill>
-                  <a:srgbClr val="C9D3F5"/>
+                  <a:srgbClr val="1F2429"/>
                 </a:solidFill>
                 <a:latin typeface="Courier New" pitchFamily="34" charset="0"/>
                 <a:ea typeface="Courier New" pitchFamily="34" charset="-122"/>
@@ -19380,7 +19444,7 @@
             <a:r>
               <a:rPr lang="en-US" sz="1200" dirty="0">
                 <a:solidFill>
-                  <a:srgbClr val="C9D3F5"/>
+                  <a:srgbClr val="1F2429"/>
                 </a:solidFill>
                 <a:latin typeface="Courier New" pitchFamily="34" charset="0"/>
                 <a:ea typeface="Courier New" pitchFamily="34" charset="-122"/>
@@ -19400,7 +19464,7 @@
             <a:r>
               <a:rPr lang="en-US" sz="1200" dirty="0">
                 <a:solidFill>
-                  <a:srgbClr val="C9D3F5"/>
+                  <a:srgbClr val="1F2429"/>
                 </a:solidFill>
                 <a:latin typeface="Courier New" pitchFamily="34" charset="0"/>
                 <a:ea typeface="Courier New" pitchFamily="34" charset="-122"/>
@@ -19420,7 +19484,7 @@
             <a:r>
               <a:rPr lang="en-US" sz="1200" dirty="0">
                 <a:solidFill>
-                  <a:srgbClr val="C9D3F5"/>
+                  <a:srgbClr val="1F2429"/>
                 </a:solidFill>
                 <a:latin typeface="Courier New" pitchFamily="34" charset="0"/>
                 <a:ea typeface="Courier New" pitchFamily="34" charset="-122"/>
@@ -19440,7 +19504,7 @@
             <a:r>
               <a:rPr lang="en-US" sz="1200" dirty="0">
                 <a:solidFill>
-                  <a:srgbClr val="C9D3F5"/>
+                  <a:srgbClr val="1F2429"/>
                 </a:solidFill>
                 <a:latin typeface="Courier New" pitchFamily="34" charset="0"/>
                 <a:ea typeface="Courier New" pitchFamily="34" charset="-122"/>
@@ -19460,7 +19524,7 @@
             <a:r>
               <a:rPr lang="en-US" sz="1200" dirty="0">
                 <a:solidFill>
-                  <a:srgbClr val="C9D3F5"/>
+                  <a:srgbClr val="1F2429"/>
                 </a:solidFill>
                 <a:latin typeface="Courier New" pitchFamily="34" charset="0"/>
                 <a:ea typeface="Courier New" pitchFamily="34" charset="-122"/>
@@ -19480,7 +19544,7 @@
             <a:r>
               <a:rPr lang="en-US" sz="1200" dirty="0">
                 <a:solidFill>
-                  <a:srgbClr val="C9D3F5"/>
+                  <a:srgbClr val="1F2429"/>
                 </a:solidFill>
                 <a:latin typeface="Courier New" pitchFamily="34" charset="0"/>
                 <a:ea typeface="Courier New" pitchFamily="34" charset="-122"/>
@@ -19500,7 +19564,7 @@
             <a:r>
               <a:rPr lang="en-US" sz="1200" dirty="0">
                 <a:solidFill>
-                  <a:srgbClr val="C9D3F5"/>
+                  <a:srgbClr val="1F2429"/>
                 </a:solidFill>
                 <a:latin typeface="Courier New" pitchFamily="34" charset="0"/>
                 <a:ea typeface="Courier New" pitchFamily="34" charset="-122"/>
@@ -19520,7 +19584,7 @@
             <a:r>
               <a:rPr lang="en-US" sz="1200" dirty="0">
                 <a:solidFill>
-                  <a:srgbClr val="C9D3F5"/>
+                  <a:srgbClr val="1F2429"/>
                 </a:solidFill>
                 <a:latin typeface="Courier New" pitchFamily="34" charset="0"/>
                 <a:ea typeface="Courier New" pitchFamily="34" charset="-122"/>
@@ -20814,9 +20878,13 @@
             </a:avLst>
           </a:prstGeom>
           <a:solidFill>
-            <a:srgbClr val="1E1E4C"/>
+            <a:srgbClr val="F7F8F9"/>
           </a:solidFill>
-          <a:ln/>
+          <a:ln w="9525">
+            <a:solidFill>
+              <a:srgbClr val="D0D5DD"/>
+            </a:solidFill>
+          </a:ln>
         </p:spPr>
         <p:txBody>
           <a:bodyPr/>
@@ -20853,7 +20921,7 @@
             <a:r>
               <a:rPr lang="en-US" sz="1250" dirty="0">
                 <a:solidFill>
-                  <a:srgbClr val="C9D3F5"/>
+                  <a:srgbClr val="1F2429"/>
                 </a:solidFill>
                 <a:latin typeface="Courier New" pitchFamily="34" charset="0"/>
                 <a:ea typeface="Courier New" pitchFamily="34" charset="-122"/>
@@ -20873,7 +20941,7 @@
             <a:r>
               <a:rPr lang="en-US" sz="1250" dirty="0">
                 <a:solidFill>
-                  <a:srgbClr val="C9D3F5"/>
+                  <a:srgbClr val="1F2429"/>
                 </a:solidFill>
                 <a:latin typeface="Courier New" pitchFamily="34" charset="0"/>
                 <a:ea typeface="Courier New" pitchFamily="34" charset="-122"/>
@@ -20893,7 +20961,7 @@
             <a:r>
               <a:rPr lang="en-US" sz="1250" dirty="0">
                 <a:solidFill>
-                  <a:srgbClr val="C9D3F5"/>
+                  <a:srgbClr val="1F2429"/>
                 </a:solidFill>
                 <a:latin typeface="Courier New" pitchFamily="34" charset="0"/>
                 <a:ea typeface="Courier New" pitchFamily="34" charset="-122"/>
@@ -20913,7 +20981,7 @@
             <a:r>
               <a:rPr lang="en-US" sz="1250" dirty="0">
                 <a:solidFill>
-                  <a:srgbClr val="C9D3F5"/>
+                  <a:srgbClr val="1F2429"/>
                 </a:solidFill>
                 <a:latin typeface="Courier New" pitchFamily="34" charset="0"/>
                 <a:ea typeface="Courier New" pitchFamily="34" charset="-122"/>
